--- a/P5_Maintenez_et_documentez_un_systeme_de_stockage_des_donnees_securise_et_performant_bailleul_aymeric/_projet/_docs/ABAI_P5_03_presentation.pptx
+++ b/P5_Maintenez_et_documentez_un_systeme_de_stockage_des_donnees_securise_et_performant_bailleul_aymeric/_projet/_docs/ABAI_P5_03_presentation.pptx
@@ -5,7 +5,7 @@
     <p:sldMasterId id="2147483648" r:id="rId1"/>
   </p:sldMasterIdLst>
   <p:notesMasterIdLst>
-    <p:notesMasterId r:id="rId13"/>
+    <p:notesMasterId r:id="rId15"/>
   </p:notesMasterIdLst>
   <p:sldIdLst>
     <p:sldId id="257" r:id="rId2"/>
@@ -16,9 +16,11 @@
     <p:sldId id="259" r:id="rId7"/>
     <p:sldId id="260" r:id="rId8"/>
     <p:sldId id="264" r:id="rId9"/>
-    <p:sldId id="261" r:id="rId10"/>
-    <p:sldId id="262" r:id="rId11"/>
-    <p:sldId id="263" r:id="rId12"/>
+    <p:sldId id="267" r:id="rId10"/>
+    <p:sldId id="261" r:id="rId11"/>
+    <p:sldId id="262" r:id="rId12"/>
+    <p:sldId id="268" r:id="rId13"/>
+    <p:sldId id="263" r:id="rId14"/>
   </p:sldIdLst>
   <p:sldSz cx="12192000" cy="6858000"/>
   <p:notesSz cx="6858000" cy="9144000"/>
@@ -207,7 +209,7 @@
           <a:p>
             <a:fld id="{67A35E28-6121-47BC-A77B-DB5D9C99DE05}" type="datetimeFigureOut">
               <a:rPr lang="fr-FR" smtClean="0"/>
-              <a:t>15/10/2025</a:t>
+              <a:t>16/10/2025</a:t>
             </a:fld>
             <a:endParaRPr lang="fr-FR"/>
           </a:p>
@@ -1388,7 +1390,7 @@
             <a:fld id="{B61BEF0D-F0BB-DE4B-95CE-6DB70DBA9567}" type="datetimeFigureOut">
               <a:rPr lang="en-US" dirty="0"/>
               <a:pPr/>
-              <a:t>10/15/2025</a:t>
+              <a:t>10/16/2025</a:t>
             </a:fld>
             <a:endParaRPr lang="en-US" dirty="0"/>
           </a:p>
@@ -1636,7 +1638,7 @@
             <a:fld id="{B61BEF0D-F0BB-DE4B-95CE-6DB70DBA9567}" type="datetimeFigureOut">
               <a:rPr lang="en-US" dirty="0"/>
               <a:pPr/>
-              <a:t>10/15/2025</a:t>
+              <a:t>10/16/2025</a:t>
             </a:fld>
             <a:endParaRPr lang="en-US" dirty="0"/>
           </a:p>
@@ -1947,7 +1949,7 @@
             <a:fld id="{B61BEF0D-F0BB-DE4B-95CE-6DB70DBA9567}" type="datetimeFigureOut">
               <a:rPr lang="en-US" dirty="0"/>
               <a:pPr/>
-              <a:t>10/15/2025</a:t>
+              <a:t>10/16/2025</a:t>
             </a:fld>
             <a:endParaRPr lang="en-US" dirty="0"/>
           </a:p>
@@ -2277,7 +2279,7 @@
             <a:fld id="{B61BEF0D-F0BB-DE4B-95CE-6DB70DBA9567}" type="datetimeFigureOut">
               <a:rPr lang="en-US" dirty="0"/>
               <a:pPr/>
-              <a:t>10/15/2025</a:t>
+              <a:t>10/16/2025</a:t>
             </a:fld>
             <a:endParaRPr lang="en-US" dirty="0"/>
           </a:p>
@@ -2588,7 +2590,7 @@
             <a:fld id="{B61BEF0D-F0BB-DE4B-95CE-6DB70DBA9567}" type="datetimeFigureOut">
               <a:rPr lang="en-US" dirty="0"/>
               <a:pPr/>
-              <a:t>10/15/2025</a:t>
+              <a:t>10/16/2025</a:t>
             </a:fld>
             <a:endParaRPr lang="en-US" dirty="0"/>
           </a:p>
@@ -2978,7 +2980,7 @@
             <a:fld id="{B61BEF0D-F0BB-DE4B-95CE-6DB70DBA9567}" type="datetimeFigureOut">
               <a:rPr lang="en-US" dirty="0"/>
               <a:pPr/>
-              <a:t>10/15/2025</a:t>
+              <a:t>10/16/2025</a:t>
             </a:fld>
             <a:endParaRPr lang="en-US" dirty="0"/>
           </a:p>
@@ -3144,7 +3146,7 @@
           <a:p>
             <a:fld id="{55C6B4A9-1611-4792-9094-5F34BCA07E0B}" type="datetimeFigureOut">
               <a:rPr lang="en-US" dirty="0"/>
-              <a:t>10/15/2025</a:t>
+              <a:t>10/16/2025</a:t>
             </a:fld>
             <a:endParaRPr lang="en-US" dirty="0"/>
           </a:p>
@@ -3320,7 +3322,7 @@
             <a:fld id="{B61BEF0D-F0BB-DE4B-95CE-6DB70DBA9567}" type="datetimeFigureOut">
               <a:rPr lang="en-US" dirty="0"/>
               <a:pPr/>
-              <a:t>10/15/2025</a:t>
+              <a:t>10/16/2025</a:t>
             </a:fld>
             <a:endParaRPr lang="en-US" dirty="0"/>
           </a:p>
@@ -3486,7 +3488,7 @@
           <a:p>
             <a:fld id="{42A54C80-263E-416B-A8E0-580EDEADCBDC}" type="datetimeFigureOut">
               <a:rPr lang="en-US" dirty="0"/>
-              <a:t>10/15/2025</a:t>
+              <a:t>10/16/2025</a:t>
             </a:fld>
             <a:endParaRPr lang="en-US" dirty="0"/>
           </a:p>
@@ -3729,7 +3731,7 @@
             <a:fld id="{B61BEF0D-F0BB-DE4B-95CE-6DB70DBA9567}" type="datetimeFigureOut">
               <a:rPr lang="en-US" dirty="0"/>
               <a:pPr/>
-              <a:t>10/15/2025</a:t>
+              <a:t>10/16/2025</a:t>
             </a:fld>
             <a:endParaRPr lang="en-US" dirty="0"/>
           </a:p>
@@ -3957,7 +3959,7 @@
           <a:p>
             <a:fld id="{42A54C80-263E-416B-A8E0-580EDEADCBDC}" type="datetimeFigureOut">
               <a:rPr lang="en-US" dirty="0"/>
-              <a:t>10/15/2025</a:t>
+              <a:t>10/16/2025</a:t>
             </a:fld>
             <a:endParaRPr lang="en-US" dirty="0"/>
           </a:p>
@@ -4327,7 +4329,7 @@
             <a:fld id="{B61BEF0D-F0BB-DE4B-95CE-6DB70DBA9567}" type="datetimeFigureOut">
               <a:rPr lang="en-US" dirty="0"/>
               <a:pPr/>
-              <a:t>10/15/2025</a:t>
+              <a:t>10/16/2025</a:t>
             </a:fld>
             <a:endParaRPr lang="en-US" dirty="0"/>
           </a:p>
@@ -4447,7 +4449,7 @@
             <a:fld id="{B61BEF0D-F0BB-DE4B-95CE-6DB70DBA9567}" type="datetimeFigureOut">
               <a:rPr lang="en-US" dirty="0"/>
               <a:pPr/>
-              <a:t>10/15/2025</a:t>
+              <a:t>10/16/2025</a:t>
             </a:fld>
             <a:endParaRPr lang="en-US" dirty="0"/>
           </a:p>
@@ -4539,7 +4541,7 @@
             <a:fld id="{B61BEF0D-F0BB-DE4B-95CE-6DB70DBA9567}" type="datetimeFigureOut">
               <a:rPr lang="en-US" dirty="0"/>
               <a:pPr/>
-              <a:t>10/15/2025</a:t>
+              <a:t>10/16/2025</a:t>
             </a:fld>
             <a:endParaRPr lang="en-US" dirty="0"/>
           </a:p>
@@ -4790,7 +4792,7 @@
           <a:p>
             <a:fld id="{42A54C80-263E-416B-A8E0-580EDEADCBDC}" type="datetimeFigureOut">
               <a:rPr lang="en-US" dirty="0"/>
-              <a:t>10/15/2025</a:t>
+              <a:t>10/16/2025</a:t>
             </a:fld>
             <a:endParaRPr lang="en-US" dirty="0"/>
           </a:p>
@@ -5092,7 +5094,7 @@
             <a:fld id="{B61BEF0D-F0BB-DE4B-95CE-6DB70DBA9567}" type="datetimeFigureOut">
               <a:rPr lang="en-US" dirty="0"/>
               <a:pPr/>
-              <a:t>10/15/2025</a:t>
+              <a:t>10/16/2025</a:t>
             </a:fld>
             <a:endParaRPr lang="en-US" dirty="0"/>
           </a:p>
@@ -5790,7 +5792,7 @@
             <a:fld id="{B61BEF0D-F0BB-DE4B-95CE-6DB70DBA9567}" type="datetimeFigureOut">
               <a:rPr lang="en-US" dirty="0"/>
               <a:pPr/>
-              <a:t>10/15/2025</a:t>
+              <a:t>10/16/2025</a:t>
             </a:fld>
             <a:endParaRPr lang="en-US" dirty="0"/>
           </a:p>
@@ -6520,6 +6522,637 @@
         <p:cNvPr id="1" name="">
           <a:extLst>
             <a:ext uri="{FF2B5EF4-FFF2-40B4-BE49-F238E27FC236}">
+              <a16:creationId xmlns:a16="http://schemas.microsoft.com/office/drawing/2014/main" id="{FC37029E-5ECB-2034-8AEA-AF9E810B43D6}"/>
+            </a:ext>
+          </a:extLst>
+        </p:cNvPr>
+        <p:cNvGrpSpPr/>
+        <p:nvPr/>
+      </p:nvGrpSpPr>
+      <p:grpSpPr>
+        <a:xfrm>
+          <a:off x="0" y="0"/>
+          <a:ext cx="0" cy="0"/>
+          <a:chOff x="0" y="0"/>
+          <a:chExt cx="0" cy="0"/>
+        </a:xfrm>
+      </p:grpSpPr>
+      <p:sp>
+        <p:nvSpPr>
+          <p:cNvPr id="4" name="ZoneTexte 3">
+            <a:extLst>
+              <a:ext uri="{FF2B5EF4-FFF2-40B4-BE49-F238E27FC236}">
+                <a16:creationId xmlns:a16="http://schemas.microsoft.com/office/drawing/2014/main" id="{4FC433E4-75F4-0493-887C-5C27BA2BD00B}"/>
+              </a:ext>
+            </a:extLst>
+          </p:cNvPr>
+          <p:cNvSpPr txBox="1"/>
+          <p:nvPr/>
+        </p:nvSpPr>
+        <p:spPr>
+          <a:xfrm>
+            <a:off x="2721935" y="0"/>
+            <a:ext cx="6748129" cy="769441"/>
+          </a:xfrm>
+          <a:prstGeom prst="rect">
+            <a:avLst/>
+          </a:prstGeom>
+          <a:noFill/>
+        </p:spPr>
+        <p:txBody>
+          <a:bodyPr wrap="none" rtlCol="0">
+            <a:spAutoFit/>
+          </a:bodyPr>
+          <a:lstStyle/>
+          <a:p>
+            <a:r>
+              <a:rPr lang="fr-FR" sz="4400" b="1" dirty="0">
+                <a:solidFill>
+                  <a:srgbClr val="0070C0"/>
+                </a:solidFill>
+                <a:effectLst>
+                  <a:outerShdw blurRad="38100" dist="38100" dir="2700000" algn="tl">
+                    <a:srgbClr val="000000">
+                      <a:alpha val="43137"/>
+                    </a:srgbClr>
+                  </a:outerShdw>
+                </a:effectLst>
+                <a:latin typeface="Arial" panose="020B0604020202020204" pitchFamily="34" charset="0"/>
+                <a:cs typeface="Arial" panose="020B0604020202020204" pitchFamily="34" charset="0"/>
+              </a:rPr>
+              <a:t>Déploiement Cloud AWS</a:t>
+            </a:r>
+            <a:endParaRPr lang="fr-FR" sz="3200" b="1" dirty="0">
+              <a:solidFill>
+                <a:srgbClr val="0070C0"/>
+              </a:solidFill>
+              <a:effectLst>
+                <a:outerShdw blurRad="38100" dist="38100" dir="2700000" algn="tl">
+                  <a:srgbClr val="000000">
+                    <a:alpha val="43137"/>
+                  </a:srgbClr>
+                </a:outerShdw>
+              </a:effectLst>
+              <a:latin typeface="Arial" panose="020B0604020202020204" pitchFamily="34" charset="0"/>
+              <a:cs typeface="Arial" panose="020B0604020202020204" pitchFamily="34" charset="0"/>
+            </a:endParaRPr>
+          </a:p>
+        </p:txBody>
+      </p:sp>
+      <p:sp>
+        <p:nvSpPr>
+          <p:cNvPr id="5" name="ZoneTexte 4">
+            <a:extLst>
+              <a:ext uri="{FF2B5EF4-FFF2-40B4-BE49-F238E27FC236}">
+                <a16:creationId xmlns:a16="http://schemas.microsoft.com/office/drawing/2014/main" id="{EB4A2589-3F4B-F0C2-03A7-E50C96907986}"/>
+              </a:ext>
+            </a:extLst>
+          </p:cNvPr>
+          <p:cNvSpPr txBox="1"/>
+          <p:nvPr/>
+        </p:nvSpPr>
+        <p:spPr>
+          <a:xfrm>
+            <a:off x="758645" y="1475531"/>
+            <a:ext cx="2608406" cy="369332"/>
+          </a:xfrm>
+          <a:prstGeom prst="rect">
+            <a:avLst/>
+          </a:prstGeom>
+          <a:noFill/>
+        </p:spPr>
+        <p:txBody>
+          <a:bodyPr wrap="none" rtlCol="0">
+            <a:spAutoFit/>
+          </a:bodyPr>
+          <a:lstStyle/>
+          <a:p>
+            <a:r>
+              <a:rPr lang="fr-FR" b="1" i="1" u="sng" dirty="0">
+                <a:solidFill>
+                  <a:srgbClr val="0070C0"/>
+                </a:solidFill>
+                <a:latin typeface="Arial" panose="020B0604020202020204" pitchFamily="34" charset="0"/>
+                <a:cs typeface="Arial" panose="020B0604020202020204" pitchFamily="34" charset="0"/>
+              </a:rPr>
+              <a:t>Amazon </a:t>
+            </a:r>
+            <a:r>
+              <a:rPr lang="fr-FR" b="1" i="1" u="sng" dirty="0" err="1">
+                <a:solidFill>
+                  <a:srgbClr val="0070C0"/>
+                </a:solidFill>
+                <a:latin typeface="Arial" panose="020B0604020202020204" pitchFamily="34" charset="0"/>
+                <a:cs typeface="Arial" panose="020B0604020202020204" pitchFamily="34" charset="0"/>
+              </a:rPr>
+              <a:t>DocumentDB</a:t>
+            </a:r>
+            <a:endParaRPr lang="fr-FR" i="1" u="sng" dirty="0">
+              <a:solidFill>
+                <a:srgbClr val="0070C0"/>
+              </a:solidFill>
+              <a:latin typeface="Arial" panose="020B0604020202020204" pitchFamily="34" charset="0"/>
+              <a:cs typeface="Arial" panose="020B0604020202020204" pitchFamily="34" charset="0"/>
+            </a:endParaRPr>
+          </a:p>
+        </p:txBody>
+      </p:sp>
+      <p:sp>
+        <p:nvSpPr>
+          <p:cNvPr id="6" name="ZoneTexte 5">
+            <a:extLst>
+              <a:ext uri="{FF2B5EF4-FFF2-40B4-BE49-F238E27FC236}">
+                <a16:creationId xmlns:a16="http://schemas.microsoft.com/office/drawing/2014/main" id="{594D485D-D2E2-9A84-CDB4-D1D44CD9CE71}"/>
+              </a:ext>
+            </a:extLst>
+          </p:cNvPr>
+          <p:cNvSpPr txBox="1"/>
+          <p:nvPr/>
+        </p:nvSpPr>
+        <p:spPr>
+          <a:xfrm>
+            <a:off x="758645" y="1844863"/>
+            <a:ext cx="9669210" cy="830997"/>
+          </a:xfrm>
+          <a:prstGeom prst="rect">
+            <a:avLst/>
+          </a:prstGeom>
+          <a:noFill/>
+        </p:spPr>
+        <p:txBody>
+          <a:bodyPr wrap="square" rtlCol="0">
+            <a:spAutoFit/>
+          </a:bodyPr>
+          <a:lstStyle/>
+          <a:p>
+            <a:r>
+              <a:rPr lang="fr-FR" sz="1600" dirty="0">
+                <a:solidFill>
+                  <a:srgbClr val="0070C0"/>
+                </a:solidFill>
+                <a:latin typeface="Arial" panose="020B0604020202020204" pitchFamily="34" charset="0"/>
+                <a:cs typeface="Arial" panose="020B0604020202020204" pitchFamily="34" charset="0"/>
+              </a:rPr>
+              <a:t>Service compatible MongoDB entièrement géré par AWS.	</a:t>
+            </a:r>
+          </a:p>
+          <a:p>
+            <a:pPr marL="285750" indent="-285750">
+              <a:buFont typeface="Arial" panose="020B0604020202020204" pitchFamily="34" charset="0"/>
+              <a:buChar char="•"/>
+            </a:pPr>
+            <a:r>
+              <a:rPr lang="fr-FR" sz="1600" b="1" dirty="0">
+                <a:solidFill>
+                  <a:srgbClr val="0070C0"/>
+                </a:solidFill>
+                <a:latin typeface="Arial" panose="020B0604020202020204" pitchFamily="34" charset="0"/>
+                <a:cs typeface="Arial" panose="020B0604020202020204" pitchFamily="34" charset="0"/>
+              </a:rPr>
+              <a:t>Simplicité &amp; Maintenance Zéro : </a:t>
+            </a:r>
+            <a:r>
+              <a:rPr lang="fr-FR" sz="1600" dirty="0">
+                <a:solidFill>
+                  <a:srgbClr val="0070C0"/>
+                </a:solidFill>
+                <a:latin typeface="Arial" panose="020B0604020202020204" pitchFamily="34" charset="0"/>
+                <a:cs typeface="Arial" panose="020B0604020202020204" pitchFamily="34" charset="0"/>
+              </a:rPr>
+              <a:t>AWS s'occupe du </a:t>
+            </a:r>
+            <a:r>
+              <a:rPr lang="fr-FR" sz="1600" dirty="0" err="1">
+                <a:solidFill>
+                  <a:srgbClr val="0070C0"/>
+                </a:solidFill>
+                <a:latin typeface="Arial" panose="020B0604020202020204" pitchFamily="34" charset="0"/>
+                <a:cs typeface="Arial" panose="020B0604020202020204" pitchFamily="34" charset="0"/>
+              </a:rPr>
+              <a:t>patching</a:t>
+            </a:r>
+            <a:r>
+              <a:rPr lang="fr-FR" sz="1600" dirty="0">
+                <a:solidFill>
+                  <a:srgbClr val="0070C0"/>
+                </a:solidFill>
+                <a:latin typeface="Arial" panose="020B0604020202020204" pitchFamily="34" charset="0"/>
+                <a:cs typeface="Arial" panose="020B0604020202020204" pitchFamily="34" charset="0"/>
+              </a:rPr>
+              <a:t>, de la sauvegarde, de la scalabilité. </a:t>
+            </a:r>
+          </a:p>
+          <a:p>
+            <a:pPr marL="285750" indent="-285750">
+              <a:buFont typeface="Arial" panose="020B0604020202020204" pitchFamily="34" charset="0"/>
+              <a:buChar char="•"/>
+            </a:pPr>
+            <a:r>
+              <a:rPr lang="fr-FR" sz="1600" b="1" dirty="0">
+                <a:solidFill>
+                  <a:srgbClr val="0070C0"/>
+                </a:solidFill>
+                <a:latin typeface="Arial" panose="020B0604020202020204" pitchFamily="34" charset="0"/>
+                <a:cs typeface="Arial" panose="020B0604020202020204" pitchFamily="34" charset="0"/>
+              </a:rPr>
+              <a:t>Haute Disponibilité : </a:t>
+            </a:r>
+            <a:r>
+              <a:rPr lang="fr-FR" sz="1600" dirty="0">
+                <a:solidFill>
+                  <a:srgbClr val="0070C0"/>
+                </a:solidFill>
+                <a:latin typeface="Arial" panose="020B0604020202020204" pitchFamily="34" charset="0"/>
+                <a:cs typeface="Arial" panose="020B0604020202020204" pitchFamily="34" charset="0"/>
+              </a:rPr>
+              <a:t>Architecture distribuée sur plusieurs zones de disponibilité.</a:t>
+            </a:r>
+          </a:p>
+        </p:txBody>
+      </p:sp>
+      <p:sp>
+        <p:nvSpPr>
+          <p:cNvPr id="3" name="ZoneTexte 2">
+            <a:extLst>
+              <a:ext uri="{FF2B5EF4-FFF2-40B4-BE49-F238E27FC236}">
+                <a16:creationId xmlns:a16="http://schemas.microsoft.com/office/drawing/2014/main" id="{DE6B1774-3AD7-9B12-C3A9-0F18054F8B80}"/>
+              </a:ext>
+            </a:extLst>
+          </p:cNvPr>
+          <p:cNvSpPr txBox="1"/>
+          <p:nvPr/>
+        </p:nvSpPr>
+        <p:spPr>
+          <a:xfrm>
+            <a:off x="758645" y="2873949"/>
+            <a:ext cx="4801314" cy="369332"/>
+          </a:xfrm>
+          <a:prstGeom prst="rect">
+            <a:avLst/>
+          </a:prstGeom>
+          <a:noFill/>
+        </p:spPr>
+        <p:txBody>
+          <a:bodyPr wrap="none" rtlCol="0">
+            <a:spAutoFit/>
+          </a:bodyPr>
+          <a:lstStyle/>
+          <a:p>
+            <a:r>
+              <a:rPr lang="en-US" b="1" i="1" u="sng" dirty="0">
+                <a:solidFill>
+                  <a:srgbClr val="0070C0"/>
+                </a:solidFill>
+                <a:latin typeface="Arial" panose="020B0604020202020204" pitchFamily="34" charset="0"/>
+                <a:cs typeface="Arial" panose="020B0604020202020204" pitchFamily="34" charset="0"/>
+              </a:rPr>
+              <a:t>MongoDB sur EC2 + Auto Scaling Group	</a:t>
+            </a:r>
+            <a:endParaRPr lang="fr-FR" i="1" u="sng" dirty="0">
+              <a:solidFill>
+                <a:srgbClr val="0070C0"/>
+              </a:solidFill>
+              <a:latin typeface="Arial" panose="020B0604020202020204" pitchFamily="34" charset="0"/>
+              <a:cs typeface="Arial" panose="020B0604020202020204" pitchFamily="34" charset="0"/>
+            </a:endParaRPr>
+          </a:p>
+        </p:txBody>
+      </p:sp>
+      <p:sp>
+        <p:nvSpPr>
+          <p:cNvPr id="11" name="ZoneTexte 10">
+            <a:extLst>
+              <a:ext uri="{FF2B5EF4-FFF2-40B4-BE49-F238E27FC236}">
+                <a16:creationId xmlns:a16="http://schemas.microsoft.com/office/drawing/2014/main" id="{A129CC6A-0716-AE8C-8D7A-4363CDC76B03}"/>
+              </a:ext>
+            </a:extLst>
+          </p:cNvPr>
+          <p:cNvSpPr txBox="1"/>
+          <p:nvPr/>
+        </p:nvSpPr>
+        <p:spPr>
+          <a:xfrm>
+            <a:off x="758645" y="3243281"/>
+            <a:ext cx="9669210" cy="1077218"/>
+          </a:xfrm>
+          <a:prstGeom prst="rect">
+            <a:avLst/>
+          </a:prstGeom>
+          <a:noFill/>
+        </p:spPr>
+        <p:txBody>
+          <a:bodyPr wrap="square" rtlCol="0">
+            <a:spAutoFit/>
+          </a:bodyPr>
+          <a:lstStyle/>
+          <a:p>
+            <a:r>
+              <a:rPr lang="fr-FR" sz="1600" dirty="0">
+                <a:solidFill>
+                  <a:srgbClr val="0070C0"/>
+                </a:solidFill>
+                <a:latin typeface="Arial" panose="020B0604020202020204" pitchFamily="34" charset="0"/>
+                <a:cs typeface="Arial" panose="020B0604020202020204" pitchFamily="34" charset="0"/>
+              </a:rPr>
+              <a:t>Déploiement manuel de la communauté MongoDB ou de MongoDB Enterprise sur des instances Amazon EC2 </a:t>
+            </a:r>
+            <a:r>
+              <a:rPr lang="fr-FR" sz="1600" i="1" dirty="0">
+                <a:solidFill>
+                  <a:srgbClr val="0070C0"/>
+                </a:solidFill>
+                <a:latin typeface="Arial" panose="020B0604020202020204" pitchFamily="34" charset="0"/>
+                <a:cs typeface="Arial" panose="020B0604020202020204" pitchFamily="34" charset="0"/>
+              </a:rPr>
+              <a:t>(machines virtuelles)</a:t>
+            </a:r>
+            <a:r>
+              <a:rPr lang="fr-FR" sz="1600" dirty="0">
+                <a:solidFill>
+                  <a:srgbClr val="0070C0"/>
+                </a:solidFill>
+                <a:latin typeface="Arial" panose="020B0604020202020204" pitchFamily="34" charset="0"/>
+                <a:cs typeface="Arial" panose="020B0604020202020204" pitchFamily="34" charset="0"/>
+              </a:rPr>
+              <a:t>.</a:t>
+            </a:r>
+          </a:p>
+          <a:p>
+            <a:pPr marL="285750" indent="-285750">
+              <a:buFont typeface="Arial" panose="020B0604020202020204" pitchFamily="34" charset="0"/>
+              <a:buChar char="•"/>
+            </a:pPr>
+            <a:r>
+              <a:rPr lang="fr-FR" sz="1600" b="1" dirty="0">
+                <a:solidFill>
+                  <a:srgbClr val="0070C0"/>
+                </a:solidFill>
+                <a:latin typeface="Arial" panose="020B0604020202020204" pitchFamily="34" charset="0"/>
+                <a:cs typeface="Arial" panose="020B0604020202020204" pitchFamily="34" charset="0"/>
+              </a:rPr>
+              <a:t>Contrôle Total : </a:t>
+            </a:r>
+            <a:r>
+              <a:rPr lang="fr-FR" sz="1600" dirty="0">
+                <a:solidFill>
+                  <a:srgbClr val="0070C0"/>
+                </a:solidFill>
+                <a:latin typeface="Arial" panose="020B0604020202020204" pitchFamily="34" charset="0"/>
+                <a:cs typeface="Arial" panose="020B0604020202020204" pitchFamily="34" charset="0"/>
+              </a:rPr>
+              <a:t>Flexibilité maximale sur la configuration et la version de MongoDB.</a:t>
+            </a:r>
+          </a:p>
+          <a:p>
+            <a:pPr marL="285750" indent="-285750">
+              <a:buFont typeface="Arial" panose="020B0604020202020204" pitchFamily="34" charset="0"/>
+              <a:buChar char="•"/>
+            </a:pPr>
+            <a:r>
+              <a:rPr lang="fr-FR" sz="1600" b="1" dirty="0">
+                <a:solidFill>
+                  <a:srgbClr val="0070C0"/>
+                </a:solidFill>
+                <a:latin typeface="Arial" panose="020B0604020202020204" pitchFamily="34" charset="0"/>
+                <a:cs typeface="Arial" panose="020B0604020202020204" pitchFamily="34" charset="0"/>
+              </a:rPr>
+              <a:t>Optimisation des Coûts </a:t>
+            </a:r>
+            <a:r>
+              <a:rPr lang="fr-FR" sz="1600" b="1" i="1" dirty="0">
+                <a:solidFill>
+                  <a:srgbClr val="0070C0"/>
+                </a:solidFill>
+                <a:latin typeface="Arial" panose="020B0604020202020204" pitchFamily="34" charset="0"/>
+                <a:cs typeface="Arial" panose="020B0604020202020204" pitchFamily="34" charset="0"/>
+              </a:rPr>
+              <a:t>(si bien géré) </a:t>
+            </a:r>
+            <a:r>
+              <a:rPr lang="fr-FR" sz="1600" b="1" dirty="0">
+                <a:solidFill>
+                  <a:srgbClr val="0070C0"/>
+                </a:solidFill>
+                <a:latin typeface="Arial" panose="020B0604020202020204" pitchFamily="34" charset="0"/>
+                <a:cs typeface="Arial" panose="020B0604020202020204" pitchFamily="34" charset="0"/>
+              </a:rPr>
+              <a:t>: </a:t>
+            </a:r>
+            <a:r>
+              <a:rPr lang="fr-FR" sz="1600" dirty="0">
+                <a:solidFill>
+                  <a:srgbClr val="0070C0"/>
+                </a:solidFill>
+                <a:latin typeface="Arial" panose="020B0604020202020204" pitchFamily="34" charset="0"/>
+                <a:cs typeface="Arial" panose="020B0604020202020204" pitchFamily="34" charset="0"/>
+              </a:rPr>
+              <a:t>Choix précis du matériel.</a:t>
+            </a:r>
+          </a:p>
+        </p:txBody>
+      </p:sp>
+      <p:sp>
+        <p:nvSpPr>
+          <p:cNvPr id="12" name="ZoneTexte 11">
+            <a:extLst>
+              <a:ext uri="{FF2B5EF4-FFF2-40B4-BE49-F238E27FC236}">
+                <a16:creationId xmlns:a16="http://schemas.microsoft.com/office/drawing/2014/main" id="{E08876D4-3AD5-EC87-D1CD-128665B4AFBB}"/>
+              </a:ext>
+            </a:extLst>
+          </p:cNvPr>
+          <p:cNvSpPr txBox="1"/>
+          <p:nvPr/>
+        </p:nvSpPr>
+        <p:spPr>
+          <a:xfrm>
+            <a:off x="758646" y="4518588"/>
+            <a:ext cx="2954655" cy="369332"/>
+          </a:xfrm>
+          <a:prstGeom prst="rect">
+            <a:avLst/>
+          </a:prstGeom>
+          <a:noFill/>
+        </p:spPr>
+        <p:txBody>
+          <a:bodyPr wrap="none" rtlCol="0">
+            <a:spAutoFit/>
+          </a:bodyPr>
+          <a:lstStyle/>
+          <a:p>
+            <a:r>
+              <a:rPr lang="en-US" b="1" i="1" u="sng" dirty="0">
+                <a:solidFill>
+                  <a:srgbClr val="0070C0"/>
+                </a:solidFill>
+                <a:latin typeface="Arial" panose="020B0604020202020204" pitchFamily="34" charset="0"/>
+                <a:cs typeface="Arial" panose="020B0604020202020204" pitchFamily="34" charset="0"/>
+              </a:rPr>
+              <a:t>MongoDB Atlas sur AWS	</a:t>
+            </a:r>
+            <a:endParaRPr lang="fr-FR" i="1" u="sng" dirty="0">
+              <a:solidFill>
+                <a:srgbClr val="0070C0"/>
+              </a:solidFill>
+              <a:latin typeface="Arial" panose="020B0604020202020204" pitchFamily="34" charset="0"/>
+              <a:cs typeface="Arial" panose="020B0604020202020204" pitchFamily="34" charset="0"/>
+            </a:endParaRPr>
+          </a:p>
+        </p:txBody>
+      </p:sp>
+      <p:sp>
+        <p:nvSpPr>
+          <p:cNvPr id="13" name="ZoneTexte 12">
+            <a:extLst>
+              <a:ext uri="{FF2B5EF4-FFF2-40B4-BE49-F238E27FC236}">
+                <a16:creationId xmlns:a16="http://schemas.microsoft.com/office/drawing/2014/main" id="{3FCE2993-2150-6FF2-9D6A-A56116FCCFDB}"/>
+              </a:ext>
+            </a:extLst>
+          </p:cNvPr>
+          <p:cNvSpPr txBox="1"/>
+          <p:nvPr/>
+        </p:nvSpPr>
+        <p:spPr>
+          <a:xfrm>
+            <a:off x="758645" y="4887920"/>
+            <a:ext cx="9863173" cy="830997"/>
+          </a:xfrm>
+          <a:prstGeom prst="rect">
+            <a:avLst/>
+          </a:prstGeom>
+          <a:noFill/>
+        </p:spPr>
+        <p:txBody>
+          <a:bodyPr wrap="square" rtlCol="0">
+            <a:spAutoFit/>
+          </a:bodyPr>
+          <a:lstStyle/>
+          <a:p>
+            <a:r>
+              <a:rPr lang="fr-FR" sz="1600" dirty="0">
+                <a:solidFill>
+                  <a:srgbClr val="0070C0"/>
+                </a:solidFill>
+                <a:latin typeface="Arial" panose="020B0604020202020204" pitchFamily="34" charset="0"/>
+                <a:cs typeface="Arial" panose="020B0604020202020204" pitchFamily="34" charset="0"/>
+              </a:rPr>
+              <a:t>Service cloud de MongoDB </a:t>
+            </a:r>
+            <a:r>
+              <a:rPr lang="fr-FR" sz="1600" i="1" dirty="0">
+                <a:solidFill>
+                  <a:srgbClr val="0070C0"/>
+                </a:solidFill>
+                <a:latin typeface="Arial" panose="020B0604020202020204" pitchFamily="34" charset="0"/>
+                <a:cs typeface="Arial" panose="020B0604020202020204" pitchFamily="34" charset="0"/>
+              </a:rPr>
+              <a:t>(éditeur)</a:t>
+            </a:r>
+            <a:r>
+              <a:rPr lang="fr-FR" sz="1600" dirty="0">
+                <a:solidFill>
+                  <a:srgbClr val="0070C0"/>
+                </a:solidFill>
+                <a:latin typeface="Arial" panose="020B0604020202020204" pitchFamily="34" charset="0"/>
+                <a:cs typeface="Arial" panose="020B0604020202020204" pitchFamily="34" charset="0"/>
+              </a:rPr>
+              <a:t>, hébergé sur l'infrastructure AWS.</a:t>
+            </a:r>
+          </a:p>
+          <a:p>
+            <a:pPr marL="285750" indent="-285750">
+              <a:buFont typeface="Arial" panose="020B0604020202020204" pitchFamily="34" charset="0"/>
+              <a:buChar char="•"/>
+            </a:pPr>
+            <a:r>
+              <a:rPr lang="fr-FR" sz="1600" b="1" dirty="0">
+                <a:solidFill>
+                  <a:srgbClr val="0070C0"/>
+                </a:solidFill>
+                <a:latin typeface="Arial" panose="020B0604020202020204" pitchFamily="34" charset="0"/>
+                <a:cs typeface="Arial" panose="020B0604020202020204" pitchFamily="34" charset="0"/>
+              </a:rPr>
+              <a:t>Fonctionnalités MongoDB Avancées :</a:t>
+            </a:r>
+            <a:r>
+              <a:rPr lang="fr-FR" sz="1600" dirty="0">
+                <a:solidFill>
+                  <a:srgbClr val="0070C0"/>
+                </a:solidFill>
+                <a:latin typeface="Arial" panose="020B0604020202020204" pitchFamily="34" charset="0"/>
+                <a:cs typeface="Arial" panose="020B0604020202020204" pitchFamily="34" charset="0"/>
+              </a:rPr>
+              <a:t> Accès direct aux outils d'analyse et de déploiement de l'éditeur.</a:t>
+            </a:r>
+          </a:p>
+          <a:p>
+            <a:pPr marL="285750" indent="-285750">
+              <a:buFont typeface="Arial" panose="020B0604020202020204" pitchFamily="34" charset="0"/>
+              <a:buChar char="•"/>
+            </a:pPr>
+            <a:r>
+              <a:rPr lang="fr-FR" sz="1600" b="1" dirty="0">
+                <a:solidFill>
+                  <a:srgbClr val="0070C0"/>
+                </a:solidFill>
+                <a:latin typeface="Arial" panose="020B0604020202020204" pitchFamily="34" charset="0"/>
+                <a:cs typeface="Arial" panose="020B0604020202020204" pitchFamily="34" charset="0"/>
+              </a:rPr>
+              <a:t>Déploiement</a:t>
+            </a:r>
+            <a:r>
+              <a:rPr lang="fr-FR" sz="1600" dirty="0">
+                <a:solidFill>
+                  <a:srgbClr val="0070C0"/>
+                </a:solidFill>
+                <a:latin typeface="Arial" panose="020B0604020202020204" pitchFamily="34" charset="0"/>
+                <a:cs typeface="Arial" panose="020B0604020202020204" pitchFamily="34" charset="0"/>
+              </a:rPr>
+              <a:t> </a:t>
+            </a:r>
+            <a:r>
+              <a:rPr lang="fr-FR" sz="1600" b="1" dirty="0" err="1">
+                <a:solidFill>
+                  <a:srgbClr val="0070C0"/>
+                </a:solidFill>
+                <a:latin typeface="Arial" panose="020B0604020202020204" pitchFamily="34" charset="0"/>
+                <a:cs typeface="Arial" panose="020B0604020202020204" pitchFamily="34" charset="0"/>
+              </a:rPr>
+              <a:t>Multi-Cloud</a:t>
+            </a:r>
+            <a:r>
+              <a:rPr lang="fr-FR" sz="1600" dirty="0">
+                <a:solidFill>
+                  <a:srgbClr val="0070C0"/>
+                </a:solidFill>
+                <a:latin typeface="Arial" panose="020B0604020202020204" pitchFamily="34" charset="0"/>
+                <a:cs typeface="Arial" panose="020B0604020202020204" pitchFamily="34" charset="0"/>
+              </a:rPr>
+              <a:t> facilité.</a:t>
+            </a:r>
+          </a:p>
+        </p:txBody>
+      </p:sp>
+    </p:spTree>
+    <p:extLst>
+      <p:ext uri="{BB962C8B-B14F-4D97-AF65-F5344CB8AC3E}">
+        <p14:creationId xmlns:p14="http://schemas.microsoft.com/office/powerpoint/2010/main" val="1055830833"/>
+      </p:ext>
+    </p:extLst>
+  </p:cSld>
+  <p:clrMapOvr>
+    <a:masterClrMapping/>
+  </p:clrMapOvr>
+</p:sld>
+</file>
+
+<file path=ppt/slides/slide11.xml><?xml version="1.0" encoding="utf-8"?>
+<p:sld xmlns:a="http://schemas.openxmlformats.org/drawingml/2006/main" xmlns:r="http://schemas.openxmlformats.org/officeDocument/2006/relationships" xmlns:p="http://schemas.openxmlformats.org/presentationml/2006/main">
+  <p:cSld>
+    <p:spTree>
+      <p:nvGrpSpPr>
+        <p:cNvPr id="1" name="">
+          <a:extLst>
+            <a:ext uri="{FF2B5EF4-FFF2-40B4-BE49-F238E27FC236}">
               <a16:creationId xmlns:a16="http://schemas.microsoft.com/office/drawing/2014/main" id="{3ADDB9B1-03D0-BF23-6559-D65A2CFF3C4A}"/>
             </a:ext>
           </a:extLst>
@@ -7040,7 +7673,1887 @@
 </p:sld>
 </file>
 
-<file path=ppt/slides/slide11.xml><?xml version="1.0" encoding="utf-8"?>
+<file path=ppt/slides/slide12.xml><?xml version="1.0" encoding="utf-8"?>
+<p:sld xmlns:a="http://schemas.openxmlformats.org/drawingml/2006/main" xmlns:r="http://schemas.openxmlformats.org/officeDocument/2006/relationships" xmlns:p="http://schemas.openxmlformats.org/presentationml/2006/main">
+  <p:cSld>
+    <p:spTree>
+      <p:nvGrpSpPr>
+        <p:cNvPr id="1" name="">
+          <a:extLst>
+            <a:ext uri="{FF2B5EF4-FFF2-40B4-BE49-F238E27FC236}">
+              <a16:creationId xmlns:a16="http://schemas.microsoft.com/office/drawing/2014/main" id="{18CEE27B-96AC-231D-7709-8291C75F7BF8}"/>
+            </a:ext>
+          </a:extLst>
+        </p:cNvPr>
+        <p:cNvGrpSpPr/>
+        <p:nvPr/>
+      </p:nvGrpSpPr>
+      <p:grpSpPr>
+        <a:xfrm>
+          <a:off x="0" y="0"/>
+          <a:ext cx="0" cy="0"/>
+          <a:chOff x="0" y="0"/>
+          <a:chExt cx="0" cy="0"/>
+        </a:xfrm>
+      </p:grpSpPr>
+      <p:sp>
+        <p:nvSpPr>
+          <p:cNvPr id="4" name="ZoneTexte 3">
+            <a:extLst>
+              <a:ext uri="{FF2B5EF4-FFF2-40B4-BE49-F238E27FC236}">
+                <a16:creationId xmlns:a16="http://schemas.microsoft.com/office/drawing/2014/main" id="{EEE42F86-57A2-09FE-B9EC-ED47CA50CC69}"/>
+              </a:ext>
+            </a:extLst>
+          </p:cNvPr>
+          <p:cNvSpPr txBox="1"/>
+          <p:nvPr/>
+        </p:nvSpPr>
+        <p:spPr>
+          <a:xfrm>
+            <a:off x="2696886" y="9555"/>
+            <a:ext cx="5075428" cy="769441"/>
+          </a:xfrm>
+          <a:prstGeom prst="rect">
+            <a:avLst/>
+          </a:prstGeom>
+          <a:noFill/>
+        </p:spPr>
+        <p:txBody>
+          <a:bodyPr wrap="none" rtlCol="0">
+            <a:spAutoFit/>
+          </a:bodyPr>
+          <a:lstStyle/>
+          <a:p>
+            <a:r>
+              <a:rPr lang="fr-FR" sz="4400" b="1" dirty="0">
+                <a:solidFill>
+                  <a:srgbClr val="0070C0"/>
+                </a:solidFill>
+                <a:effectLst>
+                  <a:outerShdw blurRad="38100" dist="38100" dir="2700000" algn="tl">
+                    <a:srgbClr val="000000">
+                      <a:alpha val="43137"/>
+                    </a:srgbClr>
+                  </a:outerShdw>
+                </a:effectLst>
+                <a:latin typeface="Arial" panose="020B0604020202020204" pitchFamily="34" charset="0"/>
+                <a:cs typeface="Arial" panose="020B0604020202020204" pitchFamily="34" charset="0"/>
+              </a:rPr>
+              <a:t> Comparatif Cloud</a:t>
+            </a:r>
+            <a:endParaRPr lang="fr-FR" sz="3200" b="1" dirty="0">
+              <a:solidFill>
+                <a:srgbClr val="0070C0"/>
+              </a:solidFill>
+              <a:effectLst>
+                <a:outerShdw blurRad="38100" dist="38100" dir="2700000" algn="tl">
+                  <a:srgbClr val="000000">
+                    <a:alpha val="43137"/>
+                  </a:srgbClr>
+                </a:outerShdw>
+              </a:effectLst>
+              <a:latin typeface="Arial" panose="020B0604020202020204" pitchFamily="34" charset="0"/>
+              <a:cs typeface="Arial" panose="020B0604020202020204" pitchFamily="34" charset="0"/>
+            </a:endParaRPr>
+          </a:p>
+        </p:txBody>
+      </p:sp>
+      <p:graphicFrame>
+        <p:nvGraphicFramePr>
+          <p:cNvPr id="7" name="Tableau 6">
+            <a:extLst>
+              <a:ext uri="{FF2B5EF4-FFF2-40B4-BE49-F238E27FC236}">
+                <a16:creationId xmlns:a16="http://schemas.microsoft.com/office/drawing/2014/main" id="{E2DF268C-CA4A-57B8-CFD0-E7A0F1B09167}"/>
+              </a:ext>
+            </a:extLst>
+          </p:cNvPr>
+          <p:cNvGraphicFramePr>
+            <a:graphicFrameLocks noGrp="1"/>
+          </p:cNvGraphicFramePr>
+          <p:nvPr>
+            <p:extLst>
+              <p:ext uri="{D42A27DB-BD31-4B8C-83A1-F6EECF244321}">
+                <p14:modId xmlns:p14="http://schemas.microsoft.com/office/powerpoint/2010/main" val="3426964829"/>
+              </p:ext>
+            </p:extLst>
+          </p:nvPr>
+        </p:nvGraphicFramePr>
+        <p:xfrm>
+          <a:off x="814316" y="2205961"/>
+          <a:ext cx="10563368" cy="2623500"/>
+        </p:xfrm>
+        <a:graphic>
+          <a:graphicData uri="http://schemas.openxmlformats.org/drawingml/2006/table">
+            <a:tbl>
+              <a:tblPr/>
+              <a:tblGrid>
+                <a:gridCol w="2616241">
+                  <a:extLst>
+                    <a:ext uri="{9D8B030D-6E8A-4147-A177-3AD203B41FA5}">
+                      <a16:colId xmlns:a16="http://schemas.microsoft.com/office/drawing/2014/main" val="3408119983"/>
+                    </a:ext>
+                  </a:extLst>
+                </a:gridCol>
+                <a:gridCol w="2669687">
+                  <a:extLst>
+                    <a:ext uri="{9D8B030D-6E8A-4147-A177-3AD203B41FA5}">
+                      <a16:colId xmlns:a16="http://schemas.microsoft.com/office/drawing/2014/main" val="1068661959"/>
+                    </a:ext>
+                  </a:extLst>
+                </a:gridCol>
+                <a:gridCol w="2638720">
+                  <a:extLst>
+                    <a:ext uri="{9D8B030D-6E8A-4147-A177-3AD203B41FA5}">
+                      <a16:colId xmlns:a16="http://schemas.microsoft.com/office/drawing/2014/main" val="3969677928"/>
+                    </a:ext>
+                  </a:extLst>
+                </a:gridCol>
+                <a:gridCol w="2638720">
+                  <a:extLst>
+                    <a:ext uri="{9D8B030D-6E8A-4147-A177-3AD203B41FA5}">
+                      <a16:colId xmlns:a16="http://schemas.microsoft.com/office/drawing/2014/main" val="2783681333"/>
+                    </a:ext>
+                  </a:extLst>
+                </a:gridCol>
+              </a:tblGrid>
+              <a:tr h="443552">
+                <a:tc>
+                  <a:txBody>
+                    <a:bodyPr/>
+                    <a:lstStyle/>
+                    <a:p>
+                      <a:pPr rtl="0">
+                        <a:buNone/>
+                      </a:pPr>
+                      <a:r>
+                        <a:rPr lang="fr-FR" sz="1200" b="1" dirty="0">
+                          <a:solidFill>
+                            <a:srgbClr val="0070C0"/>
+                          </a:solidFill>
+                          <a:effectLst/>
+                          <a:latin typeface="Arial" panose="020B0604020202020204" pitchFamily="34" charset="0"/>
+                          <a:cs typeface="Arial" panose="020B0604020202020204" pitchFamily="34" charset="0"/>
+                        </a:rPr>
+                        <a:t>Catégorie de Service</a:t>
+                      </a:r>
+                      <a:endParaRPr lang="fr-FR" sz="1200" dirty="0">
+                        <a:solidFill>
+                          <a:srgbClr val="0070C0"/>
+                        </a:solidFill>
+                        <a:effectLst/>
+                        <a:latin typeface="Arial" panose="020B0604020202020204" pitchFamily="34" charset="0"/>
+                        <a:cs typeface="Arial" panose="020B0604020202020204" pitchFamily="34" charset="0"/>
+                      </a:endParaRPr>
+                    </a:p>
+                  </a:txBody>
+                  <a:tcPr marL="33929" marR="33929" marT="22619" marB="22619" anchor="ctr">
+                    <a:lnL w="12700" cap="flat" cmpd="sng" algn="ctr">
+                      <a:solidFill>
+                        <a:schemeClr val="tx1"/>
+                      </a:solidFill>
+                      <a:prstDash val="solid"/>
+                      <a:round/>
+                      <a:headEnd type="none" w="med" len="med"/>
+                      <a:tailEnd type="none" w="med" len="med"/>
+                    </a:lnL>
+                    <a:lnR w="12700" cap="flat" cmpd="sng" algn="ctr">
+                      <a:solidFill>
+                        <a:schemeClr val="tx1"/>
+                      </a:solidFill>
+                      <a:prstDash val="solid"/>
+                      <a:round/>
+                      <a:headEnd type="none" w="med" len="med"/>
+                      <a:tailEnd type="none" w="med" len="med"/>
+                    </a:lnR>
+                    <a:lnT w="12700" cap="flat" cmpd="sng" algn="ctr">
+                      <a:solidFill>
+                        <a:schemeClr val="tx1"/>
+                      </a:solidFill>
+                      <a:prstDash val="solid"/>
+                      <a:round/>
+                      <a:headEnd type="none" w="med" len="med"/>
+                      <a:tailEnd type="none" w="med" len="med"/>
+                    </a:lnT>
+                    <a:lnB w="12700" cap="flat" cmpd="sng" algn="ctr">
+                      <a:solidFill>
+                        <a:schemeClr val="tx1"/>
+                      </a:solidFill>
+                      <a:prstDash val="solid"/>
+                      <a:round/>
+                      <a:headEnd type="none" w="med" len="med"/>
+                      <a:tailEnd type="none" w="med" len="med"/>
+                    </a:lnB>
+                    <a:solidFill>
+                      <a:schemeClr val="bg1"/>
+                    </a:solidFill>
+                  </a:tcPr>
+                </a:tc>
+                <a:tc>
+                  <a:txBody>
+                    <a:bodyPr/>
+                    <a:lstStyle/>
+                    <a:p>
+                      <a:pPr rtl="0">
+                        <a:buNone/>
+                      </a:pPr>
+                      <a:r>
+                        <a:rPr lang="fr-FR" sz="1200" b="1" dirty="0">
+                          <a:solidFill>
+                            <a:srgbClr val="0070C0"/>
+                          </a:solidFill>
+                          <a:effectLst/>
+                          <a:latin typeface="Arial" panose="020B0604020202020204" pitchFamily="34" charset="0"/>
+                          <a:cs typeface="Arial" panose="020B0604020202020204" pitchFamily="34" charset="0"/>
+                        </a:rPr>
+                        <a:t>Amazon Web Services (AWS)</a:t>
+                      </a:r>
+                      <a:endParaRPr lang="fr-FR" sz="1200" dirty="0">
+                        <a:solidFill>
+                          <a:srgbClr val="0070C0"/>
+                        </a:solidFill>
+                        <a:effectLst/>
+                        <a:latin typeface="Arial" panose="020B0604020202020204" pitchFamily="34" charset="0"/>
+                        <a:cs typeface="Arial" panose="020B0604020202020204" pitchFamily="34" charset="0"/>
+                      </a:endParaRPr>
+                    </a:p>
+                  </a:txBody>
+                  <a:tcPr marL="33929" marR="33929" marT="22619" marB="22619" anchor="ctr">
+                    <a:lnL w="12700" cap="flat" cmpd="sng" algn="ctr">
+                      <a:solidFill>
+                        <a:schemeClr val="tx1"/>
+                      </a:solidFill>
+                      <a:prstDash val="solid"/>
+                      <a:round/>
+                      <a:headEnd type="none" w="med" len="med"/>
+                      <a:tailEnd type="none" w="med" len="med"/>
+                    </a:lnL>
+                    <a:lnR w="12700" cap="flat" cmpd="sng" algn="ctr">
+                      <a:solidFill>
+                        <a:schemeClr val="tx1"/>
+                      </a:solidFill>
+                      <a:prstDash val="solid"/>
+                      <a:round/>
+                      <a:headEnd type="none" w="med" len="med"/>
+                      <a:tailEnd type="none" w="med" len="med"/>
+                    </a:lnR>
+                    <a:lnT w="12700" cap="flat" cmpd="sng" algn="ctr">
+                      <a:solidFill>
+                        <a:schemeClr val="tx1"/>
+                      </a:solidFill>
+                      <a:prstDash val="solid"/>
+                      <a:round/>
+                      <a:headEnd type="none" w="med" len="med"/>
+                      <a:tailEnd type="none" w="med" len="med"/>
+                    </a:lnT>
+                    <a:lnB w="12700" cap="flat" cmpd="sng" algn="ctr">
+                      <a:solidFill>
+                        <a:schemeClr val="tx1"/>
+                      </a:solidFill>
+                      <a:prstDash val="solid"/>
+                      <a:round/>
+                      <a:headEnd type="none" w="med" len="med"/>
+                      <a:tailEnd type="none" w="med" len="med"/>
+                    </a:lnB>
+                    <a:solidFill>
+                      <a:schemeClr val="bg1"/>
+                    </a:solidFill>
+                  </a:tcPr>
+                </a:tc>
+                <a:tc>
+                  <a:txBody>
+                    <a:bodyPr/>
+                    <a:lstStyle/>
+                    <a:p>
+                      <a:pPr rtl="0">
+                        <a:buNone/>
+                      </a:pPr>
+                      <a:r>
+                        <a:rPr lang="fr-FR" sz="1200" b="1" dirty="0">
+                          <a:solidFill>
+                            <a:srgbClr val="0070C0"/>
+                          </a:solidFill>
+                          <a:effectLst/>
+                          <a:latin typeface="Arial" panose="020B0604020202020204" pitchFamily="34" charset="0"/>
+                          <a:cs typeface="Arial" panose="020B0604020202020204" pitchFamily="34" charset="0"/>
+                        </a:rPr>
+                        <a:t>Google Cloud Platform (GCP)</a:t>
+                      </a:r>
+                      <a:endParaRPr lang="fr-FR" sz="1200" dirty="0">
+                        <a:solidFill>
+                          <a:srgbClr val="0070C0"/>
+                        </a:solidFill>
+                        <a:effectLst/>
+                        <a:latin typeface="Arial" panose="020B0604020202020204" pitchFamily="34" charset="0"/>
+                        <a:cs typeface="Arial" panose="020B0604020202020204" pitchFamily="34" charset="0"/>
+                      </a:endParaRPr>
+                    </a:p>
+                  </a:txBody>
+                  <a:tcPr marL="33929" marR="33929" marT="22619" marB="22619" anchor="ctr">
+                    <a:lnL w="12700" cap="flat" cmpd="sng" algn="ctr">
+                      <a:solidFill>
+                        <a:schemeClr val="tx1"/>
+                      </a:solidFill>
+                      <a:prstDash val="solid"/>
+                      <a:round/>
+                      <a:headEnd type="none" w="med" len="med"/>
+                      <a:tailEnd type="none" w="med" len="med"/>
+                    </a:lnL>
+                    <a:lnR w="12700" cap="flat" cmpd="sng" algn="ctr">
+                      <a:solidFill>
+                        <a:schemeClr val="tx1"/>
+                      </a:solidFill>
+                      <a:prstDash val="solid"/>
+                      <a:round/>
+                      <a:headEnd type="none" w="med" len="med"/>
+                      <a:tailEnd type="none" w="med" len="med"/>
+                    </a:lnR>
+                    <a:lnT w="12700" cap="flat" cmpd="sng" algn="ctr">
+                      <a:solidFill>
+                        <a:schemeClr val="tx1"/>
+                      </a:solidFill>
+                      <a:prstDash val="solid"/>
+                      <a:round/>
+                      <a:headEnd type="none" w="med" len="med"/>
+                      <a:tailEnd type="none" w="med" len="med"/>
+                    </a:lnT>
+                    <a:lnB w="12700" cap="flat" cmpd="sng" algn="ctr">
+                      <a:solidFill>
+                        <a:schemeClr val="tx1"/>
+                      </a:solidFill>
+                      <a:prstDash val="solid"/>
+                      <a:round/>
+                      <a:headEnd type="none" w="med" len="med"/>
+                      <a:tailEnd type="none" w="med" len="med"/>
+                    </a:lnB>
+                    <a:solidFill>
+                      <a:schemeClr val="bg1"/>
+                    </a:solidFill>
+                  </a:tcPr>
+                </a:tc>
+                <a:tc>
+                  <a:txBody>
+                    <a:bodyPr/>
+                    <a:lstStyle/>
+                    <a:p>
+                      <a:pPr rtl="0">
+                        <a:buNone/>
+                      </a:pPr>
+                      <a:r>
+                        <a:rPr lang="fr-FR" sz="1200" b="1" dirty="0">
+                          <a:solidFill>
+                            <a:srgbClr val="0070C0"/>
+                          </a:solidFill>
+                          <a:effectLst/>
+                          <a:latin typeface="Arial" panose="020B0604020202020204" pitchFamily="34" charset="0"/>
+                          <a:cs typeface="Arial" panose="020B0604020202020204" pitchFamily="34" charset="0"/>
+                        </a:rPr>
+                        <a:t>Microsoft Azure</a:t>
+                      </a:r>
+                      <a:endParaRPr lang="fr-FR" sz="1200" dirty="0">
+                        <a:solidFill>
+                          <a:srgbClr val="0070C0"/>
+                        </a:solidFill>
+                        <a:effectLst/>
+                        <a:latin typeface="Arial" panose="020B0604020202020204" pitchFamily="34" charset="0"/>
+                        <a:cs typeface="Arial" panose="020B0604020202020204" pitchFamily="34" charset="0"/>
+                      </a:endParaRPr>
+                    </a:p>
+                  </a:txBody>
+                  <a:tcPr marL="33929" marR="33929" marT="22619" marB="22619" anchor="ctr">
+                    <a:lnL w="12700" cap="flat" cmpd="sng" algn="ctr">
+                      <a:solidFill>
+                        <a:schemeClr val="tx1"/>
+                      </a:solidFill>
+                      <a:prstDash val="solid"/>
+                      <a:round/>
+                      <a:headEnd type="none" w="med" len="med"/>
+                      <a:tailEnd type="none" w="med" len="med"/>
+                    </a:lnL>
+                    <a:lnR w="12700" cap="flat" cmpd="sng" algn="ctr">
+                      <a:solidFill>
+                        <a:schemeClr val="tx1"/>
+                      </a:solidFill>
+                      <a:prstDash val="solid"/>
+                      <a:round/>
+                      <a:headEnd type="none" w="med" len="med"/>
+                      <a:tailEnd type="none" w="med" len="med"/>
+                    </a:lnR>
+                    <a:lnT w="12700" cap="flat" cmpd="sng" algn="ctr">
+                      <a:solidFill>
+                        <a:schemeClr val="tx1"/>
+                      </a:solidFill>
+                      <a:prstDash val="solid"/>
+                      <a:round/>
+                      <a:headEnd type="none" w="med" len="med"/>
+                      <a:tailEnd type="none" w="med" len="med"/>
+                    </a:lnT>
+                    <a:lnB w="12700" cap="flat" cmpd="sng" algn="ctr">
+                      <a:solidFill>
+                        <a:schemeClr val="tx1"/>
+                      </a:solidFill>
+                      <a:prstDash val="solid"/>
+                      <a:round/>
+                      <a:headEnd type="none" w="med" len="med"/>
+                      <a:tailEnd type="none" w="med" len="med"/>
+                    </a:lnB>
+                    <a:solidFill>
+                      <a:schemeClr val="bg1"/>
+                    </a:solidFill>
+                  </a:tcPr>
+                </a:tc>
+                <a:extLst>
+                  <a:ext uri="{0D108BD9-81ED-4DB2-BD59-A6C34878D82A}">
+                    <a16:rowId xmlns:a16="http://schemas.microsoft.com/office/drawing/2014/main" val="186877278"/>
+                  </a:ext>
+                </a:extLst>
+              </a:tr>
+              <a:tr h="716507">
+                <a:tc>
+                  <a:txBody>
+                    <a:bodyPr/>
+                    <a:lstStyle/>
+                    <a:p>
+                      <a:pPr rtl="0">
+                        <a:buNone/>
+                      </a:pPr>
+                      <a:r>
+                        <a:rPr lang="fr-FR" sz="1200" b="1" dirty="0">
+                          <a:solidFill>
+                            <a:srgbClr val="0070C0"/>
+                          </a:solidFill>
+                          <a:effectLst/>
+                          <a:latin typeface="Arial" panose="020B0604020202020204" pitchFamily="34" charset="0"/>
+                          <a:cs typeface="Arial" panose="020B0604020202020204" pitchFamily="34" charset="0"/>
+                        </a:rPr>
+                        <a:t>Base de Données NoSQL (compatible MongoDB)</a:t>
+                      </a:r>
+                      <a:endParaRPr lang="fr-FR" sz="1200" dirty="0">
+                        <a:solidFill>
+                          <a:srgbClr val="0070C0"/>
+                        </a:solidFill>
+                        <a:effectLst/>
+                        <a:latin typeface="Arial" panose="020B0604020202020204" pitchFamily="34" charset="0"/>
+                        <a:cs typeface="Arial" panose="020B0604020202020204" pitchFamily="34" charset="0"/>
+                      </a:endParaRPr>
+                    </a:p>
+                  </a:txBody>
+                  <a:tcPr marL="33929" marR="33929" marT="22619" marB="22619" anchor="ctr">
+                    <a:lnL w="12700" cap="flat" cmpd="sng" algn="ctr">
+                      <a:solidFill>
+                        <a:schemeClr val="tx1"/>
+                      </a:solidFill>
+                      <a:prstDash val="solid"/>
+                      <a:round/>
+                      <a:headEnd type="none" w="med" len="med"/>
+                      <a:tailEnd type="none" w="med" len="med"/>
+                    </a:lnL>
+                    <a:lnR w="12700" cap="flat" cmpd="sng" algn="ctr">
+                      <a:solidFill>
+                        <a:schemeClr val="tx1"/>
+                      </a:solidFill>
+                      <a:prstDash val="solid"/>
+                      <a:round/>
+                      <a:headEnd type="none" w="med" len="med"/>
+                      <a:tailEnd type="none" w="med" len="med"/>
+                    </a:lnR>
+                    <a:lnT w="12700" cap="flat" cmpd="sng" algn="ctr">
+                      <a:solidFill>
+                        <a:schemeClr val="tx1"/>
+                      </a:solidFill>
+                      <a:prstDash val="solid"/>
+                      <a:round/>
+                      <a:headEnd type="none" w="med" len="med"/>
+                      <a:tailEnd type="none" w="med" len="med"/>
+                    </a:lnT>
+                    <a:lnB w="12700" cap="flat" cmpd="sng" algn="ctr">
+                      <a:solidFill>
+                        <a:schemeClr val="tx1"/>
+                      </a:solidFill>
+                      <a:prstDash val="solid"/>
+                      <a:round/>
+                      <a:headEnd type="none" w="med" len="med"/>
+                      <a:tailEnd type="none" w="med" len="med"/>
+                    </a:lnB>
+                    <a:solidFill>
+                      <a:schemeClr val="bg1"/>
+                    </a:solidFill>
+                  </a:tcPr>
+                </a:tc>
+                <a:tc>
+                  <a:txBody>
+                    <a:bodyPr/>
+                    <a:lstStyle/>
+                    <a:p>
+                      <a:pPr rtl="0">
+                        <a:buNone/>
+                      </a:pPr>
+                      <a:r>
+                        <a:rPr lang="fr-FR" sz="1000" b="1" dirty="0">
+                          <a:solidFill>
+                            <a:srgbClr val="0070C0"/>
+                          </a:solidFill>
+                          <a:effectLst/>
+                          <a:latin typeface="Arial" panose="020B0604020202020204" pitchFamily="34" charset="0"/>
+                          <a:cs typeface="Arial" panose="020B0604020202020204" pitchFamily="34" charset="0"/>
+                        </a:rPr>
+                        <a:t>Amazon </a:t>
+                      </a:r>
+                      <a:r>
+                        <a:rPr lang="fr-FR" sz="1000" b="1" dirty="0" err="1">
+                          <a:solidFill>
+                            <a:srgbClr val="0070C0"/>
+                          </a:solidFill>
+                          <a:effectLst/>
+                          <a:latin typeface="Arial" panose="020B0604020202020204" pitchFamily="34" charset="0"/>
+                          <a:cs typeface="Arial" panose="020B0604020202020204" pitchFamily="34" charset="0"/>
+                        </a:rPr>
+                        <a:t>DocumentDB</a:t>
+                      </a:r>
+                      <a:r>
+                        <a:rPr lang="fr-FR" sz="1000" dirty="0">
+                          <a:solidFill>
+                            <a:srgbClr val="0070C0"/>
+                          </a:solidFill>
+                          <a:effectLst/>
+                          <a:latin typeface="Arial" panose="020B0604020202020204" pitchFamily="34" charset="0"/>
+                          <a:cs typeface="Arial" panose="020B0604020202020204" pitchFamily="34" charset="0"/>
+                        </a:rPr>
+                        <a:t> (compatible MongoDB) </a:t>
+                      </a:r>
+                      <a:r>
+                        <a:rPr lang="fr-FR" sz="1000" i="1" dirty="0">
+                          <a:solidFill>
+                            <a:srgbClr val="0070C0"/>
+                          </a:solidFill>
+                          <a:effectLst/>
+                          <a:latin typeface="Arial" panose="020B0604020202020204" pitchFamily="34" charset="0"/>
+                          <a:cs typeface="Arial" panose="020B0604020202020204" pitchFamily="34" charset="0"/>
+                        </a:rPr>
+                        <a:t>Alternative: MongoDB Atlas sur AWS</a:t>
+                      </a:r>
+                      <a:endParaRPr lang="fr-FR" sz="1000" dirty="0">
+                        <a:solidFill>
+                          <a:srgbClr val="0070C0"/>
+                        </a:solidFill>
+                        <a:effectLst/>
+                        <a:latin typeface="Arial" panose="020B0604020202020204" pitchFamily="34" charset="0"/>
+                        <a:cs typeface="Arial" panose="020B0604020202020204" pitchFamily="34" charset="0"/>
+                      </a:endParaRPr>
+                    </a:p>
+                  </a:txBody>
+                  <a:tcPr marL="33929" marR="33929" marT="22619" marB="22619" anchor="ctr">
+                    <a:lnL w="12700" cap="flat" cmpd="sng" algn="ctr">
+                      <a:solidFill>
+                        <a:schemeClr val="tx1"/>
+                      </a:solidFill>
+                      <a:prstDash val="solid"/>
+                      <a:round/>
+                      <a:headEnd type="none" w="med" len="med"/>
+                      <a:tailEnd type="none" w="med" len="med"/>
+                    </a:lnL>
+                    <a:lnR w="12700" cap="flat" cmpd="sng" algn="ctr">
+                      <a:solidFill>
+                        <a:schemeClr val="tx1"/>
+                      </a:solidFill>
+                      <a:prstDash val="solid"/>
+                      <a:round/>
+                      <a:headEnd type="none" w="med" len="med"/>
+                      <a:tailEnd type="none" w="med" len="med"/>
+                    </a:lnR>
+                    <a:lnT w="12700" cap="flat" cmpd="sng" algn="ctr">
+                      <a:solidFill>
+                        <a:schemeClr val="tx1"/>
+                      </a:solidFill>
+                      <a:prstDash val="solid"/>
+                      <a:round/>
+                      <a:headEnd type="none" w="med" len="med"/>
+                      <a:tailEnd type="none" w="med" len="med"/>
+                    </a:lnT>
+                    <a:lnB w="12700" cap="flat" cmpd="sng" algn="ctr">
+                      <a:solidFill>
+                        <a:schemeClr val="tx1"/>
+                      </a:solidFill>
+                      <a:prstDash val="solid"/>
+                      <a:round/>
+                      <a:headEnd type="none" w="med" len="med"/>
+                      <a:tailEnd type="none" w="med" len="med"/>
+                    </a:lnB>
+                    <a:solidFill>
+                      <a:schemeClr val="bg1"/>
+                    </a:solidFill>
+                  </a:tcPr>
+                </a:tc>
+                <a:tc>
+                  <a:txBody>
+                    <a:bodyPr/>
+                    <a:lstStyle/>
+                    <a:p>
+                      <a:pPr rtl="0">
+                        <a:buNone/>
+                      </a:pPr>
+                      <a:r>
+                        <a:rPr lang="fr-FR" sz="1000" b="1">
+                          <a:solidFill>
+                            <a:srgbClr val="0070C0"/>
+                          </a:solidFill>
+                          <a:effectLst/>
+                          <a:latin typeface="Arial" panose="020B0604020202020204" pitchFamily="34" charset="0"/>
+                          <a:cs typeface="Arial" panose="020B0604020202020204" pitchFamily="34" charset="0"/>
+                        </a:rPr>
+                        <a:t>MongoDB Atlas sur GCP</a:t>
+                      </a:r>
+                      <a:r>
+                        <a:rPr lang="fr-FR" sz="1000">
+                          <a:solidFill>
+                            <a:srgbClr val="0070C0"/>
+                          </a:solidFill>
+                          <a:effectLst/>
+                          <a:latin typeface="Arial" panose="020B0604020202020204" pitchFamily="34" charset="0"/>
+                          <a:cs typeface="Arial" panose="020B0604020202020204" pitchFamily="34" charset="0"/>
+                        </a:rPr>
+                        <a:t> </a:t>
+                      </a:r>
+                      <a:r>
+                        <a:rPr lang="fr-FR" sz="1000" i="1">
+                          <a:solidFill>
+                            <a:srgbClr val="0070C0"/>
+                          </a:solidFill>
+                          <a:effectLst/>
+                          <a:latin typeface="Arial" panose="020B0604020202020204" pitchFamily="34" charset="0"/>
+                          <a:cs typeface="Arial" panose="020B0604020202020204" pitchFamily="34" charset="0"/>
+                        </a:rPr>
+                        <a:t>Alternative: MongoDB installé sur Compute Engine</a:t>
+                      </a:r>
+                      <a:endParaRPr lang="fr-FR" sz="1000">
+                        <a:solidFill>
+                          <a:srgbClr val="0070C0"/>
+                        </a:solidFill>
+                        <a:effectLst/>
+                        <a:latin typeface="Arial" panose="020B0604020202020204" pitchFamily="34" charset="0"/>
+                        <a:cs typeface="Arial" panose="020B0604020202020204" pitchFamily="34" charset="0"/>
+                      </a:endParaRPr>
+                    </a:p>
+                  </a:txBody>
+                  <a:tcPr marL="33929" marR="33929" marT="22619" marB="22619" anchor="ctr">
+                    <a:lnL w="12700" cap="flat" cmpd="sng" algn="ctr">
+                      <a:solidFill>
+                        <a:schemeClr val="tx1"/>
+                      </a:solidFill>
+                      <a:prstDash val="solid"/>
+                      <a:round/>
+                      <a:headEnd type="none" w="med" len="med"/>
+                      <a:tailEnd type="none" w="med" len="med"/>
+                    </a:lnL>
+                    <a:lnR w="12700" cap="flat" cmpd="sng" algn="ctr">
+                      <a:solidFill>
+                        <a:schemeClr val="tx1"/>
+                      </a:solidFill>
+                      <a:prstDash val="solid"/>
+                      <a:round/>
+                      <a:headEnd type="none" w="med" len="med"/>
+                      <a:tailEnd type="none" w="med" len="med"/>
+                    </a:lnR>
+                    <a:lnT w="12700" cap="flat" cmpd="sng" algn="ctr">
+                      <a:solidFill>
+                        <a:schemeClr val="tx1"/>
+                      </a:solidFill>
+                      <a:prstDash val="solid"/>
+                      <a:round/>
+                      <a:headEnd type="none" w="med" len="med"/>
+                      <a:tailEnd type="none" w="med" len="med"/>
+                    </a:lnT>
+                    <a:lnB w="12700" cap="flat" cmpd="sng" algn="ctr">
+                      <a:solidFill>
+                        <a:schemeClr val="tx1"/>
+                      </a:solidFill>
+                      <a:prstDash val="solid"/>
+                      <a:round/>
+                      <a:headEnd type="none" w="med" len="med"/>
+                      <a:tailEnd type="none" w="med" len="med"/>
+                    </a:lnB>
+                    <a:solidFill>
+                      <a:schemeClr val="bg1"/>
+                    </a:solidFill>
+                  </a:tcPr>
+                </a:tc>
+                <a:tc>
+                  <a:txBody>
+                    <a:bodyPr/>
+                    <a:lstStyle/>
+                    <a:p>
+                      <a:pPr rtl="0">
+                        <a:buNone/>
+                      </a:pPr>
+                      <a:r>
+                        <a:rPr lang="fr-FR" sz="1000" b="1" dirty="0">
+                          <a:solidFill>
+                            <a:srgbClr val="0070C0"/>
+                          </a:solidFill>
+                          <a:effectLst/>
+                          <a:latin typeface="Arial" panose="020B0604020202020204" pitchFamily="34" charset="0"/>
+                          <a:cs typeface="Arial" panose="020B0604020202020204" pitchFamily="34" charset="0"/>
+                        </a:rPr>
+                        <a:t>Azure Cosmos DB</a:t>
+                      </a:r>
+                      <a:r>
+                        <a:rPr lang="fr-FR" sz="1000" dirty="0">
+                          <a:solidFill>
+                            <a:srgbClr val="0070C0"/>
+                          </a:solidFill>
+                          <a:effectLst/>
+                          <a:latin typeface="Arial" panose="020B0604020202020204" pitchFamily="34" charset="0"/>
+                          <a:cs typeface="Arial" panose="020B0604020202020204" pitchFamily="34" charset="0"/>
+                        </a:rPr>
+                        <a:t> (API pour MongoDB) </a:t>
+                      </a:r>
+                      <a:r>
+                        <a:rPr lang="fr-FR" sz="1000" i="1" dirty="0">
+                          <a:solidFill>
+                            <a:srgbClr val="0070C0"/>
+                          </a:solidFill>
+                          <a:effectLst/>
+                          <a:latin typeface="Arial" panose="020B0604020202020204" pitchFamily="34" charset="0"/>
+                          <a:cs typeface="Arial" panose="020B0604020202020204" pitchFamily="34" charset="0"/>
+                        </a:rPr>
+                        <a:t>Alternative: MongoDB Atlas sur Azure</a:t>
+                      </a:r>
+                      <a:endParaRPr lang="fr-FR" sz="1000" dirty="0">
+                        <a:solidFill>
+                          <a:srgbClr val="0070C0"/>
+                        </a:solidFill>
+                        <a:effectLst/>
+                        <a:latin typeface="Arial" panose="020B0604020202020204" pitchFamily="34" charset="0"/>
+                        <a:cs typeface="Arial" panose="020B0604020202020204" pitchFamily="34" charset="0"/>
+                      </a:endParaRPr>
+                    </a:p>
+                  </a:txBody>
+                  <a:tcPr marL="33929" marR="33929" marT="22619" marB="22619" anchor="ctr">
+                    <a:lnL w="12700" cap="flat" cmpd="sng" algn="ctr">
+                      <a:solidFill>
+                        <a:schemeClr val="tx1"/>
+                      </a:solidFill>
+                      <a:prstDash val="solid"/>
+                      <a:round/>
+                      <a:headEnd type="none" w="med" len="med"/>
+                      <a:tailEnd type="none" w="med" len="med"/>
+                    </a:lnL>
+                    <a:lnR w="12700" cap="flat" cmpd="sng" algn="ctr">
+                      <a:solidFill>
+                        <a:schemeClr val="tx1"/>
+                      </a:solidFill>
+                      <a:prstDash val="solid"/>
+                      <a:round/>
+                      <a:headEnd type="none" w="med" len="med"/>
+                      <a:tailEnd type="none" w="med" len="med"/>
+                    </a:lnR>
+                    <a:lnT w="12700" cap="flat" cmpd="sng" algn="ctr">
+                      <a:solidFill>
+                        <a:schemeClr val="tx1"/>
+                      </a:solidFill>
+                      <a:prstDash val="solid"/>
+                      <a:round/>
+                      <a:headEnd type="none" w="med" len="med"/>
+                      <a:tailEnd type="none" w="med" len="med"/>
+                    </a:lnT>
+                    <a:lnB w="12700" cap="flat" cmpd="sng" algn="ctr">
+                      <a:solidFill>
+                        <a:schemeClr val="tx1"/>
+                      </a:solidFill>
+                      <a:prstDash val="solid"/>
+                      <a:round/>
+                      <a:headEnd type="none" w="med" len="med"/>
+                      <a:tailEnd type="none" w="med" len="med"/>
+                    </a:lnB>
+                    <a:solidFill>
+                      <a:schemeClr val="bg1"/>
+                    </a:solidFill>
+                  </a:tcPr>
+                </a:tc>
+                <a:extLst>
+                  <a:ext uri="{0D108BD9-81ED-4DB2-BD59-A6C34878D82A}">
+                    <a16:rowId xmlns:a16="http://schemas.microsoft.com/office/drawing/2014/main" val="2567980322"/>
+                  </a:ext>
+                </a:extLst>
+              </a:tr>
+              <a:tr h="641445">
+                <a:tc>
+                  <a:txBody>
+                    <a:bodyPr/>
+                    <a:lstStyle/>
+                    <a:p>
+                      <a:pPr rtl="0">
+                        <a:buNone/>
+                      </a:pPr>
+                      <a:r>
+                        <a:rPr lang="fr-FR" sz="1200" b="1" dirty="0">
+                          <a:solidFill>
+                            <a:srgbClr val="0070C0"/>
+                          </a:solidFill>
+                          <a:effectLst/>
+                          <a:latin typeface="Arial" panose="020B0604020202020204" pitchFamily="34" charset="0"/>
+                          <a:cs typeface="Arial" panose="020B0604020202020204" pitchFamily="34" charset="0"/>
+                        </a:rPr>
+                        <a:t>Orchestration de Conteneurs</a:t>
+                      </a:r>
+                      <a:endParaRPr lang="fr-FR" sz="1200" dirty="0">
+                        <a:solidFill>
+                          <a:srgbClr val="0070C0"/>
+                        </a:solidFill>
+                        <a:effectLst/>
+                        <a:latin typeface="Arial" panose="020B0604020202020204" pitchFamily="34" charset="0"/>
+                        <a:cs typeface="Arial" panose="020B0604020202020204" pitchFamily="34" charset="0"/>
+                      </a:endParaRPr>
+                    </a:p>
+                  </a:txBody>
+                  <a:tcPr marL="33929" marR="33929" marT="22619" marB="22619" anchor="ctr">
+                    <a:lnL w="12700" cap="flat" cmpd="sng" algn="ctr">
+                      <a:solidFill>
+                        <a:schemeClr val="tx1"/>
+                      </a:solidFill>
+                      <a:prstDash val="solid"/>
+                      <a:round/>
+                      <a:headEnd type="none" w="med" len="med"/>
+                      <a:tailEnd type="none" w="med" len="med"/>
+                    </a:lnL>
+                    <a:lnR w="12700" cap="flat" cmpd="sng" algn="ctr">
+                      <a:solidFill>
+                        <a:schemeClr val="tx1"/>
+                      </a:solidFill>
+                      <a:prstDash val="solid"/>
+                      <a:round/>
+                      <a:headEnd type="none" w="med" len="med"/>
+                      <a:tailEnd type="none" w="med" len="med"/>
+                    </a:lnR>
+                    <a:lnT w="12700" cap="flat" cmpd="sng" algn="ctr">
+                      <a:solidFill>
+                        <a:schemeClr val="tx1"/>
+                      </a:solidFill>
+                      <a:prstDash val="solid"/>
+                      <a:round/>
+                      <a:headEnd type="none" w="med" len="med"/>
+                      <a:tailEnd type="none" w="med" len="med"/>
+                    </a:lnT>
+                    <a:lnB w="12700" cap="flat" cmpd="sng" algn="ctr">
+                      <a:solidFill>
+                        <a:schemeClr val="tx1"/>
+                      </a:solidFill>
+                      <a:prstDash val="solid"/>
+                      <a:round/>
+                      <a:headEnd type="none" w="med" len="med"/>
+                      <a:tailEnd type="none" w="med" len="med"/>
+                    </a:lnB>
+                    <a:solidFill>
+                      <a:schemeClr val="bg1"/>
+                    </a:solidFill>
+                  </a:tcPr>
+                </a:tc>
+                <a:tc>
+                  <a:txBody>
+                    <a:bodyPr/>
+                    <a:lstStyle/>
+                    <a:p>
+                      <a:pPr rtl="0">
+                        <a:buNone/>
+                      </a:pPr>
+                      <a:r>
+                        <a:rPr lang="fr-FR" sz="1000" b="1" dirty="0">
+                          <a:solidFill>
+                            <a:srgbClr val="0070C0"/>
+                          </a:solidFill>
+                          <a:effectLst/>
+                          <a:latin typeface="Arial" panose="020B0604020202020204" pitchFamily="34" charset="0"/>
+                          <a:cs typeface="Arial" panose="020B0604020202020204" pitchFamily="34" charset="0"/>
+                        </a:rPr>
+                        <a:t>Amazon ECS</a:t>
+                      </a:r>
+                      <a:r>
+                        <a:rPr lang="fr-FR" sz="1000" dirty="0">
+                          <a:solidFill>
+                            <a:srgbClr val="0070C0"/>
+                          </a:solidFill>
+                          <a:effectLst/>
+                          <a:latin typeface="Arial" panose="020B0604020202020204" pitchFamily="34" charset="0"/>
+                          <a:cs typeface="Arial" panose="020B0604020202020204" pitchFamily="34" charset="0"/>
+                        </a:rPr>
+                        <a:t> (</a:t>
+                      </a:r>
+                      <a:r>
+                        <a:rPr lang="fr-FR" sz="1000" dirty="0" err="1">
+                          <a:solidFill>
+                            <a:srgbClr val="0070C0"/>
+                          </a:solidFill>
+                          <a:effectLst/>
+                          <a:latin typeface="Arial" panose="020B0604020202020204" pitchFamily="34" charset="0"/>
+                          <a:cs typeface="Arial" panose="020B0604020202020204" pitchFamily="34" charset="0"/>
+                        </a:rPr>
+                        <a:t>Elastic</a:t>
+                      </a:r>
+                      <a:r>
+                        <a:rPr lang="fr-FR" sz="1000" dirty="0">
+                          <a:solidFill>
+                            <a:srgbClr val="0070C0"/>
+                          </a:solidFill>
+                          <a:effectLst/>
+                          <a:latin typeface="Arial" panose="020B0604020202020204" pitchFamily="34" charset="0"/>
+                          <a:cs typeface="Arial" panose="020B0604020202020204" pitchFamily="34" charset="0"/>
+                        </a:rPr>
+                        <a:t> Container Service) </a:t>
+                      </a:r>
+                      <a:r>
+                        <a:rPr lang="fr-FR" sz="1000" b="1" dirty="0">
+                          <a:solidFill>
+                            <a:srgbClr val="0070C0"/>
+                          </a:solidFill>
+                          <a:effectLst/>
+                          <a:latin typeface="Arial" panose="020B0604020202020204" pitchFamily="34" charset="0"/>
+                          <a:cs typeface="Arial" panose="020B0604020202020204" pitchFamily="34" charset="0"/>
+                        </a:rPr>
+                        <a:t>Amazon EKS</a:t>
+                      </a:r>
+                      <a:r>
+                        <a:rPr lang="fr-FR" sz="1000" dirty="0">
+                          <a:solidFill>
+                            <a:srgbClr val="0070C0"/>
+                          </a:solidFill>
+                          <a:effectLst/>
+                          <a:latin typeface="Arial" panose="020B0604020202020204" pitchFamily="34" charset="0"/>
+                          <a:cs typeface="Arial" panose="020B0604020202020204" pitchFamily="34" charset="0"/>
+                        </a:rPr>
+                        <a:t> (</a:t>
+                      </a:r>
+                      <a:r>
+                        <a:rPr lang="fr-FR" sz="1000" dirty="0" err="1">
+                          <a:solidFill>
+                            <a:srgbClr val="0070C0"/>
+                          </a:solidFill>
+                          <a:effectLst/>
+                          <a:latin typeface="Arial" panose="020B0604020202020204" pitchFamily="34" charset="0"/>
+                          <a:cs typeface="Arial" panose="020B0604020202020204" pitchFamily="34" charset="0"/>
+                        </a:rPr>
+                        <a:t>Elastic</a:t>
+                      </a:r>
+                      <a:r>
+                        <a:rPr lang="fr-FR" sz="1000" dirty="0">
+                          <a:solidFill>
+                            <a:srgbClr val="0070C0"/>
+                          </a:solidFill>
+                          <a:effectLst/>
+                          <a:latin typeface="Arial" panose="020B0604020202020204" pitchFamily="34" charset="0"/>
+                          <a:cs typeface="Arial" panose="020B0604020202020204" pitchFamily="34" charset="0"/>
+                        </a:rPr>
+                        <a:t> </a:t>
+                      </a:r>
+                      <a:r>
+                        <a:rPr lang="fr-FR" sz="1000" dirty="0" err="1">
+                          <a:solidFill>
+                            <a:srgbClr val="0070C0"/>
+                          </a:solidFill>
+                          <a:effectLst/>
+                          <a:latin typeface="Arial" panose="020B0604020202020204" pitchFamily="34" charset="0"/>
+                          <a:cs typeface="Arial" panose="020B0604020202020204" pitchFamily="34" charset="0"/>
+                        </a:rPr>
+                        <a:t>Kubernetes</a:t>
+                      </a:r>
+                      <a:r>
+                        <a:rPr lang="fr-FR" sz="1000" dirty="0">
+                          <a:solidFill>
+                            <a:srgbClr val="0070C0"/>
+                          </a:solidFill>
+                          <a:effectLst/>
+                          <a:latin typeface="Arial" panose="020B0604020202020204" pitchFamily="34" charset="0"/>
+                          <a:cs typeface="Arial" panose="020B0604020202020204" pitchFamily="34" charset="0"/>
+                        </a:rPr>
+                        <a:t> Service)</a:t>
+                      </a:r>
+                    </a:p>
+                  </a:txBody>
+                  <a:tcPr marL="33929" marR="33929" marT="22619" marB="22619" anchor="ctr">
+                    <a:lnL w="12700" cap="flat" cmpd="sng" algn="ctr">
+                      <a:solidFill>
+                        <a:schemeClr val="tx1"/>
+                      </a:solidFill>
+                      <a:prstDash val="solid"/>
+                      <a:round/>
+                      <a:headEnd type="none" w="med" len="med"/>
+                      <a:tailEnd type="none" w="med" len="med"/>
+                    </a:lnL>
+                    <a:lnR w="12700" cap="flat" cmpd="sng" algn="ctr">
+                      <a:solidFill>
+                        <a:schemeClr val="tx1"/>
+                      </a:solidFill>
+                      <a:prstDash val="solid"/>
+                      <a:round/>
+                      <a:headEnd type="none" w="med" len="med"/>
+                      <a:tailEnd type="none" w="med" len="med"/>
+                    </a:lnR>
+                    <a:lnT w="12700" cap="flat" cmpd="sng" algn="ctr">
+                      <a:solidFill>
+                        <a:schemeClr val="tx1"/>
+                      </a:solidFill>
+                      <a:prstDash val="solid"/>
+                      <a:round/>
+                      <a:headEnd type="none" w="med" len="med"/>
+                      <a:tailEnd type="none" w="med" len="med"/>
+                    </a:lnT>
+                    <a:lnB w="12700" cap="flat" cmpd="sng" algn="ctr">
+                      <a:solidFill>
+                        <a:schemeClr val="tx1"/>
+                      </a:solidFill>
+                      <a:prstDash val="solid"/>
+                      <a:round/>
+                      <a:headEnd type="none" w="med" len="med"/>
+                      <a:tailEnd type="none" w="med" len="med"/>
+                    </a:lnB>
+                    <a:solidFill>
+                      <a:schemeClr val="bg1"/>
+                    </a:solidFill>
+                  </a:tcPr>
+                </a:tc>
+                <a:tc>
+                  <a:txBody>
+                    <a:bodyPr/>
+                    <a:lstStyle/>
+                    <a:p>
+                      <a:pPr rtl="0">
+                        <a:buNone/>
+                      </a:pPr>
+                      <a:r>
+                        <a:rPr lang="fr-FR" sz="1000" b="1" dirty="0">
+                          <a:solidFill>
+                            <a:srgbClr val="0070C0"/>
+                          </a:solidFill>
+                          <a:effectLst/>
+                          <a:latin typeface="Arial" panose="020B0604020202020204" pitchFamily="34" charset="0"/>
+                          <a:cs typeface="Arial" panose="020B0604020202020204" pitchFamily="34" charset="0"/>
+                        </a:rPr>
+                        <a:t>Google </a:t>
+                      </a:r>
+                      <a:r>
+                        <a:rPr lang="fr-FR" sz="1000" b="1" dirty="0" err="1">
+                          <a:solidFill>
+                            <a:srgbClr val="0070C0"/>
+                          </a:solidFill>
+                          <a:effectLst/>
+                          <a:latin typeface="Arial" panose="020B0604020202020204" pitchFamily="34" charset="0"/>
+                          <a:cs typeface="Arial" panose="020B0604020202020204" pitchFamily="34" charset="0"/>
+                        </a:rPr>
+                        <a:t>Kubernetes</a:t>
+                      </a:r>
+                      <a:r>
+                        <a:rPr lang="fr-FR" sz="1000" b="1" dirty="0">
+                          <a:solidFill>
+                            <a:srgbClr val="0070C0"/>
+                          </a:solidFill>
+                          <a:effectLst/>
+                          <a:latin typeface="Arial" panose="020B0604020202020204" pitchFamily="34" charset="0"/>
+                          <a:cs typeface="Arial" panose="020B0604020202020204" pitchFamily="34" charset="0"/>
+                        </a:rPr>
+                        <a:t> Engine (GKE)</a:t>
+                      </a:r>
+                      <a:r>
+                        <a:rPr lang="fr-FR" sz="1000" dirty="0">
+                          <a:solidFill>
+                            <a:srgbClr val="0070C0"/>
+                          </a:solidFill>
+                          <a:effectLst/>
+                          <a:latin typeface="Arial" panose="020B0604020202020204" pitchFamily="34" charset="0"/>
+                          <a:cs typeface="Arial" panose="020B0604020202020204" pitchFamily="34" charset="0"/>
+                        </a:rPr>
+                        <a:t> </a:t>
+                      </a:r>
+                      <a:r>
+                        <a:rPr lang="fr-FR" sz="1000" b="1" dirty="0">
+                          <a:solidFill>
+                            <a:srgbClr val="0070C0"/>
+                          </a:solidFill>
+                          <a:effectLst/>
+                          <a:latin typeface="Arial" panose="020B0604020202020204" pitchFamily="34" charset="0"/>
+                          <a:cs typeface="Arial" panose="020B0604020202020204" pitchFamily="34" charset="0"/>
+                        </a:rPr>
+                        <a:t>Cloud Run</a:t>
+                      </a:r>
+                      <a:r>
+                        <a:rPr lang="fr-FR" sz="1000" dirty="0">
+                          <a:solidFill>
+                            <a:srgbClr val="0070C0"/>
+                          </a:solidFill>
+                          <a:effectLst/>
+                          <a:latin typeface="Arial" panose="020B0604020202020204" pitchFamily="34" charset="0"/>
+                          <a:cs typeface="Arial" panose="020B0604020202020204" pitchFamily="34" charset="0"/>
+                        </a:rPr>
+                        <a:t> (pour les conteneurs sans serveur)</a:t>
+                      </a:r>
+                    </a:p>
+                  </a:txBody>
+                  <a:tcPr marL="33929" marR="33929" marT="22619" marB="22619" anchor="ctr">
+                    <a:lnL w="12700" cap="flat" cmpd="sng" algn="ctr">
+                      <a:solidFill>
+                        <a:schemeClr val="tx1"/>
+                      </a:solidFill>
+                      <a:prstDash val="solid"/>
+                      <a:round/>
+                      <a:headEnd type="none" w="med" len="med"/>
+                      <a:tailEnd type="none" w="med" len="med"/>
+                    </a:lnL>
+                    <a:lnR w="12700" cap="flat" cmpd="sng" algn="ctr">
+                      <a:solidFill>
+                        <a:schemeClr val="tx1"/>
+                      </a:solidFill>
+                      <a:prstDash val="solid"/>
+                      <a:round/>
+                      <a:headEnd type="none" w="med" len="med"/>
+                      <a:tailEnd type="none" w="med" len="med"/>
+                    </a:lnR>
+                    <a:lnT w="12700" cap="flat" cmpd="sng" algn="ctr">
+                      <a:solidFill>
+                        <a:schemeClr val="tx1"/>
+                      </a:solidFill>
+                      <a:prstDash val="solid"/>
+                      <a:round/>
+                      <a:headEnd type="none" w="med" len="med"/>
+                      <a:tailEnd type="none" w="med" len="med"/>
+                    </a:lnT>
+                    <a:lnB w="12700" cap="flat" cmpd="sng" algn="ctr">
+                      <a:solidFill>
+                        <a:schemeClr val="tx1"/>
+                      </a:solidFill>
+                      <a:prstDash val="solid"/>
+                      <a:round/>
+                      <a:headEnd type="none" w="med" len="med"/>
+                      <a:tailEnd type="none" w="med" len="med"/>
+                    </a:lnB>
+                    <a:solidFill>
+                      <a:schemeClr val="bg1"/>
+                    </a:solidFill>
+                  </a:tcPr>
+                </a:tc>
+                <a:tc>
+                  <a:txBody>
+                    <a:bodyPr/>
+                    <a:lstStyle/>
+                    <a:p>
+                      <a:pPr rtl="0">
+                        <a:buNone/>
+                      </a:pPr>
+                      <a:r>
+                        <a:rPr lang="fr-FR" sz="1000" b="1">
+                          <a:solidFill>
+                            <a:srgbClr val="0070C0"/>
+                          </a:solidFill>
+                          <a:effectLst/>
+                          <a:latin typeface="Arial" panose="020B0604020202020204" pitchFamily="34" charset="0"/>
+                          <a:cs typeface="Arial" panose="020B0604020202020204" pitchFamily="34" charset="0"/>
+                        </a:rPr>
+                        <a:t>Azure Kubernetes Service (AKS)</a:t>
+                      </a:r>
+                      <a:r>
+                        <a:rPr lang="fr-FR" sz="1000">
+                          <a:solidFill>
+                            <a:srgbClr val="0070C0"/>
+                          </a:solidFill>
+                          <a:effectLst/>
+                          <a:latin typeface="Arial" panose="020B0604020202020204" pitchFamily="34" charset="0"/>
+                          <a:cs typeface="Arial" panose="020B0604020202020204" pitchFamily="34" charset="0"/>
+                        </a:rPr>
+                        <a:t> </a:t>
+                      </a:r>
+                      <a:r>
+                        <a:rPr lang="fr-FR" sz="1000" b="1">
+                          <a:solidFill>
+                            <a:srgbClr val="0070C0"/>
+                          </a:solidFill>
+                          <a:effectLst/>
+                          <a:latin typeface="Arial" panose="020B0604020202020204" pitchFamily="34" charset="0"/>
+                          <a:cs typeface="Arial" panose="020B0604020202020204" pitchFamily="34" charset="0"/>
+                        </a:rPr>
+                        <a:t>Azure Container Instances (ACI)</a:t>
+                      </a:r>
+                      <a:endParaRPr lang="fr-FR" sz="1000">
+                        <a:solidFill>
+                          <a:srgbClr val="0070C0"/>
+                        </a:solidFill>
+                        <a:effectLst/>
+                        <a:latin typeface="Arial" panose="020B0604020202020204" pitchFamily="34" charset="0"/>
+                        <a:cs typeface="Arial" panose="020B0604020202020204" pitchFamily="34" charset="0"/>
+                      </a:endParaRPr>
+                    </a:p>
+                  </a:txBody>
+                  <a:tcPr marL="33929" marR="33929" marT="22619" marB="22619" anchor="ctr">
+                    <a:lnL w="12700" cap="flat" cmpd="sng" algn="ctr">
+                      <a:solidFill>
+                        <a:schemeClr val="tx1"/>
+                      </a:solidFill>
+                      <a:prstDash val="solid"/>
+                      <a:round/>
+                      <a:headEnd type="none" w="med" len="med"/>
+                      <a:tailEnd type="none" w="med" len="med"/>
+                    </a:lnL>
+                    <a:lnR w="12700" cap="flat" cmpd="sng" algn="ctr">
+                      <a:solidFill>
+                        <a:schemeClr val="tx1"/>
+                      </a:solidFill>
+                      <a:prstDash val="solid"/>
+                      <a:round/>
+                      <a:headEnd type="none" w="med" len="med"/>
+                      <a:tailEnd type="none" w="med" len="med"/>
+                    </a:lnR>
+                    <a:lnT w="12700" cap="flat" cmpd="sng" algn="ctr">
+                      <a:solidFill>
+                        <a:schemeClr val="tx1"/>
+                      </a:solidFill>
+                      <a:prstDash val="solid"/>
+                      <a:round/>
+                      <a:headEnd type="none" w="med" len="med"/>
+                      <a:tailEnd type="none" w="med" len="med"/>
+                    </a:lnT>
+                    <a:lnB w="12700" cap="flat" cmpd="sng" algn="ctr">
+                      <a:solidFill>
+                        <a:schemeClr val="tx1"/>
+                      </a:solidFill>
+                      <a:prstDash val="solid"/>
+                      <a:round/>
+                      <a:headEnd type="none" w="med" len="med"/>
+                      <a:tailEnd type="none" w="med" len="med"/>
+                    </a:lnB>
+                    <a:solidFill>
+                      <a:schemeClr val="bg1"/>
+                    </a:solidFill>
+                  </a:tcPr>
+                </a:tc>
+                <a:extLst>
+                  <a:ext uri="{0D108BD9-81ED-4DB2-BD59-A6C34878D82A}">
+                    <a16:rowId xmlns:a16="http://schemas.microsoft.com/office/drawing/2014/main" val="1648205552"/>
+                  </a:ext>
+                </a:extLst>
+              </a:tr>
+              <a:tr h="313899">
+                <a:tc>
+                  <a:txBody>
+                    <a:bodyPr/>
+                    <a:lstStyle/>
+                    <a:p>
+                      <a:pPr rtl="0">
+                        <a:buNone/>
+                      </a:pPr>
+                      <a:r>
+                        <a:rPr lang="fr-FR" sz="1200" b="1" dirty="0">
+                          <a:solidFill>
+                            <a:srgbClr val="0070C0"/>
+                          </a:solidFill>
+                          <a:effectLst/>
+                          <a:latin typeface="Arial" panose="020B0604020202020204" pitchFamily="34" charset="0"/>
+                          <a:cs typeface="Arial" panose="020B0604020202020204" pitchFamily="34" charset="0"/>
+                        </a:rPr>
+                        <a:t>Stockage d'Objets (Data Lake, Sauvegardes)</a:t>
+                      </a:r>
+                      <a:endParaRPr lang="fr-FR" sz="1200" dirty="0">
+                        <a:solidFill>
+                          <a:srgbClr val="0070C0"/>
+                        </a:solidFill>
+                        <a:effectLst/>
+                        <a:latin typeface="Arial" panose="020B0604020202020204" pitchFamily="34" charset="0"/>
+                        <a:cs typeface="Arial" panose="020B0604020202020204" pitchFamily="34" charset="0"/>
+                      </a:endParaRPr>
+                    </a:p>
+                  </a:txBody>
+                  <a:tcPr marL="33929" marR="33929" marT="22619" marB="22619" anchor="ctr">
+                    <a:lnL w="12700" cap="flat" cmpd="sng" algn="ctr">
+                      <a:solidFill>
+                        <a:schemeClr val="tx1"/>
+                      </a:solidFill>
+                      <a:prstDash val="solid"/>
+                      <a:round/>
+                      <a:headEnd type="none" w="med" len="med"/>
+                      <a:tailEnd type="none" w="med" len="med"/>
+                    </a:lnL>
+                    <a:lnR w="12700" cap="flat" cmpd="sng" algn="ctr">
+                      <a:solidFill>
+                        <a:schemeClr val="tx1"/>
+                      </a:solidFill>
+                      <a:prstDash val="solid"/>
+                      <a:round/>
+                      <a:headEnd type="none" w="med" len="med"/>
+                      <a:tailEnd type="none" w="med" len="med"/>
+                    </a:lnR>
+                    <a:lnT w="12700" cap="flat" cmpd="sng" algn="ctr">
+                      <a:solidFill>
+                        <a:schemeClr val="tx1"/>
+                      </a:solidFill>
+                      <a:prstDash val="solid"/>
+                      <a:round/>
+                      <a:headEnd type="none" w="med" len="med"/>
+                      <a:tailEnd type="none" w="med" len="med"/>
+                    </a:lnT>
+                    <a:lnB w="12700" cap="flat" cmpd="sng" algn="ctr">
+                      <a:solidFill>
+                        <a:schemeClr val="tx1"/>
+                      </a:solidFill>
+                      <a:prstDash val="solid"/>
+                      <a:round/>
+                      <a:headEnd type="none" w="med" len="med"/>
+                      <a:tailEnd type="none" w="med" len="med"/>
+                    </a:lnB>
+                    <a:solidFill>
+                      <a:schemeClr val="bg1"/>
+                    </a:solidFill>
+                  </a:tcPr>
+                </a:tc>
+                <a:tc>
+                  <a:txBody>
+                    <a:bodyPr/>
+                    <a:lstStyle/>
+                    <a:p>
+                      <a:pPr rtl="0">
+                        <a:buNone/>
+                      </a:pPr>
+                      <a:r>
+                        <a:rPr lang="fr-FR" sz="1000" b="1" dirty="0">
+                          <a:solidFill>
+                            <a:srgbClr val="0070C0"/>
+                          </a:solidFill>
+                          <a:effectLst/>
+                          <a:latin typeface="Arial" panose="020B0604020202020204" pitchFamily="34" charset="0"/>
+                          <a:cs typeface="Arial" panose="020B0604020202020204" pitchFamily="34" charset="0"/>
+                        </a:rPr>
+                        <a:t>Amazon S3</a:t>
+                      </a:r>
+                      <a:r>
+                        <a:rPr lang="fr-FR" sz="1000" dirty="0">
+                          <a:solidFill>
+                            <a:srgbClr val="0070C0"/>
+                          </a:solidFill>
+                          <a:effectLst/>
+                          <a:latin typeface="Arial" panose="020B0604020202020204" pitchFamily="34" charset="0"/>
+                          <a:cs typeface="Arial" panose="020B0604020202020204" pitchFamily="34" charset="0"/>
+                        </a:rPr>
+                        <a:t> (Simple Storage Service)</a:t>
+                      </a:r>
+                    </a:p>
+                  </a:txBody>
+                  <a:tcPr marL="33929" marR="33929" marT="22619" marB="22619" anchor="ctr">
+                    <a:lnL w="12700" cap="flat" cmpd="sng" algn="ctr">
+                      <a:solidFill>
+                        <a:schemeClr val="tx1"/>
+                      </a:solidFill>
+                      <a:prstDash val="solid"/>
+                      <a:round/>
+                      <a:headEnd type="none" w="med" len="med"/>
+                      <a:tailEnd type="none" w="med" len="med"/>
+                    </a:lnL>
+                    <a:lnR w="12700" cap="flat" cmpd="sng" algn="ctr">
+                      <a:solidFill>
+                        <a:schemeClr val="tx1"/>
+                      </a:solidFill>
+                      <a:prstDash val="solid"/>
+                      <a:round/>
+                      <a:headEnd type="none" w="med" len="med"/>
+                      <a:tailEnd type="none" w="med" len="med"/>
+                    </a:lnR>
+                    <a:lnT w="12700" cap="flat" cmpd="sng" algn="ctr">
+                      <a:solidFill>
+                        <a:schemeClr val="tx1"/>
+                      </a:solidFill>
+                      <a:prstDash val="solid"/>
+                      <a:round/>
+                      <a:headEnd type="none" w="med" len="med"/>
+                      <a:tailEnd type="none" w="med" len="med"/>
+                    </a:lnT>
+                    <a:lnB w="12700" cap="flat" cmpd="sng" algn="ctr">
+                      <a:solidFill>
+                        <a:schemeClr val="tx1"/>
+                      </a:solidFill>
+                      <a:prstDash val="solid"/>
+                      <a:round/>
+                      <a:headEnd type="none" w="med" len="med"/>
+                      <a:tailEnd type="none" w="med" len="med"/>
+                    </a:lnB>
+                    <a:solidFill>
+                      <a:schemeClr val="bg1"/>
+                    </a:solidFill>
+                  </a:tcPr>
+                </a:tc>
+                <a:tc>
+                  <a:txBody>
+                    <a:bodyPr/>
+                    <a:lstStyle/>
+                    <a:p>
+                      <a:pPr rtl="0">
+                        <a:buNone/>
+                      </a:pPr>
+                      <a:r>
+                        <a:rPr lang="fr-FR" sz="1000" b="1" dirty="0">
+                          <a:solidFill>
+                            <a:srgbClr val="0070C0"/>
+                          </a:solidFill>
+                          <a:effectLst/>
+                          <a:latin typeface="Arial" panose="020B0604020202020204" pitchFamily="34" charset="0"/>
+                          <a:cs typeface="Arial" panose="020B0604020202020204" pitchFamily="34" charset="0"/>
+                        </a:rPr>
+                        <a:t>Google Cloud Storage</a:t>
+                      </a:r>
+                      <a:endParaRPr lang="fr-FR" sz="1000" dirty="0">
+                        <a:solidFill>
+                          <a:srgbClr val="0070C0"/>
+                        </a:solidFill>
+                        <a:effectLst/>
+                        <a:latin typeface="Arial" panose="020B0604020202020204" pitchFamily="34" charset="0"/>
+                        <a:cs typeface="Arial" panose="020B0604020202020204" pitchFamily="34" charset="0"/>
+                      </a:endParaRPr>
+                    </a:p>
+                  </a:txBody>
+                  <a:tcPr marL="33929" marR="33929" marT="22619" marB="22619" anchor="ctr">
+                    <a:lnL w="12700" cap="flat" cmpd="sng" algn="ctr">
+                      <a:solidFill>
+                        <a:schemeClr val="tx1"/>
+                      </a:solidFill>
+                      <a:prstDash val="solid"/>
+                      <a:round/>
+                      <a:headEnd type="none" w="med" len="med"/>
+                      <a:tailEnd type="none" w="med" len="med"/>
+                    </a:lnL>
+                    <a:lnR w="12700" cap="flat" cmpd="sng" algn="ctr">
+                      <a:solidFill>
+                        <a:schemeClr val="tx1"/>
+                      </a:solidFill>
+                      <a:prstDash val="solid"/>
+                      <a:round/>
+                      <a:headEnd type="none" w="med" len="med"/>
+                      <a:tailEnd type="none" w="med" len="med"/>
+                    </a:lnR>
+                    <a:lnT w="12700" cap="flat" cmpd="sng" algn="ctr">
+                      <a:solidFill>
+                        <a:schemeClr val="tx1"/>
+                      </a:solidFill>
+                      <a:prstDash val="solid"/>
+                      <a:round/>
+                      <a:headEnd type="none" w="med" len="med"/>
+                      <a:tailEnd type="none" w="med" len="med"/>
+                    </a:lnT>
+                    <a:lnB w="12700" cap="flat" cmpd="sng" algn="ctr">
+                      <a:solidFill>
+                        <a:schemeClr val="tx1"/>
+                      </a:solidFill>
+                      <a:prstDash val="solid"/>
+                      <a:round/>
+                      <a:headEnd type="none" w="med" len="med"/>
+                      <a:tailEnd type="none" w="med" len="med"/>
+                    </a:lnB>
+                    <a:solidFill>
+                      <a:schemeClr val="bg1"/>
+                    </a:solidFill>
+                  </a:tcPr>
+                </a:tc>
+                <a:tc>
+                  <a:txBody>
+                    <a:bodyPr/>
+                    <a:lstStyle/>
+                    <a:p>
+                      <a:pPr rtl="0">
+                        <a:buNone/>
+                      </a:pPr>
+                      <a:r>
+                        <a:rPr lang="fr-FR" sz="1000" b="1" dirty="0">
+                          <a:solidFill>
+                            <a:srgbClr val="0070C0"/>
+                          </a:solidFill>
+                          <a:effectLst/>
+                          <a:latin typeface="Arial" panose="020B0604020202020204" pitchFamily="34" charset="0"/>
+                          <a:cs typeface="Arial" panose="020B0604020202020204" pitchFamily="34" charset="0"/>
+                        </a:rPr>
+                        <a:t>Azure Blob Storage</a:t>
+                      </a:r>
+                      <a:endParaRPr lang="fr-FR" sz="1000" dirty="0">
+                        <a:solidFill>
+                          <a:srgbClr val="0070C0"/>
+                        </a:solidFill>
+                        <a:effectLst/>
+                        <a:latin typeface="Arial" panose="020B0604020202020204" pitchFamily="34" charset="0"/>
+                        <a:cs typeface="Arial" panose="020B0604020202020204" pitchFamily="34" charset="0"/>
+                      </a:endParaRPr>
+                    </a:p>
+                  </a:txBody>
+                  <a:tcPr marL="33929" marR="33929" marT="22619" marB="22619" anchor="ctr">
+                    <a:lnL w="12700" cap="flat" cmpd="sng" algn="ctr">
+                      <a:solidFill>
+                        <a:schemeClr val="tx1"/>
+                      </a:solidFill>
+                      <a:prstDash val="solid"/>
+                      <a:round/>
+                      <a:headEnd type="none" w="med" len="med"/>
+                      <a:tailEnd type="none" w="med" len="med"/>
+                    </a:lnL>
+                    <a:lnR w="12700" cap="flat" cmpd="sng" algn="ctr">
+                      <a:solidFill>
+                        <a:schemeClr val="tx1"/>
+                      </a:solidFill>
+                      <a:prstDash val="solid"/>
+                      <a:round/>
+                      <a:headEnd type="none" w="med" len="med"/>
+                      <a:tailEnd type="none" w="med" len="med"/>
+                    </a:lnR>
+                    <a:lnT w="12700" cap="flat" cmpd="sng" algn="ctr">
+                      <a:solidFill>
+                        <a:schemeClr val="tx1"/>
+                      </a:solidFill>
+                      <a:prstDash val="solid"/>
+                      <a:round/>
+                      <a:headEnd type="none" w="med" len="med"/>
+                      <a:tailEnd type="none" w="med" len="med"/>
+                    </a:lnT>
+                    <a:lnB w="12700" cap="flat" cmpd="sng" algn="ctr">
+                      <a:solidFill>
+                        <a:schemeClr val="tx1"/>
+                      </a:solidFill>
+                      <a:prstDash val="solid"/>
+                      <a:round/>
+                      <a:headEnd type="none" w="med" len="med"/>
+                      <a:tailEnd type="none" w="med" len="med"/>
+                    </a:lnB>
+                    <a:solidFill>
+                      <a:schemeClr val="bg1"/>
+                    </a:solidFill>
+                  </a:tcPr>
+                </a:tc>
+                <a:extLst>
+                  <a:ext uri="{0D108BD9-81ED-4DB2-BD59-A6C34878D82A}">
+                    <a16:rowId xmlns:a16="http://schemas.microsoft.com/office/drawing/2014/main" val="1782599647"/>
+                  </a:ext>
+                </a:extLst>
+              </a:tr>
+              <a:tr h="360556">
+                <a:tc>
+                  <a:txBody>
+                    <a:bodyPr/>
+                    <a:lstStyle/>
+                    <a:p>
+                      <a:pPr rtl="0">
+                        <a:buNone/>
+                      </a:pPr>
+                      <a:r>
+                        <a:rPr lang="fr-FR" sz="1200" b="1" dirty="0">
+                          <a:solidFill>
+                            <a:srgbClr val="0070C0"/>
+                          </a:solidFill>
+                          <a:effectLst/>
+                          <a:latin typeface="Arial" panose="020B0604020202020204" pitchFamily="34" charset="0"/>
+                          <a:cs typeface="Arial" panose="020B0604020202020204" pitchFamily="34" charset="0"/>
+                        </a:rPr>
+                        <a:t>Services de Calcul (Machines Virtuelles)</a:t>
+                      </a:r>
+                      <a:endParaRPr lang="fr-FR" sz="1200" dirty="0">
+                        <a:solidFill>
+                          <a:srgbClr val="0070C0"/>
+                        </a:solidFill>
+                        <a:effectLst/>
+                        <a:latin typeface="Arial" panose="020B0604020202020204" pitchFamily="34" charset="0"/>
+                        <a:cs typeface="Arial" panose="020B0604020202020204" pitchFamily="34" charset="0"/>
+                      </a:endParaRPr>
+                    </a:p>
+                  </a:txBody>
+                  <a:tcPr marL="33929" marR="33929" marT="22619" marB="22619" anchor="ctr">
+                    <a:lnL w="12700" cap="flat" cmpd="sng" algn="ctr">
+                      <a:solidFill>
+                        <a:schemeClr val="tx1"/>
+                      </a:solidFill>
+                      <a:prstDash val="solid"/>
+                      <a:round/>
+                      <a:headEnd type="none" w="med" len="med"/>
+                      <a:tailEnd type="none" w="med" len="med"/>
+                    </a:lnL>
+                    <a:lnR w="12700" cap="flat" cmpd="sng" algn="ctr">
+                      <a:solidFill>
+                        <a:schemeClr val="tx1"/>
+                      </a:solidFill>
+                      <a:prstDash val="solid"/>
+                      <a:round/>
+                      <a:headEnd type="none" w="med" len="med"/>
+                      <a:tailEnd type="none" w="med" len="med"/>
+                    </a:lnR>
+                    <a:lnT w="12700" cap="flat" cmpd="sng" algn="ctr">
+                      <a:solidFill>
+                        <a:schemeClr val="tx1"/>
+                      </a:solidFill>
+                      <a:prstDash val="solid"/>
+                      <a:round/>
+                      <a:headEnd type="none" w="med" len="med"/>
+                      <a:tailEnd type="none" w="med" len="med"/>
+                    </a:lnT>
+                    <a:lnB w="12700" cap="flat" cmpd="sng" algn="ctr">
+                      <a:solidFill>
+                        <a:schemeClr val="tx1"/>
+                      </a:solidFill>
+                      <a:prstDash val="solid"/>
+                      <a:round/>
+                      <a:headEnd type="none" w="med" len="med"/>
+                      <a:tailEnd type="none" w="med" len="med"/>
+                    </a:lnB>
+                    <a:solidFill>
+                      <a:schemeClr val="bg1"/>
+                    </a:solidFill>
+                  </a:tcPr>
+                </a:tc>
+                <a:tc>
+                  <a:txBody>
+                    <a:bodyPr/>
+                    <a:lstStyle/>
+                    <a:p>
+                      <a:pPr rtl="0">
+                        <a:buNone/>
+                      </a:pPr>
+                      <a:r>
+                        <a:rPr lang="fr-FR" sz="1000" b="1">
+                          <a:solidFill>
+                            <a:srgbClr val="0070C0"/>
+                          </a:solidFill>
+                          <a:effectLst/>
+                          <a:latin typeface="Arial" panose="020B0604020202020204" pitchFamily="34" charset="0"/>
+                          <a:cs typeface="Arial" panose="020B0604020202020204" pitchFamily="34" charset="0"/>
+                        </a:rPr>
+                        <a:t>Amazon EC2</a:t>
+                      </a:r>
+                      <a:r>
+                        <a:rPr lang="fr-FR" sz="1000">
+                          <a:solidFill>
+                            <a:srgbClr val="0070C0"/>
+                          </a:solidFill>
+                          <a:effectLst/>
+                          <a:latin typeface="Arial" panose="020B0604020202020204" pitchFamily="34" charset="0"/>
+                          <a:cs typeface="Arial" panose="020B0604020202020204" pitchFamily="34" charset="0"/>
+                        </a:rPr>
+                        <a:t> (Elastic Compute Cloud)</a:t>
+                      </a:r>
+                    </a:p>
+                  </a:txBody>
+                  <a:tcPr marL="33929" marR="33929" marT="22619" marB="22619" anchor="ctr">
+                    <a:lnL w="12700" cap="flat" cmpd="sng" algn="ctr">
+                      <a:solidFill>
+                        <a:schemeClr val="tx1"/>
+                      </a:solidFill>
+                      <a:prstDash val="solid"/>
+                      <a:round/>
+                      <a:headEnd type="none" w="med" len="med"/>
+                      <a:tailEnd type="none" w="med" len="med"/>
+                    </a:lnL>
+                    <a:lnR w="12700" cap="flat" cmpd="sng" algn="ctr">
+                      <a:solidFill>
+                        <a:schemeClr val="tx1"/>
+                      </a:solidFill>
+                      <a:prstDash val="solid"/>
+                      <a:round/>
+                      <a:headEnd type="none" w="med" len="med"/>
+                      <a:tailEnd type="none" w="med" len="med"/>
+                    </a:lnR>
+                    <a:lnT w="12700" cap="flat" cmpd="sng" algn="ctr">
+                      <a:solidFill>
+                        <a:schemeClr val="tx1"/>
+                      </a:solidFill>
+                      <a:prstDash val="solid"/>
+                      <a:round/>
+                      <a:headEnd type="none" w="med" len="med"/>
+                      <a:tailEnd type="none" w="med" len="med"/>
+                    </a:lnT>
+                    <a:lnB w="12700" cap="flat" cmpd="sng" algn="ctr">
+                      <a:solidFill>
+                        <a:schemeClr val="tx1"/>
+                      </a:solidFill>
+                      <a:prstDash val="solid"/>
+                      <a:round/>
+                      <a:headEnd type="none" w="med" len="med"/>
+                      <a:tailEnd type="none" w="med" len="med"/>
+                    </a:lnB>
+                    <a:solidFill>
+                      <a:schemeClr val="bg1"/>
+                    </a:solidFill>
+                  </a:tcPr>
+                </a:tc>
+                <a:tc>
+                  <a:txBody>
+                    <a:bodyPr/>
+                    <a:lstStyle/>
+                    <a:p>
+                      <a:pPr rtl="0">
+                        <a:buNone/>
+                      </a:pPr>
+                      <a:r>
+                        <a:rPr lang="fr-FR" sz="1000" b="1" dirty="0">
+                          <a:solidFill>
+                            <a:srgbClr val="0070C0"/>
+                          </a:solidFill>
+                          <a:effectLst/>
+                          <a:latin typeface="Arial" panose="020B0604020202020204" pitchFamily="34" charset="0"/>
+                          <a:cs typeface="Arial" panose="020B0604020202020204" pitchFamily="34" charset="0"/>
+                        </a:rPr>
+                        <a:t>Google </a:t>
+                      </a:r>
+                      <a:r>
+                        <a:rPr lang="fr-FR" sz="1000" b="1" dirty="0" err="1">
+                          <a:solidFill>
+                            <a:srgbClr val="0070C0"/>
+                          </a:solidFill>
+                          <a:effectLst/>
+                          <a:latin typeface="Arial" panose="020B0604020202020204" pitchFamily="34" charset="0"/>
+                          <a:cs typeface="Arial" panose="020B0604020202020204" pitchFamily="34" charset="0"/>
+                        </a:rPr>
+                        <a:t>Compute</a:t>
+                      </a:r>
+                      <a:r>
+                        <a:rPr lang="fr-FR" sz="1000" b="1" dirty="0">
+                          <a:solidFill>
+                            <a:srgbClr val="0070C0"/>
+                          </a:solidFill>
+                          <a:effectLst/>
+                          <a:latin typeface="Arial" panose="020B0604020202020204" pitchFamily="34" charset="0"/>
+                          <a:cs typeface="Arial" panose="020B0604020202020204" pitchFamily="34" charset="0"/>
+                        </a:rPr>
+                        <a:t> Engine</a:t>
+                      </a:r>
+                      <a:endParaRPr lang="fr-FR" sz="1000" dirty="0">
+                        <a:solidFill>
+                          <a:srgbClr val="0070C0"/>
+                        </a:solidFill>
+                        <a:effectLst/>
+                        <a:latin typeface="Arial" panose="020B0604020202020204" pitchFamily="34" charset="0"/>
+                        <a:cs typeface="Arial" panose="020B0604020202020204" pitchFamily="34" charset="0"/>
+                      </a:endParaRPr>
+                    </a:p>
+                  </a:txBody>
+                  <a:tcPr marL="33929" marR="33929" marT="22619" marB="22619" anchor="ctr">
+                    <a:lnL w="12700" cap="flat" cmpd="sng" algn="ctr">
+                      <a:solidFill>
+                        <a:schemeClr val="tx1"/>
+                      </a:solidFill>
+                      <a:prstDash val="solid"/>
+                      <a:round/>
+                      <a:headEnd type="none" w="med" len="med"/>
+                      <a:tailEnd type="none" w="med" len="med"/>
+                    </a:lnL>
+                    <a:lnR w="12700" cap="flat" cmpd="sng" algn="ctr">
+                      <a:solidFill>
+                        <a:schemeClr val="tx1"/>
+                      </a:solidFill>
+                      <a:prstDash val="solid"/>
+                      <a:round/>
+                      <a:headEnd type="none" w="med" len="med"/>
+                      <a:tailEnd type="none" w="med" len="med"/>
+                    </a:lnR>
+                    <a:lnT w="12700" cap="flat" cmpd="sng" algn="ctr">
+                      <a:solidFill>
+                        <a:schemeClr val="tx1"/>
+                      </a:solidFill>
+                      <a:prstDash val="solid"/>
+                      <a:round/>
+                      <a:headEnd type="none" w="med" len="med"/>
+                      <a:tailEnd type="none" w="med" len="med"/>
+                    </a:lnT>
+                    <a:lnB w="12700" cap="flat" cmpd="sng" algn="ctr">
+                      <a:solidFill>
+                        <a:schemeClr val="tx1"/>
+                      </a:solidFill>
+                      <a:prstDash val="solid"/>
+                      <a:round/>
+                      <a:headEnd type="none" w="med" len="med"/>
+                      <a:tailEnd type="none" w="med" len="med"/>
+                    </a:lnB>
+                    <a:solidFill>
+                      <a:schemeClr val="bg1"/>
+                    </a:solidFill>
+                  </a:tcPr>
+                </a:tc>
+                <a:tc>
+                  <a:txBody>
+                    <a:bodyPr/>
+                    <a:lstStyle/>
+                    <a:p>
+                      <a:pPr rtl="0">
+                        <a:buNone/>
+                      </a:pPr>
+                      <a:r>
+                        <a:rPr lang="fr-FR" sz="1000" b="1" dirty="0">
+                          <a:solidFill>
+                            <a:srgbClr val="0070C0"/>
+                          </a:solidFill>
+                          <a:effectLst/>
+                          <a:latin typeface="Arial" panose="020B0604020202020204" pitchFamily="34" charset="0"/>
+                          <a:cs typeface="Arial" panose="020B0604020202020204" pitchFamily="34" charset="0"/>
+                        </a:rPr>
+                        <a:t>Azure Virtual Machines</a:t>
+                      </a:r>
+                      <a:endParaRPr lang="fr-FR" sz="1000" dirty="0">
+                        <a:solidFill>
+                          <a:srgbClr val="0070C0"/>
+                        </a:solidFill>
+                        <a:effectLst/>
+                        <a:latin typeface="Arial" panose="020B0604020202020204" pitchFamily="34" charset="0"/>
+                        <a:cs typeface="Arial" panose="020B0604020202020204" pitchFamily="34" charset="0"/>
+                      </a:endParaRPr>
+                    </a:p>
+                  </a:txBody>
+                  <a:tcPr marL="33929" marR="33929" marT="22619" marB="22619" anchor="ctr">
+                    <a:lnL w="12700" cap="flat" cmpd="sng" algn="ctr">
+                      <a:solidFill>
+                        <a:schemeClr val="tx1"/>
+                      </a:solidFill>
+                      <a:prstDash val="solid"/>
+                      <a:round/>
+                      <a:headEnd type="none" w="med" len="med"/>
+                      <a:tailEnd type="none" w="med" len="med"/>
+                    </a:lnL>
+                    <a:lnR w="12700" cap="flat" cmpd="sng" algn="ctr">
+                      <a:solidFill>
+                        <a:schemeClr val="tx1"/>
+                      </a:solidFill>
+                      <a:prstDash val="solid"/>
+                      <a:round/>
+                      <a:headEnd type="none" w="med" len="med"/>
+                      <a:tailEnd type="none" w="med" len="med"/>
+                    </a:lnR>
+                    <a:lnT w="12700" cap="flat" cmpd="sng" algn="ctr">
+                      <a:solidFill>
+                        <a:schemeClr val="tx1"/>
+                      </a:solidFill>
+                      <a:prstDash val="solid"/>
+                      <a:round/>
+                      <a:headEnd type="none" w="med" len="med"/>
+                      <a:tailEnd type="none" w="med" len="med"/>
+                    </a:lnT>
+                    <a:lnB w="12700" cap="flat" cmpd="sng" algn="ctr">
+                      <a:solidFill>
+                        <a:schemeClr val="tx1"/>
+                      </a:solidFill>
+                      <a:prstDash val="solid"/>
+                      <a:round/>
+                      <a:headEnd type="none" w="med" len="med"/>
+                      <a:tailEnd type="none" w="med" len="med"/>
+                    </a:lnB>
+                    <a:solidFill>
+                      <a:schemeClr val="bg1"/>
+                    </a:solidFill>
+                  </a:tcPr>
+                </a:tc>
+                <a:extLst>
+                  <a:ext uri="{0D108BD9-81ED-4DB2-BD59-A6C34878D82A}">
+                    <a16:rowId xmlns:a16="http://schemas.microsoft.com/office/drawing/2014/main" val="4095922311"/>
+                  </a:ext>
+                </a:extLst>
+              </a:tr>
+            </a:tbl>
+          </a:graphicData>
+        </a:graphic>
+      </p:graphicFrame>
+    </p:spTree>
+    <p:extLst>
+      <p:ext uri="{BB962C8B-B14F-4D97-AF65-F5344CB8AC3E}">
+        <p14:creationId xmlns:p14="http://schemas.microsoft.com/office/powerpoint/2010/main" val="3684041246"/>
+      </p:ext>
+    </p:extLst>
+  </p:cSld>
+  <p:clrMapOvr>
+    <a:masterClrMapping/>
+  </p:clrMapOvr>
+</p:sld>
+</file>
+
+<file path=ppt/slides/slide13.xml><?xml version="1.0" encoding="utf-8"?>
 <p:sld xmlns:a="http://schemas.openxmlformats.org/drawingml/2006/main" xmlns:r="http://schemas.openxmlformats.org/officeDocument/2006/relationships" xmlns:p="http://schemas.openxmlformats.org/presentationml/2006/main">
   <p:cSld>
     <p:spTree>
@@ -9926,14 +12439,14 @@
           <p:nvPr>
             <p:extLst>
               <p:ext uri="{D42A27DB-BD31-4B8C-83A1-F6EECF244321}">
-                <p14:modId xmlns:p14="http://schemas.microsoft.com/office/powerpoint/2010/main" val="3645151311"/>
+                <p14:modId xmlns:p14="http://schemas.microsoft.com/office/powerpoint/2010/main" val="4173780177"/>
               </p:ext>
             </p:extLst>
           </p:nvPr>
         </p:nvGraphicFramePr>
         <p:xfrm>
           <a:off x="816262" y="1244839"/>
-          <a:ext cx="10559474" cy="5029200"/>
+          <a:ext cx="10661505" cy="4733936"/>
         </p:xfrm>
         <a:graphic>
           <a:graphicData uri="http://schemas.openxmlformats.org/drawingml/2006/table">
@@ -9942,14 +12455,14 @@
                 <a:tableStyleId>{18603FDC-E32A-4AB5-989C-0864C3EAD2B8}</a:tableStyleId>
               </a:tblPr>
               <a:tblGrid>
-                <a:gridCol w="2911765">
+                <a:gridCol w="2889105">
                   <a:extLst>
                     <a:ext uri="{9D8B030D-6E8A-4147-A177-3AD203B41FA5}">
                       <a16:colId xmlns:a16="http://schemas.microsoft.com/office/drawing/2014/main" val="3078096510"/>
                     </a:ext>
                   </a:extLst>
                 </a:gridCol>
-                <a:gridCol w="7647709">
+                <a:gridCol w="7772400">
                   <a:extLst>
                     <a:ext uri="{9D8B030D-6E8A-4147-A177-3AD203B41FA5}">
                       <a16:colId xmlns:a16="http://schemas.microsoft.com/office/drawing/2014/main" val="521061932"/>
@@ -9967,21 +12480,69 @@
                         <a:buNone/>
                       </a:pPr>
                       <a:r>
-                        <a:rPr lang="fr-FR" sz="1800" b="1" dirty="0">
+                        <a:rPr lang="fr-FR" sz="1400" b="1" dirty="0">
                           <a:solidFill>
-                            <a:schemeClr val="bg1"/>
+                            <a:srgbClr val="0070C0"/>
                           </a:solidFill>
                         </a:rPr>
                         <a:t>1. Préparation</a:t>
                       </a:r>
-                      <a:endParaRPr lang="fr-FR" sz="1800" dirty="0">
+                      <a:endParaRPr lang="fr-FR" sz="1400" dirty="0">
                         <a:solidFill>
-                          <a:schemeClr val="bg1"/>
+                          <a:srgbClr val="0070C0"/>
                         </a:solidFill>
                       </a:endParaRPr>
                     </a:p>
                   </a:txBody>
-                  <a:tcPr anchor="ctr"/>
+                  <a:tcPr anchor="ctr">
+                    <a:lnL w="12700" cap="flat" cmpd="sng" algn="ctr">
+                      <a:solidFill>
+                        <a:schemeClr val="tx1"/>
+                      </a:solidFill>
+                      <a:prstDash val="solid"/>
+                      <a:round/>
+                      <a:headEnd type="none" w="med" len="med"/>
+                      <a:tailEnd type="none" w="med" len="med"/>
+                    </a:lnL>
+                    <a:lnR w="12700" cap="flat" cmpd="sng" algn="ctr">
+                      <a:solidFill>
+                        <a:schemeClr val="tx1"/>
+                      </a:solidFill>
+                      <a:prstDash val="solid"/>
+                      <a:round/>
+                      <a:headEnd type="none" w="med" len="med"/>
+                      <a:tailEnd type="none" w="med" len="med"/>
+                    </a:lnR>
+                    <a:lnT w="12700" cap="flat" cmpd="sng" algn="ctr">
+                      <a:solidFill>
+                        <a:schemeClr val="tx1"/>
+                      </a:solidFill>
+                      <a:prstDash val="solid"/>
+                      <a:round/>
+                      <a:headEnd type="none" w="med" len="med"/>
+                      <a:tailEnd type="none" w="med" len="med"/>
+                    </a:lnT>
+                    <a:lnB w="12700" cap="flat" cmpd="sng" algn="ctr">
+                      <a:solidFill>
+                        <a:schemeClr val="tx1"/>
+                      </a:solidFill>
+                      <a:prstDash val="solid"/>
+                      <a:round/>
+                      <a:headEnd type="none" w="med" len="med"/>
+                      <a:tailEnd type="none" w="med" len="med"/>
+                    </a:lnB>
+                    <a:lnTlToBr w="12700" cmpd="sng">
+                      <a:noFill/>
+                      <a:prstDash val="solid"/>
+                    </a:lnTlToBr>
+                    <a:lnBlToTr w="12700" cmpd="sng">
+                      <a:noFill/>
+                      <a:prstDash val="solid"/>
+                    </a:lnBlToTr>
+                    <a:solidFill>
+                      <a:schemeClr val="bg1"/>
+                    </a:solidFill>
+                  </a:tcPr>
                 </a:tc>
                 <a:tc>
                   <a:txBody>
@@ -9992,25 +12553,25 @@
                         <a:buNone/>
                       </a:pPr>
                       <a:r>
-                        <a:rPr lang="fr-FR" sz="1400" dirty="0">
+                        <a:rPr lang="fr-FR" sz="1100" dirty="0">
                           <a:solidFill>
-                            <a:schemeClr val="bg1"/>
+                            <a:srgbClr val="0070C0"/>
                           </a:solidFill>
                         </a:rPr>
                         <a:t>Nettoyage initial du </a:t>
                       </a:r>
                       <a:r>
-                        <a:rPr lang="fr-FR" sz="1400" dirty="0" err="1">
+                        <a:rPr lang="fr-FR" sz="1100" dirty="0" err="1">
                           <a:solidFill>
-                            <a:schemeClr val="bg1"/>
+                            <a:srgbClr val="0070C0"/>
                           </a:solidFill>
                         </a:rPr>
                         <a:t>dataset</a:t>
                       </a:r>
                       <a:r>
-                        <a:rPr lang="fr-FR" sz="1400" dirty="0">
+                        <a:rPr lang="fr-FR" sz="1100" dirty="0">
                           <a:solidFill>
-                            <a:schemeClr val="bg1"/>
+                            <a:srgbClr val="0070C0"/>
                           </a:solidFill>
                         </a:rPr>
                         <a:t> médical :</a:t>
@@ -10022,9 +12583,9 @@
                         <a:buChar char="-"/>
                       </a:pPr>
                       <a:r>
-                        <a:rPr lang="fr-FR" sz="1400" dirty="0">
+                        <a:rPr lang="fr-FR" sz="1100" dirty="0">
                           <a:solidFill>
-                            <a:schemeClr val="bg1"/>
+                            <a:srgbClr val="0070C0"/>
                           </a:solidFill>
                         </a:rPr>
                         <a:t>Validation des formats de date.</a:t>
@@ -10036,9 +12597,9 @@
                         <a:buChar char="-"/>
                       </a:pPr>
                       <a:r>
-                        <a:rPr lang="fr-FR" sz="1400" dirty="0">
+                        <a:rPr lang="fr-FR" sz="1100" dirty="0">
                           <a:solidFill>
-                            <a:schemeClr val="bg1"/>
+                            <a:srgbClr val="0070C0"/>
                           </a:solidFill>
                         </a:rPr>
                         <a:t>Vérification des doublons.</a:t>
@@ -10050,9 +12611,9 @@
                         <a:buChar char="-"/>
                       </a:pPr>
                       <a:r>
-                        <a:rPr lang="fr-FR" sz="1400" dirty="0">
+                        <a:rPr lang="fr-FR" sz="1100" dirty="0">
                           <a:solidFill>
-                            <a:schemeClr val="bg1"/>
+                            <a:srgbClr val="0070C0"/>
                           </a:solidFill>
                         </a:rPr>
                         <a:t>Vérification des cellules vide.</a:t>
@@ -10064,20 +12625,380 @@
                         <a:buNone/>
                       </a:pPr>
                       <a:r>
-                        <a:rPr lang="fr-FR" sz="1400" dirty="0">
+                        <a:rPr lang="fr-FR" sz="1100" dirty="0">
                           <a:solidFill>
-                            <a:schemeClr val="bg1"/>
+                            <a:srgbClr val="0070C0"/>
                           </a:solidFill>
                         </a:rPr>
                         <a:t>Création d’un dictionnaire de données.</a:t>
                       </a:r>
                     </a:p>
                   </a:txBody>
-                  <a:tcPr anchor="ctr"/>
+                  <a:tcPr anchor="ctr">
+                    <a:lnL w="12700" cap="flat" cmpd="sng" algn="ctr">
+                      <a:solidFill>
+                        <a:schemeClr val="tx1"/>
+                      </a:solidFill>
+                      <a:prstDash val="solid"/>
+                      <a:round/>
+                      <a:headEnd type="none" w="med" len="med"/>
+                      <a:tailEnd type="none" w="med" len="med"/>
+                    </a:lnL>
+                    <a:lnR w="12700" cap="flat" cmpd="sng" algn="ctr">
+                      <a:solidFill>
+                        <a:schemeClr val="tx1"/>
+                      </a:solidFill>
+                      <a:prstDash val="solid"/>
+                      <a:round/>
+                      <a:headEnd type="none" w="med" len="med"/>
+                      <a:tailEnd type="none" w="med" len="med"/>
+                    </a:lnR>
+                    <a:lnT w="12700" cap="flat" cmpd="sng" algn="ctr">
+                      <a:solidFill>
+                        <a:schemeClr val="tx1"/>
+                      </a:solidFill>
+                      <a:prstDash val="solid"/>
+                      <a:round/>
+                      <a:headEnd type="none" w="med" len="med"/>
+                      <a:tailEnd type="none" w="med" len="med"/>
+                    </a:lnT>
+                    <a:lnB w="12700" cap="flat" cmpd="sng" algn="ctr">
+                      <a:solidFill>
+                        <a:schemeClr val="tx1"/>
+                      </a:solidFill>
+                      <a:prstDash val="solid"/>
+                      <a:round/>
+                      <a:headEnd type="none" w="med" len="med"/>
+                      <a:tailEnd type="none" w="med" len="med"/>
+                    </a:lnB>
+                    <a:lnTlToBr w="12700" cmpd="sng">
+                      <a:noFill/>
+                      <a:prstDash val="solid"/>
+                    </a:lnTlToBr>
+                    <a:lnBlToTr w="12700" cmpd="sng">
+                      <a:noFill/>
+                      <a:prstDash val="solid"/>
+                    </a:lnBlToTr>
+                    <a:solidFill>
+                      <a:schemeClr val="bg1"/>
+                    </a:solidFill>
+                  </a:tcPr>
                 </a:tc>
                 <a:extLst>
                   <a:ext uri="{0D108BD9-81ED-4DB2-BD59-A6C34878D82A}">
                     <a16:rowId xmlns:a16="http://schemas.microsoft.com/office/drawing/2014/main" val="3609857684"/>
+                  </a:ext>
+                </a:extLst>
+              </a:tr>
+              <a:tr h="697434">
+                <a:tc>
+                  <a:txBody>
+                    <a:bodyPr/>
+                    <a:lstStyle/>
+                    <a:p>
+                      <a:pPr>
+                        <a:buNone/>
+                      </a:pPr>
+                      <a:r>
+                        <a:rPr lang="fr-FR" sz="1400" b="1" kern="1200" dirty="0">
+                          <a:solidFill>
+                            <a:srgbClr val="0070C0"/>
+                          </a:solidFill>
+                          <a:latin typeface="+mn-lt"/>
+                          <a:ea typeface="+mn-ea"/>
+                          <a:cs typeface="+mn-cs"/>
+                        </a:rPr>
+                        <a:t>2. Le script de Création des rôles utilisateurs</a:t>
+                      </a:r>
+                    </a:p>
+                  </a:txBody>
+                  <a:tcPr anchor="ctr">
+                    <a:lnL w="12700" cap="flat" cmpd="sng" algn="ctr">
+                      <a:solidFill>
+                        <a:schemeClr val="tx1"/>
+                      </a:solidFill>
+                      <a:prstDash val="solid"/>
+                      <a:round/>
+                      <a:headEnd type="none" w="med" len="med"/>
+                      <a:tailEnd type="none" w="med" len="med"/>
+                    </a:lnL>
+                    <a:lnR w="12700" cap="flat" cmpd="sng" algn="ctr">
+                      <a:solidFill>
+                        <a:schemeClr val="tx1"/>
+                      </a:solidFill>
+                      <a:prstDash val="solid"/>
+                      <a:round/>
+                      <a:headEnd type="none" w="med" len="med"/>
+                      <a:tailEnd type="none" w="med" len="med"/>
+                    </a:lnR>
+                    <a:lnT w="12700" cap="flat" cmpd="sng" algn="ctr">
+                      <a:solidFill>
+                        <a:schemeClr val="tx1"/>
+                      </a:solidFill>
+                      <a:prstDash val="solid"/>
+                      <a:round/>
+                      <a:headEnd type="none" w="med" len="med"/>
+                      <a:tailEnd type="none" w="med" len="med"/>
+                    </a:lnT>
+                    <a:lnB w="12700" cap="flat" cmpd="sng" algn="ctr">
+                      <a:solidFill>
+                        <a:schemeClr val="tx1"/>
+                      </a:solidFill>
+                      <a:prstDash val="solid"/>
+                      <a:round/>
+                      <a:headEnd type="none" w="med" len="med"/>
+                      <a:tailEnd type="none" w="med" len="med"/>
+                    </a:lnB>
+                    <a:lnTlToBr w="12700" cmpd="sng">
+                      <a:noFill/>
+                      <a:prstDash val="solid"/>
+                    </a:lnTlToBr>
+                    <a:lnBlToTr w="12700" cmpd="sng">
+                      <a:noFill/>
+                      <a:prstDash val="solid"/>
+                    </a:lnBlToTr>
+                    <a:solidFill>
+                      <a:schemeClr val="bg1"/>
+                    </a:solidFill>
+                  </a:tcPr>
+                </a:tc>
+                <a:tc>
+                  <a:txBody>
+                    <a:bodyPr/>
+                    <a:lstStyle/>
+                    <a:p>
+                      <a:pPr>
+                        <a:buNone/>
+                      </a:pPr>
+                      <a:r>
+                        <a:rPr lang="fr-FR" sz="1100" b="1" dirty="0">
+                          <a:solidFill>
+                            <a:srgbClr val="0070C0"/>
+                          </a:solidFill>
+                        </a:rPr>
+                        <a:t>Développement</a:t>
+                      </a:r>
+                      <a:r>
+                        <a:rPr lang="fr-FR" sz="1100" b="0" dirty="0">
+                          <a:solidFill>
+                            <a:srgbClr val="0070C0"/>
+                          </a:solidFill>
+                        </a:rPr>
+                        <a:t> d'un script de création des </a:t>
+                      </a:r>
+                      <a:r>
+                        <a:rPr lang="fr-FR" sz="1100" b="1" dirty="0">
+                          <a:solidFill>
+                            <a:srgbClr val="0070C0"/>
+                          </a:solidFill>
+                        </a:rPr>
+                        <a:t>rôles utilisateurs</a:t>
+                      </a:r>
+                      <a:r>
+                        <a:rPr lang="fr-FR" sz="1100" b="0" dirty="0">
+                          <a:solidFill>
+                            <a:srgbClr val="0070C0"/>
+                          </a:solidFill>
+                        </a:rPr>
+                        <a:t>: </a:t>
+                      </a:r>
+                    </a:p>
+                    <a:p>
+                      <a:pPr marL="285750" indent="-285750">
+                        <a:buFontTx/>
+                        <a:buChar char="-"/>
+                      </a:pPr>
+                      <a:r>
+                        <a:rPr lang="fr-FR" sz="1100" b="1" dirty="0">
+                          <a:solidFill>
+                            <a:srgbClr val="0070C0"/>
+                          </a:solidFill>
+                        </a:rPr>
+                        <a:t>Création</a:t>
+                      </a:r>
+                      <a:r>
+                        <a:rPr lang="fr-FR" sz="1100" b="0" dirty="0">
+                          <a:solidFill>
+                            <a:srgbClr val="0070C0"/>
+                          </a:solidFill>
+                        </a:rPr>
+                        <a:t> des différents </a:t>
+                      </a:r>
+                      <a:r>
+                        <a:rPr lang="fr-FR" sz="1100" b="1" dirty="0">
+                          <a:solidFill>
+                            <a:srgbClr val="0070C0"/>
+                          </a:solidFill>
+                        </a:rPr>
+                        <a:t>rôles</a:t>
+                      </a:r>
+                      <a:r>
+                        <a:rPr lang="fr-FR" sz="1100" b="0" dirty="0">
+                          <a:solidFill>
+                            <a:srgbClr val="0070C0"/>
+                          </a:solidFill>
+                        </a:rPr>
+                        <a:t> pour la </a:t>
+                      </a:r>
+                      <a:r>
+                        <a:rPr lang="fr-FR" sz="1100" b="1" dirty="0">
+                          <a:solidFill>
+                            <a:srgbClr val="0070C0"/>
+                          </a:solidFill>
+                        </a:rPr>
+                        <a:t>sécurisation</a:t>
+                      </a:r>
+                      <a:r>
+                        <a:rPr lang="fr-FR" sz="1100" b="0" dirty="0">
+                          <a:solidFill>
+                            <a:srgbClr val="0070C0"/>
+                          </a:solidFill>
+                        </a:rPr>
+                        <a:t> de la </a:t>
+                      </a:r>
+                      <a:r>
+                        <a:rPr lang="fr-FR" sz="1100" b="1" dirty="0">
+                          <a:solidFill>
+                            <a:srgbClr val="0070C0"/>
+                          </a:solidFill>
+                        </a:rPr>
+                        <a:t>base de données </a:t>
+                      </a:r>
+                      <a:r>
+                        <a:rPr lang="fr-FR" sz="1100" b="0" i="1" dirty="0">
+                          <a:solidFill>
+                            <a:srgbClr val="0070C0"/>
+                          </a:solidFill>
+                        </a:rPr>
+                        <a:t>(Admin, </a:t>
+                      </a:r>
+                      <a:r>
+                        <a:rPr lang="fr-FR" sz="1100" b="0" i="1" dirty="0" err="1">
+                          <a:solidFill>
+                            <a:srgbClr val="0070C0"/>
+                          </a:solidFill>
+                        </a:rPr>
+                        <a:t>read</a:t>
+                      </a:r>
+                      <a:r>
+                        <a:rPr lang="fr-FR" sz="1100" b="0" i="1" dirty="0">
+                          <a:solidFill>
+                            <a:srgbClr val="0070C0"/>
+                          </a:solidFill>
+                        </a:rPr>
+                        <a:t>/</a:t>
+                      </a:r>
+                      <a:r>
+                        <a:rPr lang="fr-FR" sz="1100" b="0" i="1" dirty="0" err="1">
+                          <a:solidFill>
+                            <a:srgbClr val="0070C0"/>
+                          </a:solidFill>
+                        </a:rPr>
+                        <a:t>write</a:t>
+                      </a:r>
+                      <a:r>
+                        <a:rPr lang="fr-FR" sz="1100" b="0" i="1" dirty="0">
+                          <a:solidFill>
+                            <a:srgbClr val="0070C0"/>
+                          </a:solidFill>
+                        </a:rPr>
+                        <a:t> et </a:t>
+                      </a:r>
+                      <a:r>
+                        <a:rPr lang="fr-FR" sz="1100" b="0" i="1" dirty="0" err="1">
+                          <a:solidFill>
+                            <a:srgbClr val="0070C0"/>
+                          </a:solidFill>
+                        </a:rPr>
+                        <a:t>read</a:t>
+                      </a:r>
+                      <a:r>
+                        <a:rPr lang="fr-FR" sz="1100" b="0" i="1" dirty="0">
+                          <a:solidFill>
+                            <a:srgbClr val="0070C0"/>
+                          </a:solidFill>
+                        </a:rPr>
+                        <a:t> </a:t>
+                      </a:r>
+                      <a:r>
+                        <a:rPr lang="fr-FR" sz="1100" b="0" i="1" dirty="0" err="1">
+                          <a:solidFill>
+                            <a:srgbClr val="0070C0"/>
+                          </a:solidFill>
+                        </a:rPr>
+                        <a:t>only</a:t>
+                      </a:r>
+                      <a:r>
+                        <a:rPr lang="fr-FR" sz="1100" b="0" i="1" dirty="0">
+                          <a:solidFill>
+                            <a:srgbClr val="0070C0"/>
+                          </a:solidFill>
+                        </a:rPr>
+                        <a:t>)</a:t>
+                      </a:r>
+                      <a:r>
+                        <a:rPr lang="fr-FR" sz="1100" b="0" dirty="0">
+                          <a:solidFill>
+                            <a:srgbClr val="0070C0"/>
+                          </a:solidFill>
+                        </a:rPr>
+                        <a:t>.</a:t>
+                      </a:r>
+                    </a:p>
+                  </a:txBody>
+                  <a:tcPr anchor="ctr">
+                    <a:lnL w="12700" cap="flat" cmpd="sng" algn="ctr">
+                      <a:solidFill>
+                        <a:schemeClr val="tx1"/>
+                      </a:solidFill>
+                      <a:prstDash val="solid"/>
+                      <a:round/>
+                      <a:headEnd type="none" w="med" len="med"/>
+                      <a:tailEnd type="none" w="med" len="med"/>
+                    </a:lnL>
+                    <a:lnR w="12700" cap="flat" cmpd="sng" algn="ctr">
+                      <a:solidFill>
+                        <a:schemeClr val="tx1"/>
+                      </a:solidFill>
+                      <a:prstDash val="solid"/>
+                      <a:round/>
+                      <a:headEnd type="none" w="med" len="med"/>
+                      <a:tailEnd type="none" w="med" len="med"/>
+                    </a:lnR>
+                    <a:lnT w="12700" cap="flat" cmpd="sng" algn="ctr">
+                      <a:solidFill>
+                        <a:schemeClr val="tx1"/>
+                      </a:solidFill>
+                      <a:prstDash val="solid"/>
+                      <a:round/>
+                      <a:headEnd type="none" w="med" len="med"/>
+                      <a:tailEnd type="none" w="med" len="med"/>
+                    </a:lnT>
+                    <a:lnB w="12700" cap="flat" cmpd="sng" algn="ctr">
+                      <a:solidFill>
+                        <a:schemeClr val="tx1"/>
+                      </a:solidFill>
+                      <a:prstDash val="solid"/>
+                      <a:round/>
+                      <a:headEnd type="none" w="med" len="med"/>
+                      <a:tailEnd type="none" w="med" len="med"/>
+                    </a:lnB>
+                    <a:lnTlToBr w="12700" cmpd="sng">
+                      <a:noFill/>
+                      <a:prstDash val="solid"/>
+                    </a:lnTlToBr>
+                    <a:lnBlToTr w="12700" cmpd="sng">
+                      <a:noFill/>
+                      <a:prstDash val="solid"/>
+                    </a:lnBlToTr>
+                    <a:solidFill>
+                      <a:schemeClr val="bg1"/>
+                    </a:solidFill>
+                  </a:tcPr>
+                </a:tc>
+                <a:extLst>
+                  <a:ext uri="{0D108BD9-81ED-4DB2-BD59-A6C34878D82A}">
+                    <a16:rowId xmlns:a16="http://schemas.microsoft.com/office/drawing/2014/main" val="2056932785"/>
                   </a:ext>
                 </a:extLst>
               </a:tr>
@@ -10091,21 +13012,69 @@
                         <a:buNone/>
                       </a:pPr>
                       <a:r>
-                        <a:rPr lang="fr-FR" sz="1800" b="1" dirty="0">
+                        <a:rPr lang="fr-FR" sz="1400" b="1" dirty="0">
                           <a:solidFill>
-                            <a:schemeClr val="bg1"/>
+                            <a:srgbClr val="0070C0"/>
                           </a:solidFill>
                         </a:rPr>
-                        <a:t>2. Le Script de Migration</a:t>
+                        <a:t>3. Le Script de Migration</a:t>
                       </a:r>
-                      <a:endParaRPr lang="fr-FR" sz="1800" dirty="0">
+                      <a:endParaRPr lang="fr-FR" sz="1400" dirty="0">
                         <a:solidFill>
-                          <a:schemeClr val="bg1"/>
+                          <a:srgbClr val="0070C0"/>
                         </a:solidFill>
                       </a:endParaRPr>
                     </a:p>
                   </a:txBody>
-                  <a:tcPr anchor="ctr"/>
+                  <a:tcPr anchor="ctr">
+                    <a:lnL w="12700" cap="flat" cmpd="sng" algn="ctr">
+                      <a:solidFill>
+                        <a:schemeClr val="tx1"/>
+                      </a:solidFill>
+                      <a:prstDash val="solid"/>
+                      <a:round/>
+                      <a:headEnd type="none" w="med" len="med"/>
+                      <a:tailEnd type="none" w="med" len="med"/>
+                    </a:lnL>
+                    <a:lnR w="12700" cap="flat" cmpd="sng" algn="ctr">
+                      <a:solidFill>
+                        <a:schemeClr val="tx1"/>
+                      </a:solidFill>
+                      <a:prstDash val="solid"/>
+                      <a:round/>
+                      <a:headEnd type="none" w="med" len="med"/>
+                      <a:tailEnd type="none" w="med" len="med"/>
+                    </a:lnR>
+                    <a:lnT w="12700" cap="flat" cmpd="sng" algn="ctr">
+                      <a:solidFill>
+                        <a:schemeClr val="tx1"/>
+                      </a:solidFill>
+                      <a:prstDash val="solid"/>
+                      <a:round/>
+                      <a:headEnd type="none" w="med" len="med"/>
+                      <a:tailEnd type="none" w="med" len="med"/>
+                    </a:lnT>
+                    <a:lnB w="12700" cap="flat" cmpd="sng" algn="ctr">
+                      <a:solidFill>
+                        <a:schemeClr val="tx1"/>
+                      </a:solidFill>
+                      <a:prstDash val="solid"/>
+                      <a:round/>
+                      <a:headEnd type="none" w="med" len="med"/>
+                      <a:tailEnd type="none" w="med" len="med"/>
+                    </a:lnB>
+                    <a:lnTlToBr w="12700" cmpd="sng">
+                      <a:noFill/>
+                      <a:prstDash val="solid"/>
+                    </a:lnTlToBr>
+                    <a:lnBlToTr w="12700" cmpd="sng">
+                      <a:noFill/>
+                      <a:prstDash val="solid"/>
+                    </a:lnBlToTr>
+                    <a:solidFill>
+                      <a:schemeClr val="bg1"/>
+                    </a:solidFill>
+                  </a:tcPr>
                 </a:tc>
                 <a:tc>
                   <a:txBody>
@@ -10116,57 +13085,57 @@
                         <a:buNone/>
                       </a:pPr>
                       <a:r>
-                        <a:rPr lang="fr-FR" sz="1400" dirty="0">
+                        <a:rPr lang="fr-FR" sz="1100" dirty="0">
                           <a:solidFill>
-                            <a:schemeClr val="bg1"/>
+                            <a:srgbClr val="0070C0"/>
                           </a:solidFill>
                         </a:rPr>
                         <a:t>Développement d'un script </a:t>
                       </a:r>
                       <a:r>
-                        <a:rPr lang="fr-FR" sz="1400" b="1" dirty="0">
+                        <a:rPr lang="fr-FR" sz="1100" b="1" dirty="0">
                           <a:solidFill>
-                            <a:schemeClr val="bg1"/>
+                            <a:srgbClr val="0070C0"/>
                           </a:solidFill>
                         </a:rPr>
                         <a:t>Python</a:t>
                       </a:r>
                       <a:r>
-                        <a:rPr lang="fr-FR" sz="1400" dirty="0">
+                        <a:rPr lang="fr-FR" sz="1100" dirty="0">
                           <a:solidFill>
-                            <a:schemeClr val="bg1"/>
+                            <a:srgbClr val="0070C0"/>
                           </a:solidFill>
                         </a:rPr>
                         <a:t> utilisant le driver MongoDB </a:t>
                       </a:r>
                       <a:r>
-                        <a:rPr lang="fr-FR" sz="1400" i="1" dirty="0">
+                        <a:rPr lang="fr-FR" sz="1100" i="1" dirty="0">
                           <a:solidFill>
-                            <a:schemeClr val="bg1"/>
+                            <a:srgbClr val="0070C0"/>
                           </a:solidFill>
                         </a:rPr>
                         <a:t>(</a:t>
                       </a:r>
                       <a:r>
-                        <a:rPr lang="fr-FR" sz="1400" i="1" dirty="0" err="1">
+                        <a:rPr lang="fr-FR" sz="1100" i="1" dirty="0" err="1">
                           <a:solidFill>
-                            <a:schemeClr val="bg1"/>
+                            <a:srgbClr val="0070C0"/>
                           </a:solidFill>
                         </a:rPr>
                         <a:t>pymongo</a:t>
                       </a:r>
                       <a:r>
-                        <a:rPr lang="fr-FR" sz="1400" i="1" dirty="0">
+                        <a:rPr lang="fr-FR" sz="1100" i="1" dirty="0">
                           <a:solidFill>
-                            <a:schemeClr val="bg1"/>
+                            <a:srgbClr val="0070C0"/>
                           </a:solidFill>
                         </a:rPr>
                         <a:t>) </a:t>
                       </a:r>
                       <a:r>
-                        <a:rPr lang="fr-FR" sz="1400" dirty="0">
+                        <a:rPr lang="fr-FR" sz="1100" dirty="0">
                           <a:solidFill>
-                            <a:schemeClr val="bg1"/>
+                            <a:srgbClr val="0070C0"/>
                           </a:solidFill>
                         </a:rPr>
                         <a:t>pour : </a:t>
@@ -10178,9 +13147,9 @@
                         <a:buChar char="-"/>
                       </a:pPr>
                       <a:r>
-                        <a:rPr lang="fr-FR" sz="1400" dirty="0">
+                        <a:rPr lang="fr-FR" sz="1100" dirty="0">
                           <a:solidFill>
-                            <a:schemeClr val="bg1"/>
+                            <a:srgbClr val="0070C0"/>
                           </a:solidFill>
                         </a:rPr>
                         <a:t>Se connecter à la base de données.</a:t>
@@ -10192,33 +13161,33 @@
                         <a:buChar char="-"/>
                       </a:pPr>
                       <a:r>
-                        <a:rPr lang="fr-FR" sz="1400" b="1" dirty="0">
+                        <a:rPr lang="fr-FR" sz="1100" b="1" dirty="0">
                           <a:solidFill>
-                            <a:schemeClr val="bg1"/>
+                            <a:srgbClr val="0070C0"/>
                           </a:solidFill>
                         </a:rPr>
                         <a:t>Lire</a:t>
                       </a:r>
                       <a:r>
-                        <a:rPr lang="fr-FR" sz="1400" dirty="0">
+                        <a:rPr lang="fr-FR" sz="1100" dirty="0">
                           <a:solidFill>
-                            <a:schemeClr val="bg1"/>
+                            <a:srgbClr val="0070C0"/>
                           </a:solidFill>
                         </a:rPr>
                         <a:t> le </a:t>
                       </a:r>
                       <a:r>
-                        <a:rPr lang="fr-FR" sz="1400" dirty="0" err="1">
+                        <a:rPr lang="fr-FR" sz="1100" dirty="0" err="1">
                           <a:solidFill>
-                            <a:schemeClr val="bg1"/>
+                            <a:srgbClr val="0070C0"/>
                           </a:solidFill>
                         </a:rPr>
                         <a:t>dataset</a:t>
                       </a:r>
                       <a:r>
-                        <a:rPr lang="fr-FR" sz="1400" dirty="0">
+                        <a:rPr lang="fr-FR" sz="1100" dirty="0">
                           <a:solidFill>
-                            <a:schemeClr val="bg1"/>
+                            <a:srgbClr val="0070C0"/>
                           </a:solidFill>
                         </a:rPr>
                         <a:t> source. </a:t>
@@ -10230,17 +13199,17 @@
                         <a:buChar char="-"/>
                       </a:pPr>
                       <a:r>
-                        <a:rPr lang="fr-FR" sz="1400" b="1" dirty="0">
+                        <a:rPr lang="fr-FR" sz="1100" b="1" dirty="0">
                           <a:solidFill>
-                            <a:schemeClr val="bg1"/>
+                            <a:srgbClr val="0070C0"/>
                           </a:solidFill>
                         </a:rPr>
                         <a:t>Mapper</a:t>
                       </a:r>
                       <a:r>
-                        <a:rPr lang="fr-FR" sz="1400" dirty="0">
+                        <a:rPr lang="fr-FR" sz="1100" dirty="0">
                           <a:solidFill>
-                            <a:schemeClr val="bg1"/>
+                            <a:srgbClr val="0070C0"/>
                           </a:solidFill>
                         </a:rPr>
                         <a:t> et transformer les données dans la structure de document MongoDB souhaitée.</a:t>
@@ -10252,24 +13221,72 @@
                         <a:buChar char="-"/>
                       </a:pPr>
                       <a:r>
-                        <a:rPr lang="fr-FR" sz="1400" b="1" dirty="0">
+                        <a:rPr lang="fr-FR" sz="1100" b="1" dirty="0">
                           <a:solidFill>
-                            <a:schemeClr val="bg1"/>
+                            <a:srgbClr val="0070C0"/>
                           </a:solidFill>
                         </a:rPr>
                         <a:t>Insérer</a:t>
                       </a:r>
                       <a:r>
-                        <a:rPr lang="fr-FR" sz="1400" dirty="0">
+                        <a:rPr lang="fr-FR" sz="1100" dirty="0">
                           <a:solidFill>
-                            <a:schemeClr val="bg1"/>
+                            <a:srgbClr val="0070C0"/>
                           </a:solidFill>
                         </a:rPr>
                         <a:t> les documents dans la collection cible.</a:t>
                       </a:r>
                     </a:p>
                   </a:txBody>
-                  <a:tcPr anchor="ctr"/>
+                  <a:tcPr anchor="ctr">
+                    <a:lnL w="12700" cap="flat" cmpd="sng" algn="ctr">
+                      <a:solidFill>
+                        <a:schemeClr val="tx1"/>
+                      </a:solidFill>
+                      <a:prstDash val="solid"/>
+                      <a:round/>
+                      <a:headEnd type="none" w="med" len="med"/>
+                      <a:tailEnd type="none" w="med" len="med"/>
+                    </a:lnL>
+                    <a:lnR w="12700" cap="flat" cmpd="sng" algn="ctr">
+                      <a:solidFill>
+                        <a:schemeClr val="tx1"/>
+                      </a:solidFill>
+                      <a:prstDash val="solid"/>
+                      <a:round/>
+                      <a:headEnd type="none" w="med" len="med"/>
+                      <a:tailEnd type="none" w="med" len="med"/>
+                    </a:lnR>
+                    <a:lnT w="12700" cap="flat" cmpd="sng" algn="ctr">
+                      <a:solidFill>
+                        <a:schemeClr val="tx1"/>
+                      </a:solidFill>
+                      <a:prstDash val="solid"/>
+                      <a:round/>
+                      <a:headEnd type="none" w="med" len="med"/>
+                      <a:tailEnd type="none" w="med" len="med"/>
+                    </a:lnT>
+                    <a:lnB w="12700" cap="flat" cmpd="sng" algn="ctr">
+                      <a:solidFill>
+                        <a:schemeClr val="tx1"/>
+                      </a:solidFill>
+                      <a:prstDash val="solid"/>
+                      <a:round/>
+                      <a:headEnd type="none" w="med" len="med"/>
+                      <a:tailEnd type="none" w="med" len="med"/>
+                    </a:lnB>
+                    <a:lnTlToBr w="12700" cmpd="sng">
+                      <a:noFill/>
+                      <a:prstDash val="solid"/>
+                    </a:lnTlToBr>
+                    <a:lnBlToTr w="12700" cmpd="sng">
+                      <a:noFill/>
+                      <a:prstDash val="solid"/>
+                    </a:lnBlToTr>
+                    <a:solidFill>
+                      <a:schemeClr val="bg1"/>
+                    </a:solidFill>
+                  </a:tcPr>
                 </a:tc>
                 <a:extLst>
                   <a:ext uri="{0D108BD9-81ED-4DB2-BD59-A6C34878D82A}">
@@ -10287,21 +13304,69 @@
                         <a:buNone/>
                       </a:pPr>
                       <a:r>
-                        <a:rPr lang="fr-FR" sz="1800" b="1" dirty="0">
+                        <a:rPr lang="fr-FR" sz="1400" b="1" dirty="0">
                           <a:solidFill>
-                            <a:schemeClr val="bg1"/>
+                            <a:srgbClr val="0070C0"/>
                           </a:solidFill>
                         </a:rPr>
-                        <a:t>3. Le Script de Validation de la base de données</a:t>
+                        <a:t>4. Le Script de Validation de la base de données</a:t>
                       </a:r>
-                      <a:endParaRPr lang="fr-FR" sz="1800" dirty="0">
+                      <a:endParaRPr lang="fr-FR" sz="1400" dirty="0">
                         <a:solidFill>
-                          <a:schemeClr val="bg1"/>
+                          <a:srgbClr val="0070C0"/>
                         </a:solidFill>
                       </a:endParaRPr>
                     </a:p>
                   </a:txBody>
-                  <a:tcPr anchor="ctr"/>
+                  <a:tcPr anchor="ctr">
+                    <a:lnL w="12700" cap="flat" cmpd="sng" algn="ctr">
+                      <a:solidFill>
+                        <a:schemeClr val="tx1"/>
+                      </a:solidFill>
+                      <a:prstDash val="solid"/>
+                      <a:round/>
+                      <a:headEnd type="none" w="med" len="med"/>
+                      <a:tailEnd type="none" w="med" len="med"/>
+                    </a:lnL>
+                    <a:lnR w="12700" cap="flat" cmpd="sng" algn="ctr">
+                      <a:solidFill>
+                        <a:schemeClr val="tx1"/>
+                      </a:solidFill>
+                      <a:prstDash val="solid"/>
+                      <a:round/>
+                      <a:headEnd type="none" w="med" len="med"/>
+                      <a:tailEnd type="none" w="med" len="med"/>
+                    </a:lnR>
+                    <a:lnT w="12700" cap="flat" cmpd="sng" algn="ctr">
+                      <a:solidFill>
+                        <a:schemeClr val="tx1"/>
+                      </a:solidFill>
+                      <a:prstDash val="solid"/>
+                      <a:round/>
+                      <a:headEnd type="none" w="med" len="med"/>
+                      <a:tailEnd type="none" w="med" len="med"/>
+                    </a:lnT>
+                    <a:lnB w="12700" cap="flat" cmpd="sng" algn="ctr">
+                      <a:solidFill>
+                        <a:schemeClr val="tx1"/>
+                      </a:solidFill>
+                      <a:prstDash val="solid"/>
+                      <a:round/>
+                      <a:headEnd type="none" w="med" len="med"/>
+                      <a:tailEnd type="none" w="med" len="med"/>
+                    </a:lnB>
+                    <a:lnTlToBr w="12700" cmpd="sng">
+                      <a:noFill/>
+                      <a:prstDash val="solid"/>
+                    </a:lnTlToBr>
+                    <a:lnBlToTr w="12700" cmpd="sng">
+                      <a:noFill/>
+                      <a:prstDash val="solid"/>
+                    </a:lnBlToTr>
+                    <a:solidFill>
+                      <a:schemeClr val="bg1"/>
+                    </a:solidFill>
+                  </a:tcPr>
                 </a:tc>
                 <a:tc>
                   <a:txBody>
@@ -10312,57 +13377,57 @@
                         <a:buNone/>
                       </a:pPr>
                       <a:r>
-                        <a:rPr lang="fr-FR" sz="1400" b="0" dirty="0">
+                        <a:rPr lang="fr-FR" sz="1100" b="0" dirty="0">
                           <a:solidFill>
-                            <a:schemeClr val="bg1"/>
+                            <a:srgbClr val="0070C0"/>
                           </a:solidFill>
                         </a:rPr>
                         <a:t>Développement d'un script </a:t>
                       </a:r>
                       <a:r>
-                        <a:rPr lang="fr-FR" sz="1400" b="1" dirty="0">
+                        <a:rPr lang="fr-FR" sz="1100" b="1" dirty="0">
                           <a:solidFill>
-                            <a:schemeClr val="bg1"/>
+                            <a:srgbClr val="0070C0"/>
                           </a:solidFill>
                         </a:rPr>
                         <a:t>Python</a:t>
                       </a:r>
                       <a:r>
-                        <a:rPr lang="fr-FR" sz="1400" b="0" dirty="0">
+                        <a:rPr lang="fr-FR" sz="1100" b="0" dirty="0">
                           <a:solidFill>
-                            <a:schemeClr val="bg1"/>
+                            <a:srgbClr val="0070C0"/>
                           </a:solidFill>
                         </a:rPr>
                         <a:t> utilisant le driver MongoDB </a:t>
                       </a:r>
                       <a:r>
-                        <a:rPr lang="fr-FR" sz="1400" b="0" i="1" dirty="0">
+                        <a:rPr lang="fr-FR" sz="1100" b="0" i="1" dirty="0">
                           <a:solidFill>
-                            <a:schemeClr val="bg1"/>
+                            <a:srgbClr val="0070C0"/>
                           </a:solidFill>
                         </a:rPr>
                         <a:t>(</a:t>
                       </a:r>
                       <a:r>
-                        <a:rPr lang="fr-FR" sz="1400" b="0" i="1" dirty="0" err="1">
+                        <a:rPr lang="fr-FR" sz="1100" b="0" i="1" dirty="0" err="1">
                           <a:solidFill>
-                            <a:schemeClr val="bg1"/>
+                            <a:srgbClr val="0070C0"/>
                           </a:solidFill>
                         </a:rPr>
                         <a:t>pymongo</a:t>
                       </a:r>
                       <a:r>
-                        <a:rPr lang="fr-FR" sz="1400" b="0" i="1" dirty="0">
+                        <a:rPr lang="fr-FR" sz="1100" b="0" i="1" dirty="0">
                           <a:solidFill>
-                            <a:schemeClr val="bg1"/>
+                            <a:srgbClr val="0070C0"/>
                           </a:solidFill>
                         </a:rPr>
                         <a:t>) </a:t>
                       </a:r>
                       <a:r>
-                        <a:rPr lang="fr-FR" sz="1400" b="0" dirty="0">
+                        <a:rPr lang="fr-FR" sz="1100" b="0" dirty="0">
                           <a:solidFill>
-                            <a:schemeClr val="bg1"/>
+                            <a:srgbClr val="0070C0"/>
                           </a:solidFill>
                         </a:rPr>
                         <a:t>pour : </a:t>
@@ -10374,9 +13439,9 @@
                         <a:buChar char="-"/>
                       </a:pPr>
                       <a:r>
-                        <a:rPr lang="fr-FR" sz="1400" b="0" dirty="0">
+                        <a:rPr lang="fr-FR" sz="1100" b="0" dirty="0">
                           <a:solidFill>
-                            <a:schemeClr val="bg1"/>
+                            <a:srgbClr val="0070C0"/>
                           </a:solidFill>
                         </a:rPr>
                         <a:t>Se connecter à la base de données.</a:t>
@@ -10388,88 +13453,136 @@
                         <a:buChar char="-"/>
                       </a:pPr>
                       <a:r>
-                        <a:rPr lang="fr-FR" sz="1400" b="1" dirty="0">
+                        <a:rPr lang="fr-FR" sz="1100" b="1" dirty="0">
                           <a:solidFill>
-                            <a:schemeClr val="bg1"/>
+                            <a:srgbClr val="0070C0"/>
                           </a:solidFill>
                         </a:rPr>
                         <a:t>Vérification</a:t>
                       </a:r>
                       <a:r>
-                        <a:rPr lang="fr-FR" sz="1400" b="0" dirty="0">
+                        <a:rPr lang="fr-FR" sz="1100" b="0" dirty="0">
                           <a:solidFill>
-                            <a:schemeClr val="bg1"/>
+                            <a:srgbClr val="0070C0"/>
                           </a:solidFill>
                         </a:rPr>
                         <a:t> que les commandes de base </a:t>
                       </a:r>
                       <a:r>
-                        <a:rPr lang="fr-FR" sz="1400" b="1" dirty="0">
+                        <a:rPr lang="fr-FR" sz="1100" b="1" dirty="0">
                           <a:solidFill>
-                            <a:schemeClr val="bg1"/>
+                            <a:srgbClr val="0070C0"/>
                           </a:solidFill>
                         </a:rPr>
                         <a:t>CRUD</a:t>
                       </a:r>
                       <a:r>
-                        <a:rPr lang="fr-FR" sz="1400" b="0" dirty="0">
+                        <a:rPr lang="fr-FR" sz="1100" b="0" dirty="0">
                           <a:solidFill>
-                            <a:schemeClr val="bg1"/>
+                            <a:srgbClr val="0070C0"/>
                           </a:solidFill>
                         </a:rPr>
                         <a:t> </a:t>
                       </a:r>
                       <a:r>
-                        <a:rPr lang="fr-FR" sz="1400" b="0" i="1" dirty="0">
+                        <a:rPr lang="fr-FR" sz="1100" b="0" i="1" dirty="0">
                           <a:solidFill>
-                            <a:schemeClr val="bg1"/>
+                            <a:srgbClr val="0070C0"/>
                           </a:solidFill>
                         </a:rPr>
                         <a:t>(</a:t>
                       </a:r>
                       <a:r>
-                        <a:rPr lang="fr-FR" sz="1400" b="0" i="1" dirty="0" err="1">
+                        <a:rPr lang="fr-FR" sz="1100" b="0" i="1" dirty="0" err="1">
                           <a:solidFill>
-                            <a:schemeClr val="bg1"/>
+                            <a:srgbClr val="0070C0"/>
                           </a:solidFill>
                         </a:rPr>
                         <a:t>Create</a:t>
                       </a:r>
                       <a:r>
-                        <a:rPr lang="fr-FR" sz="1400" b="0" i="1" dirty="0">
+                        <a:rPr lang="fr-FR" sz="1100" b="0" i="1" dirty="0">
                           <a:solidFill>
-                            <a:schemeClr val="bg1"/>
+                            <a:srgbClr val="0070C0"/>
                           </a:solidFill>
                         </a:rPr>
                         <a:t>, Read, Update, </a:t>
                       </a:r>
                       <a:r>
-                        <a:rPr lang="fr-FR" sz="1400" b="0" i="1" dirty="0" err="1">
+                        <a:rPr lang="fr-FR" sz="1100" b="0" i="1" dirty="0" err="1">
                           <a:solidFill>
-                            <a:schemeClr val="bg1"/>
+                            <a:srgbClr val="0070C0"/>
                           </a:solidFill>
                         </a:rPr>
                         <a:t>Delete</a:t>
                       </a:r>
                       <a:r>
-                        <a:rPr lang="fr-FR" sz="1400" b="0" i="1" dirty="0">
+                        <a:rPr lang="fr-FR" sz="1100" b="0" i="1" dirty="0">
                           <a:solidFill>
-                            <a:schemeClr val="bg1"/>
+                            <a:srgbClr val="0070C0"/>
                           </a:solidFill>
                         </a:rPr>
                         <a:t>)</a:t>
                       </a:r>
                       <a:r>
-                        <a:rPr lang="fr-FR" sz="1400" b="0" dirty="0">
+                        <a:rPr lang="fr-FR" sz="1100" b="0" dirty="0">
                           <a:solidFill>
-                            <a:schemeClr val="bg1"/>
+                            <a:srgbClr val="0070C0"/>
                           </a:solidFill>
                         </a:rPr>
                         <a:t> fonctionne correctement.</a:t>
                       </a:r>
                     </a:p>
                   </a:txBody>
-                  <a:tcPr anchor="ctr"/>
+                  <a:tcPr anchor="ctr">
+                    <a:lnL w="12700" cap="flat" cmpd="sng" algn="ctr">
+                      <a:solidFill>
+                        <a:schemeClr val="tx1"/>
+                      </a:solidFill>
+                      <a:prstDash val="solid"/>
+                      <a:round/>
+                      <a:headEnd type="none" w="med" len="med"/>
+                      <a:tailEnd type="none" w="med" len="med"/>
+                    </a:lnL>
+                    <a:lnR w="12700" cap="flat" cmpd="sng" algn="ctr">
+                      <a:solidFill>
+                        <a:schemeClr val="tx1"/>
+                      </a:solidFill>
+                      <a:prstDash val="solid"/>
+                      <a:round/>
+                      <a:headEnd type="none" w="med" len="med"/>
+                      <a:tailEnd type="none" w="med" len="med"/>
+                    </a:lnR>
+                    <a:lnT w="12700" cap="flat" cmpd="sng" algn="ctr">
+                      <a:solidFill>
+                        <a:schemeClr val="tx1"/>
+                      </a:solidFill>
+                      <a:prstDash val="solid"/>
+                      <a:round/>
+                      <a:headEnd type="none" w="med" len="med"/>
+                      <a:tailEnd type="none" w="med" len="med"/>
+                    </a:lnT>
+                    <a:lnB w="12700" cap="flat" cmpd="sng" algn="ctr">
+                      <a:solidFill>
+                        <a:schemeClr val="tx1"/>
+                      </a:solidFill>
+                      <a:prstDash val="solid"/>
+                      <a:round/>
+                      <a:headEnd type="none" w="med" len="med"/>
+                      <a:tailEnd type="none" w="med" len="med"/>
+                    </a:lnB>
+                    <a:lnTlToBr w="12700" cmpd="sng">
+                      <a:noFill/>
+                      <a:prstDash val="solid"/>
+                    </a:lnTlToBr>
+                    <a:lnBlToTr w="12700" cmpd="sng">
+                      <a:noFill/>
+                      <a:prstDash val="solid"/>
+                    </a:lnBlToTr>
+                    <a:solidFill>
+                      <a:schemeClr val="bg1"/>
+                    </a:solidFill>
+                  </a:tcPr>
                 </a:tc>
                 <a:extLst>
                   <a:ext uri="{0D108BD9-81ED-4DB2-BD59-A6C34878D82A}">
@@ -10487,21 +13600,69 @@
                         <a:buNone/>
                       </a:pPr>
                       <a:r>
-                        <a:rPr lang="fr-FR" sz="1800" b="1" dirty="0">
+                        <a:rPr lang="fr-FR" sz="1400" b="1" dirty="0">
                           <a:solidFill>
-                            <a:schemeClr val="bg1"/>
+                            <a:srgbClr val="0070C0"/>
                           </a:solidFill>
                         </a:rPr>
-                        <a:t>3. Conteneurisation (Docker)</a:t>
+                        <a:t>5. Conteneurisation (Docker)</a:t>
                       </a:r>
-                      <a:endParaRPr lang="fr-FR" sz="1800" dirty="0">
+                      <a:endParaRPr lang="fr-FR" sz="1400" dirty="0">
                         <a:solidFill>
-                          <a:schemeClr val="bg1"/>
+                          <a:srgbClr val="0070C0"/>
                         </a:solidFill>
                       </a:endParaRPr>
                     </a:p>
                   </a:txBody>
-                  <a:tcPr anchor="ctr"/>
+                  <a:tcPr anchor="ctr">
+                    <a:lnL w="12700" cap="flat" cmpd="sng" algn="ctr">
+                      <a:solidFill>
+                        <a:schemeClr val="tx1"/>
+                      </a:solidFill>
+                      <a:prstDash val="solid"/>
+                      <a:round/>
+                      <a:headEnd type="none" w="med" len="med"/>
+                      <a:tailEnd type="none" w="med" len="med"/>
+                    </a:lnL>
+                    <a:lnR w="12700" cap="flat" cmpd="sng" algn="ctr">
+                      <a:solidFill>
+                        <a:schemeClr val="tx1"/>
+                      </a:solidFill>
+                      <a:prstDash val="solid"/>
+                      <a:round/>
+                      <a:headEnd type="none" w="med" len="med"/>
+                      <a:tailEnd type="none" w="med" len="med"/>
+                    </a:lnR>
+                    <a:lnT w="12700" cap="flat" cmpd="sng" algn="ctr">
+                      <a:solidFill>
+                        <a:schemeClr val="tx1"/>
+                      </a:solidFill>
+                      <a:prstDash val="solid"/>
+                      <a:round/>
+                      <a:headEnd type="none" w="med" len="med"/>
+                      <a:tailEnd type="none" w="med" len="med"/>
+                    </a:lnT>
+                    <a:lnB w="12700" cap="flat" cmpd="sng" algn="ctr">
+                      <a:solidFill>
+                        <a:schemeClr val="tx1"/>
+                      </a:solidFill>
+                      <a:prstDash val="solid"/>
+                      <a:round/>
+                      <a:headEnd type="none" w="med" len="med"/>
+                      <a:tailEnd type="none" w="med" len="med"/>
+                    </a:lnB>
+                    <a:lnTlToBr w="12700" cmpd="sng">
+                      <a:noFill/>
+                      <a:prstDash val="solid"/>
+                    </a:lnTlToBr>
+                    <a:lnBlToTr w="12700" cmpd="sng">
+                      <a:noFill/>
+                      <a:prstDash val="solid"/>
+                    </a:lnBlToTr>
+                    <a:solidFill>
+                      <a:schemeClr val="bg1"/>
+                    </a:solidFill>
+                  </a:tcPr>
                 </a:tc>
                 <a:tc>
                   <a:txBody>
@@ -10512,9 +13673,9 @@
                         <a:buNone/>
                       </a:pPr>
                       <a:r>
-                        <a:rPr lang="fr-FR" sz="1400" dirty="0">
+                        <a:rPr lang="fr-FR" sz="1100" dirty="0">
                           <a:solidFill>
-                            <a:schemeClr val="bg1"/>
+                            <a:srgbClr val="0070C0"/>
                           </a:solidFill>
                         </a:rPr>
                         <a:t>Création de deux images Docker :</a:t>
@@ -10526,41 +13687,41 @@
                         <a:buChar char="-"/>
                       </a:pPr>
                       <a:r>
-                        <a:rPr lang="fr-FR" sz="1400" dirty="0">
+                        <a:rPr lang="fr-FR" sz="1100" dirty="0">
                           <a:solidFill>
-                            <a:schemeClr val="bg1"/>
+                            <a:srgbClr val="0070C0"/>
                           </a:solidFill>
                         </a:rPr>
                         <a:t>Une image pour le </a:t>
                       </a:r>
                       <a:r>
-                        <a:rPr lang="fr-FR" sz="1400" b="1" dirty="0">
+                        <a:rPr lang="fr-FR" sz="1100" b="1" dirty="0">
                           <a:solidFill>
-                            <a:schemeClr val="bg1"/>
+                            <a:srgbClr val="0070C0"/>
                           </a:solidFill>
                         </a:rPr>
                         <a:t>service MongoDB</a:t>
                       </a:r>
                       <a:r>
-                        <a:rPr lang="fr-FR" sz="1400" dirty="0">
+                        <a:rPr lang="fr-FR" sz="1100" dirty="0">
                           <a:solidFill>
-                            <a:schemeClr val="bg1"/>
+                            <a:srgbClr val="0070C0"/>
                           </a:solidFill>
                         </a:rPr>
                         <a:t> </a:t>
                       </a:r>
                       <a:r>
-                        <a:rPr lang="fr-FR" sz="1400" i="1" dirty="0">
+                        <a:rPr lang="fr-FR" sz="1100" i="1" dirty="0">
                           <a:solidFill>
-                            <a:schemeClr val="bg1"/>
+                            <a:srgbClr val="0070C0"/>
                           </a:solidFill>
                         </a:rPr>
                         <a:t>(basé sur l'image officielle mongo)</a:t>
                       </a:r>
                       <a:r>
-                        <a:rPr lang="fr-FR" sz="1400" dirty="0">
+                        <a:rPr lang="fr-FR" sz="1100" dirty="0">
                           <a:solidFill>
-                            <a:schemeClr val="bg1"/>
+                            <a:srgbClr val="0070C0"/>
                           </a:solidFill>
                         </a:rPr>
                         <a:t>.</a:t>
@@ -10572,48 +13733,158 @@
                         <a:buChar char="-"/>
                       </a:pPr>
                       <a:r>
-                        <a:rPr lang="fr-FR" sz="1400" dirty="0">
+                        <a:rPr lang="fr-FR" sz="1100" dirty="0">
                           <a:solidFill>
-                            <a:schemeClr val="bg1"/>
+                            <a:srgbClr val="0070C0"/>
                           </a:solidFill>
                         </a:rPr>
                         <a:t>Une image pour le </a:t>
                       </a:r>
                       <a:r>
-                        <a:rPr lang="fr-FR" sz="1400" b="1" dirty="0">
+                        <a:rPr lang="fr-FR" sz="1100" b="1" dirty="0">
                           <a:solidFill>
-                            <a:schemeClr val="bg1"/>
+                            <a:srgbClr val="0070C0"/>
                           </a:solidFill>
                         </a:rPr>
                         <a:t>script de migration</a:t>
                       </a:r>
                       <a:r>
-                        <a:rPr lang="fr-FR" sz="1400" dirty="0">
+                        <a:rPr lang="fr-FR" sz="1100" dirty="0">
                           <a:solidFill>
-                            <a:schemeClr val="bg1"/>
+                            <a:srgbClr val="0070C0"/>
                           </a:solidFill>
                         </a:rPr>
                         <a:t> </a:t>
                       </a:r>
                       <a:r>
-                        <a:rPr lang="fr-FR" sz="1400" i="1" dirty="0">
+                        <a:rPr lang="fr-FR" sz="1100" i="1" dirty="0">
                           <a:solidFill>
-                            <a:schemeClr val="bg1"/>
+                            <a:srgbClr val="0070C0"/>
                           </a:solidFill>
                         </a:rPr>
                         <a:t>(basé sur Python et incluant les scripts)</a:t>
                       </a:r>
                       <a:r>
-                        <a:rPr lang="fr-FR" sz="1400" dirty="0">
+                        <a:rPr lang="fr-FR" sz="1100" dirty="0">
                           <a:solidFill>
-                            <a:schemeClr val="bg1"/>
+                            <a:srgbClr val="0070C0"/>
+                          </a:solidFill>
+                        </a:rPr>
+                        <a:t>.</a:t>
+                      </a:r>
+                    </a:p>
+                    <a:p>
+                      <a:pPr marL="285750" indent="-285750">
+                        <a:buFontTx/>
+                        <a:buChar char="-"/>
+                      </a:pPr>
+                      <a:r>
+                        <a:rPr lang="fr-FR" sz="1100" dirty="0">
+                          <a:solidFill>
+                            <a:srgbClr val="0070C0"/>
+                          </a:solidFill>
+                        </a:rPr>
+                        <a:t>Une image pour les </a:t>
+                      </a:r>
+                      <a:r>
+                        <a:rPr lang="fr-FR" sz="1100" b="1" dirty="0">
+                          <a:solidFill>
+                            <a:srgbClr val="0070C0"/>
+                          </a:solidFill>
+                        </a:rPr>
+                        <a:t>testes</a:t>
+                      </a:r>
+                      <a:r>
+                        <a:rPr lang="fr-FR" sz="1100" dirty="0">
+                          <a:solidFill>
+                            <a:srgbClr val="0070C0"/>
+                          </a:solidFill>
+                        </a:rPr>
+                        <a:t> </a:t>
+                      </a:r>
+                      <a:r>
+                        <a:rPr lang="fr-FR" sz="1100" i="1" dirty="0">
+                          <a:solidFill>
+                            <a:srgbClr val="0070C0"/>
+                          </a:solidFill>
+                        </a:rPr>
+                        <a:t>(basé sur </a:t>
+                      </a:r>
+                      <a:r>
+                        <a:rPr lang="fr-FR" sz="1100" i="1" dirty="0" err="1">
+                          <a:solidFill>
+                            <a:srgbClr val="0070C0"/>
+                          </a:solidFill>
+                        </a:rPr>
+                        <a:t>pytest</a:t>
+                      </a:r>
+                      <a:r>
+                        <a:rPr lang="fr-FR" sz="1100" i="1" dirty="0">
+                          <a:solidFill>
+                            <a:srgbClr val="0070C0"/>
+                          </a:solidFill>
+                        </a:rPr>
+                        <a:t>)</a:t>
+                      </a:r>
+                      <a:r>
+                        <a:rPr lang="fr-FR" sz="1100" dirty="0">
+                          <a:solidFill>
+                            <a:srgbClr val="0070C0"/>
                           </a:solidFill>
                         </a:rPr>
                         <a:t>.</a:t>
                       </a:r>
                     </a:p>
                   </a:txBody>
-                  <a:tcPr anchor="ctr"/>
+                  <a:tcPr anchor="ctr">
+                    <a:lnL w="12700" cap="flat" cmpd="sng" algn="ctr">
+                      <a:solidFill>
+                        <a:schemeClr val="tx1"/>
+                      </a:solidFill>
+                      <a:prstDash val="solid"/>
+                      <a:round/>
+                      <a:headEnd type="none" w="med" len="med"/>
+                      <a:tailEnd type="none" w="med" len="med"/>
+                    </a:lnL>
+                    <a:lnR w="12700" cap="flat" cmpd="sng" algn="ctr">
+                      <a:solidFill>
+                        <a:schemeClr val="tx1"/>
+                      </a:solidFill>
+                      <a:prstDash val="solid"/>
+                      <a:round/>
+                      <a:headEnd type="none" w="med" len="med"/>
+                      <a:tailEnd type="none" w="med" len="med"/>
+                    </a:lnR>
+                    <a:lnT w="12700" cap="flat" cmpd="sng" algn="ctr">
+                      <a:solidFill>
+                        <a:schemeClr val="tx1"/>
+                      </a:solidFill>
+                      <a:prstDash val="solid"/>
+                      <a:round/>
+                      <a:headEnd type="none" w="med" len="med"/>
+                      <a:tailEnd type="none" w="med" len="med"/>
+                    </a:lnT>
+                    <a:lnB w="12700" cap="flat" cmpd="sng" algn="ctr">
+                      <a:solidFill>
+                        <a:schemeClr val="tx1"/>
+                      </a:solidFill>
+                      <a:prstDash val="solid"/>
+                      <a:round/>
+                      <a:headEnd type="none" w="med" len="med"/>
+                      <a:tailEnd type="none" w="med" len="med"/>
+                    </a:lnB>
+                    <a:lnTlToBr w="12700" cmpd="sng">
+                      <a:noFill/>
+                      <a:prstDash val="solid"/>
+                    </a:lnTlToBr>
+                    <a:lnBlToTr w="12700" cmpd="sng">
+                      <a:noFill/>
+                      <a:prstDash val="solid"/>
+                    </a:lnBlToTr>
+                    <a:solidFill>
+                      <a:schemeClr val="bg1"/>
+                    </a:solidFill>
+                  </a:tcPr>
                 </a:tc>
                 <a:extLst>
                   <a:ext uri="{0D108BD9-81ED-4DB2-BD59-A6C34878D82A}">
@@ -10631,21 +13902,69 @@
                         <a:buNone/>
                       </a:pPr>
                       <a:r>
-                        <a:rPr lang="fr-FR" sz="1800" b="1" dirty="0">
+                        <a:rPr lang="fr-FR" sz="1400" b="1" dirty="0">
                           <a:solidFill>
-                            <a:schemeClr val="bg1"/>
+                            <a:srgbClr val="0070C0"/>
                           </a:solidFill>
                         </a:rPr>
-                        <a:t>4. Orchestration</a:t>
+                        <a:t>6. Orchestration</a:t>
                       </a:r>
-                      <a:endParaRPr lang="fr-FR" sz="1800" dirty="0">
+                      <a:endParaRPr lang="fr-FR" sz="1400" dirty="0">
                         <a:solidFill>
-                          <a:schemeClr val="bg1"/>
+                          <a:srgbClr val="0070C0"/>
                         </a:solidFill>
                       </a:endParaRPr>
                     </a:p>
                   </a:txBody>
-                  <a:tcPr anchor="ctr"/>
+                  <a:tcPr anchor="ctr">
+                    <a:lnL w="12700" cap="flat" cmpd="sng" algn="ctr">
+                      <a:solidFill>
+                        <a:schemeClr val="tx1"/>
+                      </a:solidFill>
+                      <a:prstDash val="solid"/>
+                      <a:round/>
+                      <a:headEnd type="none" w="med" len="med"/>
+                      <a:tailEnd type="none" w="med" len="med"/>
+                    </a:lnL>
+                    <a:lnR w="12700" cap="flat" cmpd="sng" algn="ctr">
+                      <a:solidFill>
+                        <a:schemeClr val="tx1"/>
+                      </a:solidFill>
+                      <a:prstDash val="solid"/>
+                      <a:round/>
+                      <a:headEnd type="none" w="med" len="med"/>
+                      <a:tailEnd type="none" w="med" len="med"/>
+                    </a:lnR>
+                    <a:lnT w="12700" cap="flat" cmpd="sng" algn="ctr">
+                      <a:solidFill>
+                        <a:schemeClr val="tx1"/>
+                      </a:solidFill>
+                      <a:prstDash val="solid"/>
+                      <a:round/>
+                      <a:headEnd type="none" w="med" len="med"/>
+                      <a:tailEnd type="none" w="med" len="med"/>
+                    </a:lnT>
+                    <a:lnB w="12700" cap="flat" cmpd="sng" algn="ctr">
+                      <a:solidFill>
+                        <a:schemeClr val="tx1"/>
+                      </a:solidFill>
+                      <a:prstDash val="solid"/>
+                      <a:round/>
+                      <a:headEnd type="none" w="med" len="med"/>
+                      <a:tailEnd type="none" w="med" len="med"/>
+                    </a:lnB>
+                    <a:lnTlToBr w="12700" cmpd="sng">
+                      <a:noFill/>
+                      <a:prstDash val="solid"/>
+                    </a:lnTlToBr>
+                    <a:lnBlToTr w="12700" cmpd="sng">
+                      <a:noFill/>
+                      <a:prstDash val="solid"/>
+                    </a:lnBlToTr>
+                    <a:solidFill>
+                      <a:schemeClr val="bg1"/>
+                    </a:solidFill>
+                  </a:tcPr>
                 </a:tc>
                 <a:tc>
                   <a:txBody>
@@ -10656,32 +13975,80 @@
                         <a:buNone/>
                       </a:pPr>
                       <a:r>
-                        <a:rPr lang="fr-FR" sz="1400" dirty="0">
+                        <a:rPr lang="fr-FR" sz="1100" dirty="0">
                           <a:solidFill>
-                            <a:schemeClr val="bg1"/>
+                            <a:srgbClr val="0070C0"/>
                           </a:solidFill>
                         </a:rPr>
                         <a:t>Utilisation de </a:t>
                       </a:r>
                       <a:r>
-                        <a:rPr lang="fr-FR" sz="1400" b="1" dirty="0">
+                        <a:rPr lang="fr-FR" sz="1100" b="1" dirty="0">
                           <a:solidFill>
-                            <a:schemeClr val="bg1"/>
+                            <a:srgbClr val="0070C0"/>
                           </a:solidFill>
                         </a:rPr>
                         <a:t>Docker Compose</a:t>
                       </a:r>
                       <a:r>
-                        <a:rPr lang="fr-FR" sz="1400" dirty="0">
+                        <a:rPr lang="fr-FR" sz="1100" dirty="0">
                           <a:solidFill>
-                            <a:schemeClr val="bg1"/>
+                            <a:srgbClr val="0070C0"/>
                           </a:solidFill>
                         </a:rPr>
-                        <a:t> pour définir et exécuter l'application multi-conteneurs : la base de données et le conteneur de migration.</a:t>
+                        <a:t> pour définir et exécuter l'application multi-conteneurs : la base de données le conteneur de migration et le conteneur de tests.</a:t>
                       </a:r>
                     </a:p>
                   </a:txBody>
-                  <a:tcPr anchor="ctr"/>
+                  <a:tcPr anchor="ctr">
+                    <a:lnL w="12700" cap="flat" cmpd="sng" algn="ctr">
+                      <a:solidFill>
+                        <a:schemeClr val="tx1"/>
+                      </a:solidFill>
+                      <a:prstDash val="solid"/>
+                      <a:round/>
+                      <a:headEnd type="none" w="med" len="med"/>
+                      <a:tailEnd type="none" w="med" len="med"/>
+                    </a:lnL>
+                    <a:lnR w="12700" cap="flat" cmpd="sng" algn="ctr">
+                      <a:solidFill>
+                        <a:schemeClr val="tx1"/>
+                      </a:solidFill>
+                      <a:prstDash val="solid"/>
+                      <a:round/>
+                      <a:headEnd type="none" w="med" len="med"/>
+                      <a:tailEnd type="none" w="med" len="med"/>
+                    </a:lnR>
+                    <a:lnT w="12700" cap="flat" cmpd="sng" algn="ctr">
+                      <a:solidFill>
+                        <a:schemeClr val="tx1"/>
+                      </a:solidFill>
+                      <a:prstDash val="solid"/>
+                      <a:round/>
+                      <a:headEnd type="none" w="med" len="med"/>
+                      <a:tailEnd type="none" w="med" len="med"/>
+                    </a:lnT>
+                    <a:lnB w="12700" cap="flat" cmpd="sng" algn="ctr">
+                      <a:solidFill>
+                        <a:schemeClr val="tx1"/>
+                      </a:solidFill>
+                      <a:prstDash val="solid"/>
+                      <a:round/>
+                      <a:headEnd type="none" w="med" len="med"/>
+                      <a:tailEnd type="none" w="med" len="med"/>
+                    </a:lnB>
+                    <a:lnTlToBr w="12700" cmpd="sng">
+                      <a:noFill/>
+                      <a:prstDash val="solid"/>
+                    </a:lnTlToBr>
+                    <a:lnBlToTr w="12700" cmpd="sng">
+                      <a:noFill/>
+                      <a:prstDash val="solid"/>
+                    </a:lnBlToTr>
+                    <a:solidFill>
+                      <a:schemeClr val="bg1"/>
+                    </a:solidFill>
+                  </a:tcPr>
                 </a:tc>
                 <a:extLst>
                   <a:ext uri="{0D108BD9-81ED-4DB2-BD59-A6C34878D82A}">
@@ -10699,21 +14066,69 @@
                         <a:buNone/>
                       </a:pPr>
                       <a:r>
-                        <a:rPr lang="fr-FR" sz="1800" b="1" dirty="0">
+                        <a:rPr lang="fr-FR" sz="1400" b="1" dirty="0">
                           <a:solidFill>
-                            <a:schemeClr val="bg1"/>
+                            <a:srgbClr val="0070C0"/>
                           </a:solidFill>
                         </a:rPr>
-                        <a:t>5. Validation</a:t>
+                        <a:t>7. Validation</a:t>
                       </a:r>
-                      <a:endParaRPr lang="fr-FR" sz="1800" dirty="0">
+                      <a:endParaRPr lang="fr-FR" sz="1400" dirty="0">
                         <a:solidFill>
-                          <a:schemeClr val="bg1"/>
+                          <a:srgbClr val="0070C0"/>
                         </a:solidFill>
                       </a:endParaRPr>
                     </a:p>
                   </a:txBody>
-                  <a:tcPr anchor="ctr"/>
+                  <a:tcPr anchor="ctr">
+                    <a:lnL w="12700" cap="flat" cmpd="sng" algn="ctr">
+                      <a:solidFill>
+                        <a:schemeClr val="tx1"/>
+                      </a:solidFill>
+                      <a:prstDash val="solid"/>
+                      <a:round/>
+                      <a:headEnd type="none" w="med" len="med"/>
+                      <a:tailEnd type="none" w="med" len="med"/>
+                    </a:lnL>
+                    <a:lnR w="12700" cap="flat" cmpd="sng" algn="ctr">
+                      <a:solidFill>
+                        <a:schemeClr val="tx1"/>
+                      </a:solidFill>
+                      <a:prstDash val="solid"/>
+                      <a:round/>
+                      <a:headEnd type="none" w="med" len="med"/>
+                      <a:tailEnd type="none" w="med" len="med"/>
+                    </a:lnR>
+                    <a:lnT w="12700" cap="flat" cmpd="sng" algn="ctr">
+                      <a:solidFill>
+                        <a:schemeClr val="tx1"/>
+                      </a:solidFill>
+                      <a:prstDash val="solid"/>
+                      <a:round/>
+                      <a:headEnd type="none" w="med" len="med"/>
+                      <a:tailEnd type="none" w="med" len="med"/>
+                    </a:lnT>
+                    <a:lnB w="12700" cap="flat" cmpd="sng" algn="ctr">
+                      <a:solidFill>
+                        <a:schemeClr val="tx1"/>
+                      </a:solidFill>
+                      <a:prstDash val="solid"/>
+                      <a:round/>
+                      <a:headEnd type="none" w="med" len="med"/>
+                      <a:tailEnd type="none" w="med" len="med"/>
+                    </a:lnB>
+                    <a:lnTlToBr w="12700" cmpd="sng">
+                      <a:noFill/>
+                      <a:prstDash val="solid"/>
+                    </a:lnTlToBr>
+                    <a:lnBlToTr w="12700" cmpd="sng">
+                      <a:noFill/>
+                      <a:prstDash val="solid"/>
+                    </a:lnBlToTr>
+                    <a:solidFill>
+                      <a:schemeClr val="bg1"/>
+                    </a:solidFill>
+                  </a:tcPr>
                 </a:tc>
                 <a:tc>
                   <a:txBody>
@@ -10724,16 +14139,96 @@
                         <a:buNone/>
                       </a:pPr>
                       <a:r>
-                        <a:rPr lang="fr-FR" sz="1400" dirty="0">
+                        <a:rPr lang="fr-FR" sz="1100" dirty="0">
                           <a:solidFill>
-                            <a:schemeClr val="bg1"/>
+                            <a:srgbClr val="0070C0"/>
                           </a:solidFill>
                         </a:rPr>
-                        <a:t>Vérification de l'intégrité et de la cohérence des données migrées grâce au script Python de validation</a:t>
+                        <a:t>Vérification de l'intégrité et de la cohérence des données migrées grâce au script Python </a:t>
+                      </a:r>
+                      <a:r>
+                        <a:rPr lang="fr-FR" sz="1100" i="1" dirty="0">
+                          <a:solidFill>
+                            <a:srgbClr val="0070C0"/>
+                          </a:solidFill>
+                        </a:rPr>
+                        <a:t>(via </a:t>
+                      </a:r>
+                      <a:r>
+                        <a:rPr lang="fr-FR" sz="1100" i="1" dirty="0" err="1">
+                          <a:solidFill>
+                            <a:srgbClr val="0070C0"/>
+                          </a:solidFill>
+                        </a:rPr>
+                        <a:t>pytest</a:t>
+                      </a:r>
+                      <a:r>
+                        <a:rPr lang="fr-FR" sz="1100" i="1" dirty="0">
+                          <a:solidFill>
+                            <a:srgbClr val="0070C0"/>
+                          </a:solidFill>
+                        </a:rPr>
+                        <a:t>)</a:t>
+                      </a:r>
+                      <a:r>
+                        <a:rPr lang="fr-FR" sz="1100" dirty="0">
+                          <a:solidFill>
+                            <a:srgbClr val="0070C0"/>
+                          </a:solidFill>
+                        </a:rPr>
+                        <a:t> de validation</a:t>
                       </a:r>
                     </a:p>
                   </a:txBody>
-                  <a:tcPr anchor="ctr"/>
+                  <a:tcPr anchor="ctr">
+                    <a:lnL w="12700" cap="flat" cmpd="sng" algn="ctr">
+                      <a:solidFill>
+                        <a:schemeClr val="tx1"/>
+                      </a:solidFill>
+                      <a:prstDash val="solid"/>
+                      <a:round/>
+                      <a:headEnd type="none" w="med" len="med"/>
+                      <a:tailEnd type="none" w="med" len="med"/>
+                    </a:lnL>
+                    <a:lnR w="12700" cap="flat" cmpd="sng" algn="ctr">
+                      <a:solidFill>
+                        <a:schemeClr val="tx1"/>
+                      </a:solidFill>
+                      <a:prstDash val="solid"/>
+                      <a:round/>
+                      <a:headEnd type="none" w="med" len="med"/>
+                      <a:tailEnd type="none" w="med" len="med"/>
+                    </a:lnR>
+                    <a:lnT w="12700" cap="flat" cmpd="sng" algn="ctr">
+                      <a:solidFill>
+                        <a:schemeClr val="tx1"/>
+                      </a:solidFill>
+                      <a:prstDash val="solid"/>
+                      <a:round/>
+                      <a:headEnd type="none" w="med" len="med"/>
+                      <a:tailEnd type="none" w="med" len="med"/>
+                    </a:lnT>
+                    <a:lnB w="12700" cap="flat" cmpd="sng" algn="ctr">
+                      <a:solidFill>
+                        <a:schemeClr val="tx1"/>
+                      </a:solidFill>
+                      <a:prstDash val="solid"/>
+                      <a:round/>
+                      <a:headEnd type="none" w="med" len="med"/>
+                      <a:tailEnd type="none" w="med" len="med"/>
+                    </a:lnB>
+                    <a:lnTlToBr w="12700" cmpd="sng">
+                      <a:noFill/>
+                      <a:prstDash val="solid"/>
+                    </a:lnTlToBr>
+                    <a:lnBlToTr w="12700" cmpd="sng">
+                      <a:noFill/>
+                      <a:prstDash val="solid"/>
+                    </a:lnBlToTr>
+                    <a:solidFill>
+                      <a:schemeClr val="bg1"/>
+                    </a:solidFill>
+                  </a:tcPr>
                 </a:tc>
                 <a:extLst>
                   <a:ext uri="{0D108BD9-81ED-4DB2-BD59-A6C34878D82A}">
@@ -11860,10 +15355,10 @@
       </p:sp>
       <p:pic>
         <p:nvPicPr>
-          <p:cNvPr id="8" name="Image 7">
+          <p:cNvPr id="3" name="Image 2">
             <a:extLst>
               <a:ext uri="{FF2B5EF4-FFF2-40B4-BE49-F238E27FC236}">
-                <a16:creationId xmlns:a16="http://schemas.microsoft.com/office/drawing/2014/main" id="{69C6A159-20C4-AA6E-EA29-B38B3E088DFD}"/>
+                <a16:creationId xmlns:a16="http://schemas.microsoft.com/office/drawing/2014/main" id="{442283E5-AA14-BC4E-7622-B89660B6419E}"/>
               </a:ext>
             </a:extLst>
           </p:cNvPr>
@@ -11880,8 +15375,8 @@
         </p:blipFill>
         <p:spPr>
           <a:xfrm>
-            <a:off x="2661757" y="2088890"/>
-            <a:ext cx="6868484" cy="4201111"/>
+            <a:off x="2533152" y="2259383"/>
+            <a:ext cx="7125694" cy="3781953"/>
           </a:xfrm>
           <a:prstGeom prst="rect">
             <a:avLst/>
@@ -11909,7 +15404,7 @@
         <p:cNvPr id="1" name="">
           <a:extLst>
             <a:ext uri="{FF2B5EF4-FFF2-40B4-BE49-F238E27FC236}">
-              <a16:creationId xmlns:a16="http://schemas.microsoft.com/office/drawing/2014/main" id="{FC37029E-5ECB-2034-8AEA-AF9E810B43D6}"/>
+              <a16:creationId xmlns:a16="http://schemas.microsoft.com/office/drawing/2014/main" id="{6D53B3E6-1395-D748-48C9-5D64129C18C6}"/>
             </a:ext>
           </a:extLst>
         </p:cNvPr>
@@ -11929,7 +15424,7 @@
           <p:cNvPr id="4" name="ZoneTexte 3">
             <a:extLst>
               <a:ext uri="{FF2B5EF4-FFF2-40B4-BE49-F238E27FC236}">
-                <a16:creationId xmlns:a16="http://schemas.microsoft.com/office/drawing/2014/main" id="{4FC433E4-75F4-0493-887C-5C27BA2BD00B}"/>
+                <a16:creationId xmlns:a16="http://schemas.microsoft.com/office/drawing/2014/main" id="{F87A5DB4-609B-CC16-0586-AE9228C0C60C}"/>
               </a:ext>
             </a:extLst>
           </p:cNvPr>
@@ -11938,8 +15433,8 @@
         </p:nvSpPr>
         <p:spPr>
           <a:xfrm>
-            <a:off x="2721935" y="0"/>
-            <a:ext cx="6748129" cy="769441"/>
+            <a:off x="872850" y="0"/>
+            <a:ext cx="8595623" cy="769441"/>
           </a:xfrm>
           <a:prstGeom prst="rect">
             <a:avLst/>
@@ -11967,7 +15462,7 @@
                 <a:latin typeface="Arial" panose="020B0604020202020204" pitchFamily="34" charset="0"/>
                 <a:cs typeface="Arial" panose="020B0604020202020204" pitchFamily="34" charset="0"/>
               </a:rPr>
-              <a:t>Déploiement Cloud AWS</a:t>
+              <a:t>Sécurité de la base de données</a:t>
             </a:r>
             <a:endParaRPr lang="fr-FR" sz="3200" b="1" dirty="0">
               <a:solidFill>
@@ -11991,7 +15486,7 @@
           <p:cNvPr id="5" name="ZoneTexte 4">
             <a:extLst>
               <a:ext uri="{FF2B5EF4-FFF2-40B4-BE49-F238E27FC236}">
-                <a16:creationId xmlns:a16="http://schemas.microsoft.com/office/drawing/2014/main" id="{EB4A2589-3F4B-F0C2-03A7-E50C96907986}"/>
+                <a16:creationId xmlns:a16="http://schemas.microsoft.com/office/drawing/2014/main" id="{9773A5D2-B32E-E575-D5CB-DB0E6E9F74AD}"/>
               </a:ext>
             </a:extLst>
           </p:cNvPr>
@@ -12000,8 +15495,8 @@
         </p:nvSpPr>
         <p:spPr>
           <a:xfrm>
-            <a:off x="758645" y="1475531"/>
-            <a:ext cx="2608406" cy="369332"/>
+            <a:off x="872850" y="2333708"/>
+            <a:ext cx="6755375" cy="369332"/>
           </a:xfrm>
           <a:prstGeom prst="rect">
             <a:avLst/>
@@ -12022,17 +15517,27 @@
                 <a:latin typeface="Arial" panose="020B0604020202020204" pitchFamily="34" charset="0"/>
                 <a:cs typeface="Arial" panose="020B0604020202020204" pitchFamily="34" charset="0"/>
               </a:rPr>
-              <a:t>Amazon </a:t>
-            </a:r>
-            <a:r>
-              <a:rPr lang="fr-FR" b="1" i="1" u="sng" dirty="0" err="1">
-                <a:solidFill>
-                  <a:srgbClr val="0070C0"/>
-                </a:solidFill>
-                <a:latin typeface="Arial" panose="020B0604020202020204" pitchFamily="34" charset="0"/>
-                <a:cs typeface="Arial" panose="020B0604020202020204" pitchFamily="34" charset="0"/>
-              </a:rPr>
-              <a:t>DocumentDB</a:t>
+              <a:t>Rôles des utilisateurs </a:t>
+            </a:r>
+            <a:r>
+              <a:rPr lang="fr-FR" i="1" u="sng" dirty="0">
+                <a:solidFill>
+                  <a:srgbClr val="0070C0"/>
+                </a:solidFill>
+                <a:latin typeface="Arial" panose="020B0604020202020204" pitchFamily="34" charset="0"/>
+                <a:cs typeface="Arial" panose="020B0604020202020204" pitchFamily="34" charset="0"/>
+              </a:rPr>
+              <a:t>(système d'authentification à 3 niveaux)</a:t>
+            </a:r>
+            <a:r>
+              <a:rPr lang="fr-FR" b="1" i="1" u="sng" dirty="0">
+                <a:solidFill>
+                  <a:srgbClr val="0070C0"/>
+                </a:solidFill>
+                <a:latin typeface="Arial" panose="020B0604020202020204" pitchFamily="34" charset="0"/>
+                <a:cs typeface="Arial" panose="020B0604020202020204" pitchFamily="34" charset="0"/>
+              </a:rPr>
+              <a:t>:</a:t>
             </a:r>
             <a:endParaRPr lang="fr-FR" i="1" u="sng" dirty="0">
               <a:solidFill>
@@ -12046,10 +15551,10 @@
       </p:sp>
       <p:sp>
         <p:nvSpPr>
-          <p:cNvPr id="6" name="ZoneTexte 5">
+          <p:cNvPr id="2" name="ZoneTexte 1">
             <a:extLst>
               <a:ext uri="{FF2B5EF4-FFF2-40B4-BE49-F238E27FC236}">
-                <a16:creationId xmlns:a16="http://schemas.microsoft.com/office/drawing/2014/main" id="{594D485D-D2E2-9A84-CDB4-D1D44CD9CE71}"/>
+                <a16:creationId xmlns:a16="http://schemas.microsoft.com/office/drawing/2014/main" id="{FE35EEB2-2331-4170-CA45-F69653A58207}"/>
               </a:ext>
             </a:extLst>
           </p:cNvPr>
@@ -12058,121 +15563,8 @@
         </p:nvSpPr>
         <p:spPr>
           <a:xfrm>
-            <a:off x="758645" y="1844863"/>
-            <a:ext cx="9669210" cy="830997"/>
-          </a:xfrm>
-          <a:prstGeom prst="rect">
-            <a:avLst/>
-          </a:prstGeom>
-          <a:noFill/>
-        </p:spPr>
-        <p:txBody>
-          <a:bodyPr wrap="square" rtlCol="0">
-            <a:spAutoFit/>
-          </a:bodyPr>
-          <a:lstStyle/>
-          <a:p>
-            <a:r>
-              <a:rPr lang="fr-FR" sz="1600" dirty="0">
-                <a:solidFill>
-                  <a:srgbClr val="0070C0"/>
-                </a:solidFill>
-                <a:latin typeface="Arial" panose="020B0604020202020204" pitchFamily="34" charset="0"/>
-                <a:cs typeface="Arial" panose="020B0604020202020204" pitchFamily="34" charset="0"/>
-              </a:rPr>
-              <a:t>Service compatible MongoDB entièrement géré par AWS.	</a:t>
-            </a:r>
-          </a:p>
-          <a:p>
-            <a:pPr marL="285750" indent="-285750">
-              <a:buFont typeface="Arial" panose="020B0604020202020204" pitchFamily="34" charset="0"/>
-              <a:buChar char="•"/>
-            </a:pPr>
-            <a:r>
-              <a:rPr lang="fr-FR" sz="1600" b="1" dirty="0">
-                <a:solidFill>
-                  <a:srgbClr val="0070C0"/>
-                </a:solidFill>
-                <a:latin typeface="Arial" panose="020B0604020202020204" pitchFamily="34" charset="0"/>
-                <a:cs typeface="Arial" panose="020B0604020202020204" pitchFamily="34" charset="0"/>
-              </a:rPr>
-              <a:t>Simplicité &amp; Maintenance Zéro : </a:t>
-            </a:r>
-            <a:r>
-              <a:rPr lang="fr-FR" sz="1600" dirty="0">
-                <a:solidFill>
-                  <a:srgbClr val="0070C0"/>
-                </a:solidFill>
-                <a:latin typeface="Arial" panose="020B0604020202020204" pitchFamily="34" charset="0"/>
-                <a:cs typeface="Arial" panose="020B0604020202020204" pitchFamily="34" charset="0"/>
-              </a:rPr>
-              <a:t>AWS s'occupe du </a:t>
-            </a:r>
-            <a:r>
-              <a:rPr lang="fr-FR" sz="1600" dirty="0" err="1">
-                <a:solidFill>
-                  <a:srgbClr val="0070C0"/>
-                </a:solidFill>
-                <a:latin typeface="Arial" panose="020B0604020202020204" pitchFamily="34" charset="0"/>
-                <a:cs typeface="Arial" panose="020B0604020202020204" pitchFamily="34" charset="0"/>
-              </a:rPr>
-              <a:t>patching</a:t>
-            </a:r>
-            <a:r>
-              <a:rPr lang="fr-FR" sz="1600" dirty="0">
-                <a:solidFill>
-                  <a:srgbClr val="0070C0"/>
-                </a:solidFill>
-                <a:latin typeface="Arial" panose="020B0604020202020204" pitchFamily="34" charset="0"/>
-                <a:cs typeface="Arial" panose="020B0604020202020204" pitchFamily="34" charset="0"/>
-              </a:rPr>
-              <a:t>, de la sauvegarde, de la scalabilité. </a:t>
-            </a:r>
-          </a:p>
-          <a:p>
-            <a:pPr marL="285750" indent="-285750">
-              <a:buFont typeface="Arial" panose="020B0604020202020204" pitchFamily="34" charset="0"/>
-              <a:buChar char="•"/>
-            </a:pPr>
-            <a:r>
-              <a:rPr lang="fr-FR" sz="1600" b="1" dirty="0">
-                <a:solidFill>
-                  <a:srgbClr val="0070C0"/>
-                </a:solidFill>
-                <a:latin typeface="Arial" panose="020B0604020202020204" pitchFamily="34" charset="0"/>
-                <a:cs typeface="Arial" panose="020B0604020202020204" pitchFamily="34" charset="0"/>
-              </a:rPr>
-              <a:t>Haute Disponibilité : </a:t>
-            </a:r>
-            <a:r>
-              <a:rPr lang="fr-FR" sz="1600" dirty="0">
-                <a:solidFill>
-                  <a:srgbClr val="0070C0"/>
-                </a:solidFill>
-                <a:latin typeface="Arial" panose="020B0604020202020204" pitchFamily="34" charset="0"/>
-                <a:cs typeface="Arial" panose="020B0604020202020204" pitchFamily="34" charset="0"/>
-              </a:rPr>
-              <a:t>Architecture distribuée sur plusieurs zones de disponibilité.</a:t>
-            </a:r>
-          </a:p>
-        </p:txBody>
-      </p:sp>
-      <p:sp>
-        <p:nvSpPr>
-          <p:cNvPr id="3" name="ZoneTexte 2">
-            <a:extLst>
-              <a:ext uri="{FF2B5EF4-FFF2-40B4-BE49-F238E27FC236}">
-                <a16:creationId xmlns:a16="http://schemas.microsoft.com/office/drawing/2014/main" id="{DE6B1774-3AD7-9B12-C3A9-0F18054F8B80}"/>
-              </a:ext>
-            </a:extLst>
-          </p:cNvPr>
-          <p:cNvSpPr txBox="1"/>
-          <p:nvPr/>
-        </p:nvSpPr>
-        <p:spPr>
-          <a:xfrm>
-            <a:off x="758645" y="2873949"/>
-            <a:ext cx="4801314" cy="369332"/>
+            <a:off x="872850" y="2975995"/>
+            <a:ext cx="7463903" cy="2062103"/>
           </a:xfrm>
           <a:prstGeom prst="rect">
             <a:avLst/>
@@ -12185,17 +15577,103 @@
           </a:bodyPr>
           <a:lstStyle/>
           <a:p>
-            <a:r>
-              <a:rPr lang="en-US" b="1" i="1" u="sng" dirty="0">
-                <a:solidFill>
-                  <a:srgbClr val="0070C0"/>
-                </a:solidFill>
-                <a:latin typeface="Arial" panose="020B0604020202020204" pitchFamily="34" charset="0"/>
-                <a:cs typeface="Arial" panose="020B0604020202020204" pitchFamily="34" charset="0"/>
-              </a:rPr>
-              <a:t>MongoDB sur EC2 + Auto Scaling Group	</a:t>
-            </a:r>
-            <a:endParaRPr lang="fr-FR" i="1" u="sng" dirty="0">
+            <a:pPr marL="171450" indent="-171450">
+              <a:buFontTx/>
+              <a:buChar char="-"/>
+            </a:pPr>
+            <a:r>
+              <a:rPr lang="fr-FR" sz="1600" u="sng" dirty="0">
+                <a:solidFill>
+                  <a:srgbClr val="0070C0"/>
+                </a:solidFill>
+                <a:latin typeface="Arial" panose="020B0604020202020204" pitchFamily="34" charset="0"/>
+                <a:cs typeface="Arial" panose="020B0604020202020204" pitchFamily="34" charset="0"/>
+              </a:rPr>
+              <a:t>Administrateur</a:t>
+            </a:r>
+            <a:r>
+              <a:rPr lang="fr-FR" sz="1600" dirty="0">
+                <a:solidFill>
+                  <a:srgbClr val="0070C0"/>
+                </a:solidFill>
+                <a:latin typeface="Arial" panose="020B0604020202020204" pitchFamily="34" charset="0"/>
+                <a:cs typeface="Arial" panose="020B0604020202020204" pitchFamily="34" charset="0"/>
+              </a:rPr>
+              <a:t> : </a:t>
+            </a:r>
+            <a:r>
+              <a:rPr lang="fr-FR" sz="1600" b="1" dirty="0">
+                <a:solidFill>
+                  <a:srgbClr val="0070C0"/>
+                </a:solidFill>
+                <a:latin typeface="Arial" panose="020B0604020202020204" pitchFamily="34" charset="0"/>
+                <a:cs typeface="Arial" panose="020B0604020202020204" pitchFamily="34" charset="0"/>
+              </a:rPr>
+              <a:t>admin</a:t>
+            </a:r>
+            <a:r>
+              <a:rPr lang="fr-FR" sz="1600" dirty="0">
+                <a:solidFill>
+                  <a:srgbClr val="0070C0"/>
+                </a:solidFill>
+                <a:latin typeface="Arial" panose="020B0604020202020204" pitchFamily="34" charset="0"/>
+                <a:cs typeface="Arial" panose="020B0604020202020204" pitchFamily="34" charset="0"/>
+              </a:rPr>
+              <a:t>.</a:t>
+            </a:r>
+          </a:p>
+          <a:p>
+            <a:pPr marL="628650" lvl="1" indent="-171450">
+              <a:buFontTx/>
+              <a:buChar char="-"/>
+            </a:pPr>
+            <a:r>
+              <a:rPr lang="fr-FR" sz="1600" b="1" dirty="0">
+                <a:solidFill>
+                  <a:srgbClr val="0070C0"/>
+                </a:solidFill>
+                <a:latin typeface="Arial" panose="020B0604020202020204" pitchFamily="34" charset="0"/>
+                <a:cs typeface="Arial" panose="020B0604020202020204" pitchFamily="34" charset="0"/>
+              </a:rPr>
+              <a:t>Gestion</a:t>
+            </a:r>
+            <a:r>
+              <a:rPr lang="fr-FR" sz="1600" dirty="0">
+                <a:solidFill>
+                  <a:srgbClr val="0070C0"/>
+                </a:solidFill>
+                <a:latin typeface="Arial" panose="020B0604020202020204" pitchFamily="34" charset="0"/>
+                <a:cs typeface="Arial" panose="020B0604020202020204" pitchFamily="34" charset="0"/>
+              </a:rPr>
+              <a:t> des </a:t>
+            </a:r>
+            <a:r>
+              <a:rPr lang="fr-FR" sz="1600" b="1" dirty="0">
+                <a:solidFill>
+                  <a:srgbClr val="0070C0"/>
+                </a:solidFill>
+                <a:latin typeface="Arial" panose="020B0604020202020204" pitchFamily="34" charset="0"/>
+                <a:cs typeface="Arial" panose="020B0604020202020204" pitchFamily="34" charset="0"/>
+              </a:rPr>
+              <a:t>utilisateurs</a:t>
+            </a:r>
+            <a:r>
+              <a:rPr lang="fr-FR" sz="1600" dirty="0">
+                <a:solidFill>
+                  <a:srgbClr val="0070C0"/>
+                </a:solidFill>
+                <a:latin typeface="Arial" panose="020B0604020202020204" pitchFamily="34" charset="0"/>
+                <a:cs typeface="Arial" panose="020B0604020202020204" pitchFamily="34" charset="0"/>
+              </a:rPr>
+              <a:t>.</a:t>
+            </a:r>
+          </a:p>
+          <a:p>
+            <a:pPr marL="628650" lvl="1" indent="-171450">
+              <a:buFontTx/>
+              <a:buChar char="-"/>
+            </a:pPr>
+            <a:endParaRPr lang="fr-FR" sz="1600" dirty="0">
               <a:solidFill>
                 <a:srgbClr val="0070C0"/>
               </a:solidFill>
@@ -12203,36 +15681,21 @@
               <a:cs typeface="Arial" panose="020B0604020202020204" pitchFamily="34" charset="0"/>
             </a:endParaRPr>
           </a:p>
-        </p:txBody>
-      </p:sp>
-      <p:sp>
-        <p:nvSpPr>
-          <p:cNvPr id="11" name="ZoneTexte 10">
-            <a:extLst>
-              <a:ext uri="{FF2B5EF4-FFF2-40B4-BE49-F238E27FC236}">
-                <a16:creationId xmlns:a16="http://schemas.microsoft.com/office/drawing/2014/main" id="{A129CC6A-0716-AE8C-8D7A-4363CDC76B03}"/>
-              </a:ext>
-            </a:extLst>
-          </p:cNvPr>
-          <p:cNvSpPr txBox="1"/>
-          <p:nvPr/>
-        </p:nvSpPr>
-        <p:spPr>
-          <a:xfrm>
-            <a:off x="758645" y="3243281"/>
-            <a:ext cx="9669210" cy="1077218"/>
-          </a:xfrm>
-          <a:prstGeom prst="rect">
-            <a:avLst/>
-          </a:prstGeom>
-          <a:noFill/>
-        </p:spPr>
-        <p:txBody>
-          <a:bodyPr wrap="square" rtlCol="0">
-            <a:spAutoFit/>
-          </a:bodyPr>
-          <a:lstStyle/>
-          <a:p>
+          <a:p>
+            <a:pPr marL="171450" indent="-171450">
+              <a:buFontTx/>
+              <a:buChar char="-"/>
+            </a:pPr>
+            <a:r>
+              <a:rPr lang="fr-FR" sz="1600" u="sng" dirty="0">
+                <a:solidFill>
+                  <a:srgbClr val="0070C0"/>
+                </a:solidFill>
+                <a:latin typeface="Arial" panose="020B0604020202020204" pitchFamily="34" charset="0"/>
+                <a:cs typeface="Arial" panose="020B0604020202020204" pitchFamily="34" charset="0"/>
+              </a:rPr>
+              <a:t>Import de données et opérations CRUD</a:t>
+            </a:r>
             <a:r>
               <a:rPr lang="fr-FR" sz="1600" dirty="0">
                 <a:solidFill>
@@ -12241,7 +15704,93 @@
                 <a:latin typeface="Arial" panose="020B0604020202020204" pitchFamily="34" charset="0"/>
                 <a:cs typeface="Arial" panose="020B0604020202020204" pitchFamily="34" charset="0"/>
               </a:rPr>
-              <a:t>Déploiement manuel de la communauté MongoDB ou de MongoDB Enterprise sur des instances Amazon EC2 </a:t>
+              <a:t> : </a:t>
+            </a:r>
+            <a:r>
+              <a:rPr lang="fr-FR" sz="1600" b="1" dirty="0" err="1">
+                <a:solidFill>
+                  <a:srgbClr val="0070C0"/>
+                </a:solidFill>
+                <a:latin typeface="Arial" panose="020B0604020202020204" pitchFamily="34" charset="0"/>
+                <a:cs typeface="Arial" panose="020B0604020202020204" pitchFamily="34" charset="0"/>
+              </a:rPr>
+              <a:t>app_user</a:t>
+            </a:r>
+            <a:r>
+              <a:rPr lang="fr-FR" sz="1600" dirty="0">
+                <a:solidFill>
+                  <a:srgbClr val="0070C0"/>
+                </a:solidFill>
+                <a:latin typeface="Arial" panose="020B0604020202020204" pitchFamily="34" charset="0"/>
+                <a:cs typeface="Arial" panose="020B0604020202020204" pitchFamily="34" charset="0"/>
+              </a:rPr>
+              <a:t>.</a:t>
+            </a:r>
+          </a:p>
+          <a:p>
+            <a:pPr marL="628650" lvl="1" indent="-171450">
+              <a:buFontTx/>
+              <a:buChar char="-"/>
+            </a:pPr>
+            <a:r>
+              <a:rPr lang="fr-FR" sz="1600" b="1" dirty="0">
+                <a:solidFill>
+                  <a:srgbClr val="0070C0"/>
+                </a:solidFill>
+                <a:latin typeface="Arial" panose="020B0604020202020204" pitchFamily="34" charset="0"/>
+                <a:cs typeface="Arial" panose="020B0604020202020204" pitchFamily="34" charset="0"/>
+              </a:rPr>
+              <a:t>Utilisation</a:t>
+            </a:r>
+            <a:r>
+              <a:rPr lang="fr-FR" sz="1600" dirty="0">
+                <a:solidFill>
+                  <a:srgbClr val="0070C0"/>
+                </a:solidFill>
+                <a:latin typeface="Arial" panose="020B0604020202020204" pitchFamily="34" charset="0"/>
+                <a:cs typeface="Arial" panose="020B0604020202020204" pitchFamily="34" charset="0"/>
+              </a:rPr>
+              <a:t> de la base de données en </a:t>
+            </a:r>
+            <a:r>
+              <a:rPr lang="fr-FR" sz="1600" b="1" dirty="0">
+                <a:solidFill>
+                  <a:srgbClr val="0070C0"/>
+                </a:solidFill>
+                <a:latin typeface="Arial" panose="020B0604020202020204" pitchFamily="34" charset="0"/>
+                <a:cs typeface="Arial" panose="020B0604020202020204" pitchFamily="34" charset="0"/>
+              </a:rPr>
+              <a:t>lecture</a:t>
+            </a:r>
+            <a:r>
+              <a:rPr lang="fr-FR" sz="1600" dirty="0">
+                <a:solidFill>
+                  <a:srgbClr val="0070C0"/>
+                </a:solidFill>
+                <a:latin typeface="Arial" panose="020B0604020202020204" pitchFamily="34" charset="0"/>
+                <a:cs typeface="Arial" panose="020B0604020202020204" pitchFamily="34" charset="0"/>
+              </a:rPr>
+              <a:t> / </a:t>
+            </a:r>
+            <a:r>
+              <a:rPr lang="fr-FR" sz="1600" b="1" dirty="0">
+                <a:solidFill>
+                  <a:srgbClr val="0070C0"/>
+                </a:solidFill>
+                <a:latin typeface="Arial" panose="020B0604020202020204" pitchFamily="34" charset="0"/>
+                <a:cs typeface="Arial" panose="020B0604020202020204" pitchFamily="34" charset="0"/>
+              </a:rPr>
+              <a:t>écriture</a:t>
+            </a:r>
+            <a:r>
+              <a:rPr lang="fr-FR" sz="1600" dirty="0">
+                <a:solidFill>
+                  <a:srgbClr val="0070C0"/>
+                </a:solidFill>
+                <a:latin typeface="Arial" panose="020B0604020202020204" pitchFamily="34" charset="0"/>
+                <a:cs typeface="Arial" panose="020B0604020202020204" pitchFamily="34" charset="0"/>
+              </a:rPr>
+              <a:t> </a:t>
             </a:r>
             <a:r>
               <a:rPr lang="fr-FR" sz="1600" i="1" dirty="0">
@@ -12251,132 +15800,15 @@
                 <a:latin typeface="Arial" panose="020B0604020202020204" pitchFamily="34" charset="0"/>
                 <a:cs typeface="Arial" panose="020B0604020202020204" pitchFamily="34" charset="0"/>
               </a:rPr>
-              <a:t>(machines virtuelles)</a:t>
-            </a:r>
-            <a:r>
-              <a:rPr lang="fr-FR" sz="1600" dirty="0">
-                <a:solidFill>
-                  <a:srgbClr val="0070C0"/>
-                </a:solidFill>
-                <a:latin typeface="Arial" panose="020B0604020202020204" pitchFamily="34" charset="0"/>
-                <a:cs typeface="Arial" panose="020B0604020202020204" pitchFamily="34" charset="0"/>
-              </a:rPr>
-              <a:t>.</a:t>
-            </a:r>
-          </a:p>
-          <a:p>
-            <a:pPr marL="285750" indent="-285750">
-              <a:buFont typeface="Arial" panose="020B0604020202020204" pitchFamily="34" charset="0"/>
-              <a:buChar char="•"/>
+              <a:t>(et modification).</a:t>
+            </a:r>
+          </a:p>
+          <a:p>
+            <a:pPr marL="628650" lvl="1" indent="-171450">
+              <a:buFontTx/>
+              <a:buChar char="-"/>
             </a:pPr>
-            <a:r>
-              <a:rPr lang="fr-FR" sz="1600" b="1" dirty="0">
-                <a:solidFill>
-                  <a:srgbClr val="0070C0"/>
-                </a:solidFill>
-                <a:latin typeface="Arial" panose="020B0604020202020204" pitchFamily="34" charset="0"/>
-                <a:cs typeface="Arial" panose="020B0604020202020204" pitchFamily="34" charset="0"/>
-              </a:rPr>
-              <a:t>Contrôle Total : </a:t>
-            </a:r>
-            <a:r>
-              <a:rPr lang="fr-FR" sz="1600" dirty="0">
-                <a:solidFill>
-                  <a:srgbClr val="0070C0"/>
-                </a:solidFill>
-                <a:latin typeface="Arial" panose="020B0604020202020204" pitchFamily="34" charset="0"/>
-                <a:cs typeface="Arial" panose="020B0604020202020204" pitchFamily="34" charset="0"/>
-              </a:rPr>
-              <a:t>Flexibilité maximale sur la configuration et la version de MongoDB.</a:t>
-            </a:r>
-          </a:p>
-          <a:p>
-            <a:pPr marL="285750" indent="-285750">
-              <a:buFont typeface="Arial" panose="020B0604020202020204" pitchFamily="34" charset="0"/>
-              <a:buChar char="•"/>
-            </a:pPr>
-            <a:r>
-              <a:rPr lang="fr-FR" sz="1600" b="1" dirty="0">
-                <a:solidFill>
-                  <a:srgbClr val="0070C0"/>
-                </a:solidFill>
-                <a:latin typeface="Arial" panose="020B0604020202020204" pitchFamily="34" charset="0"/>
-                <a:cs typeface="Arial" panose="020B0604020202020204" pitchFamily="34" charset="0"/>
-              </a:rPr>
-              <a:t>Optimisation des Coûts </a:t>
-            </a:r>
-            <a:r>
-              <a:rPr lang="fr-FR" sz="1600" b="1" i="1" dirty="0">
-                <a:solidFill>
-                  <a:srgbClr val="0070C0"/>
-                </a:solidFill>
-                <a:latin typeface="Arial" panose="020B0604020202020204" pitchFamily="34" charset="0"/>
-                <a:cs typeface="Arial" panose="020B0604020202020204" pitchFamily="34" charset="0"/>
-              </a:rPr>
-              <a:t>(si bien géré) </a:t>
-            </a:r>
-            <a:r>
-              <a:rPr lang="fr-FR" sz="1600" b="1" dirty="0">
-                <a:solidFill>
-                  <a:srgbClr val="0070C0"/>
-                </a:solidFill>
-                <a:latin typeface="Arial" panose="020B0604020202020204" pitchFamily="34" charset="0"/>
-                <a:cs typeface="Arial" panose="020B0604020202020204" pitchFamily="34" charset="0"/>
-              </a:rPr>
-              <a:t>: </a:t>
-            </a:r>
-            <a:r>
-              <a:rPr lang="fr-FR" sz="1600" dirty="0">
-                <a:solidFill>
-                  <a:srgbClr val="0070C0"/>
-                </a:solidFill>
-                <a:latin typeface="Arial" panose="020B0604020202020204" pitchFamily="34" charset="0"/>
-                <a:cs typeface="Arial" panose="020B0604020202020204" pitchFamily="34" charset="0"/>
-              </a:rPr>
-              <a:t>Choix précis du matériel.</a:t>
-            </a:r>
-          </a:p>
-        </p:txBody>
-      </p:sp>
-      <p:sp>
-        <p:nvSpPr>
-          <p:cNvPr id="12" name="ZoneTexte 11">
-            <a:extLst>
-              <a:ext uri="{FF2B5EF4-FFF2-40B4-BE49-F238E27FC236}">
-                <a16:creationId xmlns:a16="http://schemas.microsoft.com/office/drawing/2014/main" id="{E08876D4-3AD5-EC87-D1CD-128665B4AFBB}"/>
-              </a:ext>
-            </a:extLst>
-          </p:cNvPr>
-          <p:cNvSpPr txBox="1"/>
-          <p:nvPr/>
-        </p:nvSpPr>
-        <p:spPr>
-          <a:xfrm>
-            <a:off x="758646" y="4518588"/>
-            <a:ext cx="2954655" cy="369332"/>
-          </a:xfrm>
-          <a:prstGeom prst="rect">
-            <a:avLst/>
-          </a:prstGeom>
-          <a:noFill/>
-        </p:spPr>
-        <p:txBody>
-          <a:bodyPr wrap="none" rtlCol="0">
-            <a:spAutoFit/>
-          </a:bodyPr>
-          <a:lstStyle/>
-          <a:p>
-            <a:r>
-              <a:rPr lang="en-US" b="1" i="1" u="sng" dirty="0">
-                <a:solidFill>
-                  <a:srgbClr val="0070C0"/>
-                </a:solidFill>
-                <a:latin typeface="Arial" panose="020B0604020202020204" pitchFamily="34" charset="0"/>
-                <a:cs typeface="Arial" panose="020B0604020202020204" pitchFamily="34" charset="0"/>
-              </a:rPr>
-              <a:t>MongoDB Atlas sur AWS	</a:t>
-            </a:r>
-            <a:endParaRPr lang="fr-FR" i="1" u="sng" dirty="0">
+            <a:endParaRPr lang="fr-FR" sz="1600" i="1" dirty="0">
               <a:solidFill>
                 <a:srgbClr val="0070C0"/>
               </a:solidFill>
@@ -12384,36 +15816,41 @@
               <a:cs typeface="Arial" panose="020B0604020202020204" pitchFamily="34" charset="0"/>
             </a:endParaRPr>
           </a:p>
-        </p:txBody>
-      </p:sp>
-      <p:sp>
-        <p:nvSpPr>
-          <p:cNvPr id="13" name="ZoneTexte 12">
-            <a:extLst>
-              <a:ext uri="{FF2B5EF4-FFF2-40B4-BE49-F238E27FC236}">
-                <a16:creationId xmlns:a16="http://schemas.microsoft.com/office/drawing/2014/main" id="{3FCE2993-2150-6FF2-9D6A-A56116FCCFDB}"/>
-              </a:ext>
-            </a:extLst>
-          </p:cNvPr>
-          <p:cNvSpPr txBox="1"/>
-          <p:nvPr/>
-        </p:nvSpPr>
-        <p:spPr>
-          <a:xfrm>
-            <a:off x="758645" y="4887920"/>
-            <a:ext cx="9863173" cy="830997"/>
-          </a:xfrm>
-          <a:prstGeom prst="rect">
-            <a:avLst/>
-          </a:prstGeom>
-          <a:noFill/>
-        </p:spPr>
-        <p:txBody>
-          <a:bodyPr wrap="square" rtlCol="0">
-            <a:spAutoFit/>
-          </a:bodyPr>
-          <a:lstStyle/>
-          <a:p>
+          <a:p>
+            <a:pPr marL="171450" indent="-171450">
+              <a:buFontTx/>
+              <a:buChar char="-"/>
+            </a:pPr>
+            <a:r>
+              <a:rPr lang="fr-FR" sz="1600" u="sng" dirty="0">
+                <a:solidFill>
+                  <a:srgbClr val="0070C0"/>
+                </a:solidFill>
+                <a:latin typeface="Arial" panose="020B0604020202020204" pitchFamily="34" charset="0"/>
+                <a:cs typeface="Arial" panose="020B0604020202020204" pitchFamily="34" charset="0"/>
+              </a:rPr>
+              <a:t>Consultation et </a:t>
+            </a:r>
+            <a:r>
+              <a:rPr lang="fr-FR" sz="1600" u="sng" dirty="0" err="1">
+                <a:solidFill>
+                  <a:srgbClr val="0070C0"/>
+                </a:solidFill>
+                <a:latin typeface="Arial" panose="020B0604020202020204" pitchFamily="34" charset="0"/>
+                <a:cs typeface="Arial" panose="020B0604020202020204" pitchFamily="34" charset="0"/>
+              </a:rPr>
+              <a:t>reportin</a:t>
+            </a:r>
+            <a:r>
+              <a:rPr lang="fr-FR" sz="1600" dirty="0" err="1">
+                <a:solidFill>
+                  <a:srgbClr val="0070C0"/>
+                </a:solidFill>
+                <a:latin typeface="Arial" panose="020B0604020202020204" pitchFamily="34" charset="0"/>
+                <a:cs typeface="Arial" panose="020B0604020202020204" pitchFamily="34" charset="0"/>
+              </a:rPr>
+              <a:t>g</a:t>
+            </a:r>
             <a:r>
               <a:rPr lang="fr-FR" sz="1600" dirty="0">
                 <a:solidFill>
@@ -12422,17 +15859,27 @@
                 <a:latin typeface="Arial" panose="020B0604020202020204" pitchFamily="34" charset="0"/>
                 <a:cs typeface="Arial" panose="020B0604020202020204" pitchFamily="34" charset="0"/>
               </a:rPr>
-              <a:t>Service cloud de MongoDB </a:t>
-            </a:r>
-            <a:r>
-              <a:rPr lang="fr-FR" sz="1600" i="1" dirty="0">
-                <a:solidFill>
-                  <a:srgbClr val="0070C0"/>
-                </a:solidFill>
-                <a:latin typeface="Arial" panose="020B0604020202020204" pitchFamily="34" charset="0"/>
-                <a:cs typeface="Arial" panose="020B0604020202020204" pitchFamily="34" charset="0"/>
-              </a:rPr>
-              <a:t>(éditeur)</a:t>
+              <a:t> :</a:t>
+            </a:r>
+            <a:r>
+              <a:rPr lang="fr-FR" sz="1600" u="sng" dirty="0">
+                <a:solidFill>
+                  <a:srgbClr val="0070C0"/>
+                </a:solidFill>
+                <a:latin typeface="Arial" panose="020B0604020202020204" pitchFamily="34" charset="0"/>
+                <a:cs typeface="Arial" panose="020B0604020202020204" pitchFamily="34" charset="0"/>
+              </a:rPr>
+              <a:t> </a:t>
+            </a:r>
+            <a:r>
+              <a:rPr lang="fr-FR" sz="1600" b="1" dirty="0" err="1">
+                <a:solidFill>
+                  <a:srgbClr val="0070C0"/>
+                </a:solidFill>
+                <a:latin typeface="Arial" panose="020B0604020202020204" pitchFamily="34" charset="0"/>
+                <a:cs typeface="Arial" panose="020B0604020202020204" pitchFamily="34" charset="0"/>
+              </a:rPr>
+              <a:t>readonly_user</a:t>
             </a:r>
             <a:r>
               <a:rPr lang="fr-FR" sz="1600" dirty="0">
@@ -12442,13 +15889,13 @@
                 <a:latin typeface="Arial" panose="020B0604020202020204" pitchFamily="34" charset="0"/>
                 <a:cs typeface="Arial" panose="020B0604020202020204" pitchFamily="34" charset="0"/>
               </a:rPr>
-              <a:t>, hébergé sur l'infrastructure AWS.</a:t>
-            </a:r>
-          </a:p>
-          <a:p>
-            <a:pPr marL="285750" indent="-285750">
-              <a:buFont typeface="Arial" panose="020B0604020202020204" pitchFamily="34" charset="0"/>
-              <a:buChar char="•"/>
+              <a:t>.</a:t>
+            </a:r>
+          </a:p>
+          <a:p>
+            <a:pPr marL="628650" lvl="1" indent="-171450">
+              <a:buFontTx/>
+              <a:buChar char="-"/>
             </a:pPr>
             <a:r>
               <a:rPr lang="fr-FR" sz="1600" b="1" dirty="0">
@@ -12458,7 +15905,7 @@
                 <a:latin typeface="Arial" panose="020B0604020202020204" pitchFamily="34" charset="0"/>
                 <a:cs typeface="Arial" panose="020B0604020202020204" pitchFamily="34" charset="0"/>
               </a:rPr>
-              <a:t>Fonctionnalités MongoDB Avancées :</a:t>
+              <a:t>Utilisation</a:t>
             </a:r>
             <a:r>
               <a:rPr lang="fr-FR" sz="1600" dirty="0">
@@ -12468,14 +15915,8 @@
                 <a:latin typeface="Arial" panose="020B0604020202020204" pitchFamily="34" charset="0"/>
                 <a:cs typeface="Arial" panose="020B0604020202020204" pitchFamily="34" charset="0"/>
               </a:rPr>
-              <a:t> Accès direct aux outils d'analyse et de déploiement de l'éditeur.</a:t>
-            </a:r>
-          </a:p>
-          <a:p>
-            <a:pPr marL="285750" indent="-285750">
-              <a:buFont typeface="Arial" panose="020B0604020202020204" pitchFamily="34" charset="0"/>
-              <a:buChar char="•"/>
-            </a:pPr>
+              <a:t> de la base de données en </a:t>
+            </a:r>
             <a:r>
               <a:rPr lang="fr-FR" sz="1600" b="1" dirty="0">
                 <a:solidFill>
@@ -12484,7 +15925,7 @@
                 <a:latin typeface="Arial" panose="020B0604020202020204" pitchFamily="34" charset="0"/>
                 <a:cs typeface="Arial" panose="020B0604020202020204" pitchFamily="34" charset="0"/>
               </a:rPr>
-              <a:t>Déploiement</a:t>
+              <a:t>lecture seul</a:t>
             </a:r>
             <a:r>
               <a:rPr lang="fr-FR" sz="1600" dirty="0">
@@ -12494,27 +15935,7 @@
                 <a:latin typeface="Arial" panose="020B0604020202020204" pitchFamily="34" charset="0"/>
                 <a:cs typeface="Arial" panose="020B0604020202020204" pitchFamily="34" charset="0"/>
               </a:rPr>
-              <a:t> </a:t>
-            </a:r>
-            <a:r>
-              <a:rPr lang="fr-FR" sz="1600" b="1" dirty="0" err="1">
-                <a:solidFill>
-                  <a:srgbClr val="0070C0"/>
-                </a:solidFill>
-                <a:latin typeface="Arial" panose="020B0604020202020204" pitchFamily="34" charset="0"/>
-                <a:cs typeface="Arial" panose="020B0604020202020204" pitchFamily="34" charset="0"/>
-              </a:rPr>
-              <a:t>Multi-Cloud</a:t>
-            </a:r>
-            <a:r>
-              <a:rPr lang="fr-FR" sz="1600" dirty="0">
-                <a:solidFill>
-                  <a:srgbClr val="0070C0"/>
-                </a:solidFill>
-                <a:latin typeface="Arial" panose="020B0604020202020204" pitchFamily="34" charset="0"/>
-                <a:cs typeface="Arial" panose="020B0604020202020204" pitchFamily="34" charset="0"/>
-              </a:rPr>
-              <a:t> facilité.</a:t>
+              <a:t>.</a:t>
             </a:r>
           </a:p>
         </p:txBody>
@@ -12522,7 +15943,7 @@
     </p:spTree>
     <p:extLst>
       <p:ext uri="{BB962C8B-B14F-4D97-AF65-F5344CB8AC3E}">
-        <p14:creationId xmlns:p14="http://schemas.microsoft.com/office/powerpoint/2010/main" val="1055830833"/>
+        <p14:creationId xmlns:p14="http://schemas.microsoft.com/office/powerpoint/2010/main" val="3979086031"/>
       </p:ext>
     </p:extLst>
   </p:cSld>
